--- a/public/ppt-beautify/full/blue-business.pptx
+++ b/public/ppt-beautify/full/blue-business.pptx
@@ -2095,7 +2095,7 @@
           <a:bodyPr wrap="square" rtlCol="0" anchor="ctr"/>
           <a:lstStyle/>
           <a:p>
-            <a:pPr indent="0" marL="0">
+            <a:pPr algn="l" indent="0" marL="0">
               <a:buNone/>
             </a:pPr>
             <a:r>
@@ -2134,7 +2134,7 @@
           <a:bodyPr wrap="square" rtlCol="0" anchor="ctr"/>
           <a:lstStyle/>
           <a:p>
-            <a:pPr indent="0" marL="0">
+            <a:pPr algn="l" indent="0" marL="0">
               <a:buNone/>
             </a:pPr>
             <a:r>
@@ -2270,26 +2270,6 @@
         </p:nvSpPr>
         <p:spPr>
           <a:xfrm>
-            <a:off x="0" y="0"/>
-            <a:ext cx="109728" cy="5143500"/>
-          </a:xfrm>
-          <a:prstGeom prst="rect">
-            <a:avLst/>
-          </a:prstGeom>
-          <a:solidFill>
-            <a:srgbClr val="60A5FA"/>
-          </a:solidFill>
-          <a:ln/>
-        </p:spPr>
-      </p:sp>
-      <p:sp>
-        <p:nvSpPr>
-          <p:cNvPr id="3" name="Shape 1"/>
-          <p:cNvSpPr/>
-          <p:nvPr/>
-        </p:nvSpPr>
-        <p:spPr>
-          <a:xfrm>
             <a:off x="6720840" y="-182880"/>
             <a:ext cx="2743200" cy="2377440"/>
           </a:xfrm>
@@ -2311,7 +2291,7 @@
       </p:sp>
       <p:sp>
         <p:nvSpPr>
-          <p:cNvPr id="4" name="Shape 2"/>
+          <p:cNvPr id="3" name="Shape 1"/>
           <p:cNvSpPr/>
           <p:nvPr/>
         </p:nvSpPr>
@@ -2338,127 +2318,34 @@
       </p:sp>
       <p:sp>
         <p:nvSpPr>
+          <p:cNvPr id="4" name="Shape 2"/>
+          <p:cNvSpPr/>
+          <p:nvPr/>
+        </p:nvSpPr>
+        <p:spPr>
+          <a:xfrm>
+            <a:off x="0" y="0"/>
+            <a:ext cx="2423160" cy="5143500"/>
+          </a:xfrm>
+          <a:prstGeom prst="rect">
+            <a:avLst/>
+          </a:prstGeom>
+          <a:solidFill>
+            <a:srgbClr val="1E3A5F"/>
+          </a:solidFill>
+          <a:ln/>
+        </p:spPr>
+      </p:sp>
+      <p:sp>
+        <p:nvSpPr>
           <p:cNvPr id="5" name="Shape 3"/>
           <p:cNvSpPr/>
           <p:nvPr/>
         </p:nvSpPr>
         <p:spPr>
           <a:xfrm>
-            <a:off x="7909560" y="201168"/>
-            <a:ext cx="685800" cy="685800"/>
-          </a:xfrm>
-          <a:prstGeom prst="ellipse">
-            <a:avLst/>
-          </a:prstGeom>
-          <a:solidFill>
-            <a:srgbClr val="EFF6FF">
-              <a:alpha val="0"/>
-            </a:srgbClr>
-          </a:solidFill>
-          <a:ln w="15875">
-            <a:solidFill>
-              <a:srgbClr val="60A5FA"/>
-            </a:solidFill>
-            <a:prstDash val="solid"/>
-          </a:ln>
-        </p:spPr>
-      </p:sp>
-      <p:sp>
-        <p:nvSpPr>
-          <p:cNvPr id="6" name="Shape 4"/>
-          <p:cNvSpPr/>
-          <p:nvPr/>
-        </p:nvSpPr>
-        <p:spPr>
-          <a:xfrm>
-            <a:off x="8183880" y="384048"/>
-            <a:ext cx="384048" cy="384048"/>
-          </a:xfrm>
-          <a:prstGeom prst="ellipse">
-            <a:avLst/>
-          </a:prstGeom>
-          <a:solidFill>
-            <a:srgbClr val="60A5FA">
-              <a:alpha val="35000"/>
-            </a:srgbClr>
-          </a:solidFill>
-          <a:ln/>
-        </p:spPr>
-      </p:sp>
-      <p:sp>
-        <p:nvSpPr>
-          <p:cNvPr id="7" name="Shape 5"/>
-          <p:cNvSpPr/>
-          <p:nvPr/>
-        </p:nvSpPr>
-        <p:spPr>
-          <a:xfrm>
-            <a:off x="109728" y="0"/>
-            <a:ext cx="9034272" cy="960120"/>
-          </a:xfrm>
-          <a:prstGeom prst="rect">
-            <a:avLst/>
-          </a:prstGeom>
-          <a:solidFill>
-            <a:srgbClr val="1E3A5F"/>
-          </a:solidFill>
-          <a:ln/>
-        </p:spPr>
-      </p:sp>
-      <p:sp>
-        <p:nvSpPr>
-          <p:cNvPr id="8" name="Shape 6"/>
-          <p:cNvSpPr/>
-          <p:nvPr/>
-        </p:nvSpPr>
-        <p:spPr>
-          <a:xfrm>
-            <a:off x="4389120" y="0"/>
-            <a:ext cx="4754880" cy="960120"/>
-          </a:xfrm>
-          <a:prstGeom prst="rect">
-            <a:avLst/>
-          </a:prstGeom>
-          <a:solidFill>
-            <a:srgbClr val="2563EB">
-              <a:alpha val="75000"/>
-            </a:srgbClr>
-          </a:solidFill>
-          <a:ln/>
-        </p:spPr>
-      </p:sp>
-      <p:sp>
-        <p:nvSpPr>
-          <p:cNvPr id="9" name="Shape 7"/>
-          <p:cNvSpPr/>
-          <p:nvPr/>
-        </p:nvSpPr>
-        <p:spPr>
-          <a:xfrm rot="21000000">
-            <a:off x="6263640" y="-320040"/>
-            <a:ext cx="3108960" cy="1234440"/>
-          </a:xfrm>
-          <a:prstGeom prst="rect">
-            <a:avLst/>
-          </a:prstGeom>
-          <a:solidFill>
-            <a:srgbClr val="FFFFFF">
-              <a:alpha val="12000"/>
-            </a:srgbClr>
-          </a:solidFill>
-          <a:ln/>
-        </p:spPr>
-      </p:sp>
-      <p:sp>
-        <p:nvSpPr>
-          <p:cNvPr id="10" name="Shape 8"/>
-          <p:cNvSpPr/>
-          <p:nvPr/>
-        </p:nvSpPr>
-        <p:spPr>
-          <a:xfrm>
-            <a:off x="109728" y="932688"/>
-            <a:ext cx="9034272" cy="36576"/>
+            <a:off x="2423160" y="0"/>
+            <a:ext cx="54864" cy="5143500"/>
           </a:xfrm>
           <a:prstGeom prst="rect">
             <a:avLst/>
@@ -2471,45 +2358,14 @@
       </p:sp>
       <p:sp>
         <p:nvSpPr>
-          <p:cNvPr id="11" name="Shape 9"/>
-          <p:cNvSpPr/>
-          <p:nvPr/>
-        </p:nvSpPr>
-        <p:spPr>
-          <a:xfrm>
-            <a:off x="475488" y="91440"/>
-            <a:ext cx="960120" cy="201168"/>
-          </a:xfrm>
-          <a:prstGeom prst="roundRect">
-            <a:avLst>
-              <a:gd name="adj" fmla="val 227273"/>
-            </a:avLst>
-          </a:prstGeom>
-          <a:solidFill>
-            <a:srgbClr val="FFFFFF">
-              <a:alpha val="12000"/>
-            </a:srgbClr>
-          </a:solidFill>
-          <a:ln w="6350">
-            <a:solidFill>
-              <a:srgbClr val="FFFFFF">
-                <a:alpha val="20000"/>
-              </a:srgbClr>
-            </a:solidFill>
-            <a:prstDash val="solid"/>
-          </a:ln>
-        </p:spPr>
-      </p:sp>
-      <p:sp>
-        <p:nvSpPr>
-          <p:cNvPr id="12" name="Text 10"/>
-          <p:cNvSpPr/>
-          <p:nvPr/>
-        </p:nvSpPr>
-        <p:spPr>
-          <a:xfrm>
-            <a:off x="502920" y="109728"/>
-            <a:ext cx="914400" cy="164592"/>
+          <p:cNvPr id="6" name="Text 4"/>
+          <p:cNvSpPr/>
+          <p:nvPr/>
+        </p:nvSpPr>
+        <p:spPr>
+          <a:xfrm>
+            <a:off x="228600" y="411480"/>
+            <a:ext cx="1965960" cy="4114800"/>
           </a:xfrm>
           <a:prstGeom prst="rect">
             <a:avLst/>
@@ -2518,55 +2374,14 @@
           <a:ln/>
         </p:spPr>
         <p:txBody>
-          <a:bodyPr wrap="square" rtlCol="0" anchor="ctr"/>
+          <a:bodyPr wrap="square" rtlCol="0" anchor="t"/>
           <a:lstStyle/>
           <a:p>
             <a:pPr indent="0" marL="0">
               <a:buNone/>
             </a:pPr>
             <a:r>
-              <a:rPr lang="en-US" sz="700" b="1" spc="120" kern="0" dirty="0">
-                <a:solidFill>
-                  <a:srgbClr val="FFFFFF">
-                    <a:alpha val="75000"/>
-                  </a:srgbClr>
-                </a:solidFill>
-                <a:latin typeface="Microsoft YaHei" pitchFamily="34" charset="0"/>
-                <a:ea typeface="Microsoft YaHei" pitchFamily="34" charset="-122"/>
-                <a:cs typeface="Microsoft YaHei" pitchFamily="34" charset="-120"/>
-              </a:rPr>
-              <a:t>KEY POINTS</a:t>
-            </a:r>
-            <a:endParaRPr lang="en-US" sz="700" dirty="0"/>
-          </a:p>
-        </p:txBody>
-      </p:sp>
-      <p:sp>
-        <p:nvSpPr>
-          <p:cNvPr id="13" name="Text 11"/>
-          <p:cNvSpPr/>
-          <p:nvPr/>
-        </p:nvSpPr>
-        <p:spPr>
-          <a:xfrm>
-            <a:off x="502920" y="329184"/>
-            <a:ext cx="8046720" cy="530352"/>
-          </a:xfrm>
-          <a:prstGeom prst="rect">
-            <a:avLst/>
-          </a:prstGeom>
-          <a:noFill/>
-          <a:ln/>
-        </p:spPr>
-        <p:txBody>
-          <a:bodyPr wrap="square" rtlCol="0" anchor="t"/>
-          <a:lstStyle/>
-          <a:p>
-            <a:pPr indent="0" marL="0">
-              <a:buNone/>
-            </a:pPr>
-            <a:r>
-              <a:rPr lang="en-US" sz="2200" b="1" dirty="0">
+              <a:rPr lang="en-US" sz="1800" b="1" dirty="0">
                 <a:solidFill>
                   <a:srgbClr val="FFFFFF"/>
                 </a:solidFill>
@@ -2576,20 +2391,20 @@
               </a:rPr>
               <a:t>CC_TITLE</a:t>
             </a:r>
-            <a:endParaRPr lang="en-US" sz="2200" dirty="0"/>
-          </a:p>
-        </p:txBody>
-      </p:sp>
-      <p:sp>
-        <p:nvSpPr>
-          <p:cNvPr id="14" name="Shape 12"/>
-          <p:cNvSpPr/>
-          <p:nvPr/>
-        </p:nvSpPr>
-        <p:spPr>
-          <a:xfrm>
-            <a:off x="411480" y="1078992"/>
-            <a:ext cx="8321040" cy="3493008"/>
+            <a:endParaRPr lang="en-US" sz="1800" dirty="0"/>
+          </a:p>
+        </p:txBody>
+      </p:sp>
+      <p:sp>
+        <p:nvSpPr>
+          <p:cNvPr id="7" name="Shape 5"/>
+          <p:cNvSpPr/>
+          <p:nvPr/>
+        </p:nvSpPr>
+        <p:spPr>
+          <a:xfrm>
+            <a:off x="2606040" y="1078992"/>
+            <a:ext cx="6126480" cy="3493008"/>
           </a:xfrm>
           <a:prstGeom prst="roundRect">
             <a:avLst>
@@ -2616,7 +2431,7 @@
       </p:sp>
       <p:sp>
         <p:nvSpPr>
-          <p:cNvPr id="15" name="Shape 13"/>
+          <p:cNvPr id="8" name="Shape 6"/>
           <p:cNvSpPr/>
           <p:nvPr/>
         </p:nvSpPr>
@@ -2645,7 +2460,7 @@
       </p:sp>
       <p:sp>
         <p:nvSpPr>
-          <p:cNvPr id="16" name="Shape 14"/>
+          <p:cNvPr id="9" name="Shape 7"/>
           <p:cNvSpPr/>
           <p:nvPr/>
         </p:nvSpPr>
@@ -2667,7 +2482,7 @@
       </p:sp>
       <p:sp>
         <p:nvSpPr>
-          <p:cNvPr id="17" name="Shape 15"/>
+          <p:cNvPr id="10" name="Shape 8"/>
           <p:cNvSpPr/>
           <p:nvPr/>
         </p:nvSpPr>
@@ -2701,36 +2516,7 @@
       </p:sp>
       <p:sp>
         <p:nvSpPr>
-          <p:cNvPr id="18" name="Shape 16"/>
-          <p:cNvSpPr/>
-          <p:nvPr/>
-        </p:nvSpPr>
-        <p:spPr>
-          <a:xfrm>
-            <a:off x="796625" y="1500713"/>
-            <a:ext cx="190927" cy="190927"/>
-          </a:xfrm>
-          <a:prstGeom prst="roundRect">
-            <a:avLst>
-              <a:gd name="adj" fmla="val 181992"/>
-            </a:avLst>
-          </a:prstGeom>
-          <a:solidFill>
-            <a:srgbClr val="60A5FA">
-              <a:alpha val="80000"/>
-            </a:srgbClr>
-          </a:solidFill>
-          <a:ln w="12700">
-            <a:solidFill>
-              <a:srgbClr val="333333"/>
-            </a:solidFill>
-            <a:prstDash val="solid"/>
-          </a:ln>
-        </p:spPr>
-      </p:sp>
-      <p:sp>
-        <p:nvSpPr>
-          <p:cNvPr id="19" name="Text 17"/>
+          <p:cNvPr id="11" name="Text 9"/>
           <p:cNvSpPr/>
           <p:nvPr/>
         </p:nvSpPr>
@@ -2769,7 +2555,7 @@
       </p:sp>
       <p:sp>
         <p:nvSpPr>
-          <p:cNvPr id="20" name="Text 18"/>
+          <p:cNvPr id="12" name="Text 10"/>
           <p:cNvSpPr/>
           <p:nvPr/>
         </p:nvSpPr>
@@ -2789,9 +2575,6 @@
           <a:lstStyle/>
           <a:p>
             <a:pPr indent="0" marL="0">
-              <a:lnSpc>
-                <a:spcPct val="115000"/>
-              </a:lnSpc>
               <a:buNone/>
             </a:pPr>
             <a:r>
@@ -2811,7 +2594,7 @@
       </p:sp>
       <p:sp>
         <p:nvSpPr>
-          <p:cNvPr id="21" name="Shape 19"/>
+          <p:cNvPr id="13" name="Shape 11"/>
           <p:cNvSpPr/>
           <p:nvPr/>
         </p:nvSpPr>
@@ -2840,7 +2623,7 @@
       </p:sp>
       <p:sp>
         <p:nvSpPr>
-          <p:cNvPr id="22" name="Shape 20"/>
+          <p:cNvPr id="14" name="Shape 12"/>
           <p:cNvSpPr/>
           <p:nvPr/>
         </p:nvSpPr>
@@ -2862,7 +2645,7 @@
       </p:sp>
       <p:sp>
         <p:nvSpPr>
-          <p:cNvPr id="23" name="Shape 21"/>
+          <p:cNvPr id="15" name="Shape 13"/>
           <p:cNvSpPr/>
           <p:nvPr/>
         </p:nvSpPr>
@@ -2896,36 +2679,7 @@
       </p:sp>
       <p:sp>
         <p:nvSpPr>
-          <p:cNvPr id="24" name="Shape 22"/>
-          <p:cNvSpPr/>
-          <p:nvPr/>
-        </p:nvSpPr>
-        <p:spPr>
-          <a:xfrm>
-            <a:off x="796625" y="2122505"/>
-            <a:ext cx="190927" cy="190927"/>
-          </a:xfrm>
-          <a:prstGeom prst="roundRect">
-            <a:avLst>
-              <a:gd name="adj" fmla="val 181992"/>
-            </a:avLst>
-          </a:prstGeom>
-          <a:solidFill>
-            <a:srgbClr val="60A5FA">
-              <a:alpha val="80000"/>
-            </a:srgbClr>
-          </a:solidFill>
-          <a:ln w="12700">
-            <a:solidFill>
-              <a:srgbClr val="333333"/>
-            </a:solidFill>
-            <a:prstDash val="solid"/>
-          </a:ln>
-        </p:spPr>
-      </p:sp>
-      <p:sp>
-        <p:nvSpPr>
-          <p:cNvPr id="25" name="Text 23"/>
+          <p:cNvPr id="16" name="Text 14"/>
           <p:cNvSpPr/>
           <p:nvPr/>
         </p:nvSpPr>
@@ -2964,7 +2718,7 @@
       </p:sp>
       <p:sp>
         <p:nvSpPr>
-          <p:cNvPr id="26" name="Text 24"/>
+          <p:cNvPr id="17" name="Text 15"/>
           <p:cNvSpPr/>
           <p:nvPr/>
         </p:nvSpPr>
@@ -2984,9 +2738,6 @@
           <a:lstStyle/>
           <a:p>
             <a:pPr indent="0" marL="0">
-              <a:lnSpc>
-                <a:spcPct val="115000"/>
-              </a:lnSpc>
               <a:buNone/>
             </a:pPr>
             <a:r>
@@ -3006,7 +2757,7 @@
       </p:sp>
       <p:sp>
         <p:nvSpPr>
-          <p:cNvPr id="27" name="Shape 25"/>
+          <p:cNvPr id="18" name="Shape 16"/>
           <p:cNvSpPr/>
           <p:nvPr/>
         </p:nvSpPr>
@@ -3035,7 +2786,7 @@
       </p:sp>
       <p:sp>
         <p:nvSpPr>
-          <p:cNvPr id="28" name="Shape 26"/>
+          <p:cNvPr id="19" name="Shape 17"/>
           <p:cNvSpPr/>
           <p:nvPr/>
         </p:nvSpPr>
@@ -3057,7 +2808,7 @@
       </p:sp>
       <p:sp>
         <p:nvSpPr>
-          <p:cNvPr id="29" name="Shape 27"/>
+          <p:cNvPr id="20" name="Shape 18"/>
           <p:cNvSpPr/>
           <p:nvPr/>
         </p:nvSpPr>
@@ -3091,36 +2842,7 @@
       </p:sp>
       <p:sp>
         <p:nvSpPr>
-          <p:cNvPr id="30" name="Shape 28"/>
-          <p:cNvSpPr/>
-          <p:nvPr/>
-        </p:nvSpPr>
-        <p:spPr>
-          <a:xfrm>
-            <a:off x="796625" y="2744297"/>
-            <a:ext cx="190927" cy="190927"/>
-          </a:xfrm>
-          <a:prstGeom prst="roundRect">
-            <a:avLst>
-              <a:gd name="adj" fmla="val 181992"/>
-            </a:avLst>
-          </a:prstGeom>
-          <a:solidFill>
-            <a:srgbClr val="60A5FA">
-              <a:alpha val="80000"/>
-            </a:srgbClr>
-          </a:solidFill>
-          <a:ln w="12700">
-            <a:solidFill>
-              <a:srgbClr val="333333"/>
-            </a:solidFill>
-            <a:prstDash val="solid"/>
-          </a:ln>
-        </p:spPr>
-      </p:sp>
-      <p:sp>
-        <p:nvSpPr>
-          <p:cNvPr id="31" name="Text 29"/>
+          <p:cNvPr id="21" name="Text 19"/>
           <p:cNvSpPr/>
           <p:nvPr/>
         </p:nvSpPr>
@@ -3159,7 +2881,7 @@
       </p:sp>
       <p:sp>
         <p:nvSpPr>
-          <p:cNvPr id="32" name="Text 30"/>
+          <p:cNvPr id="22" name="Text 20"/>
           <p:cNvSpPr/>
           <p:nvPr/>
         </p:nvSpPr>
@@ -3179,9 +2901,6 @@
           <a:lstStyle/>
           <a:p>
             <a:pPr indent="0" marL="0">
-              <a:lnSpc>
-                <a:spcPct val="115000"/>
-              </a:lnSpc>
               <a:buNone/>
             </a:pPr>
             <a:r>
@@ -3201,7 +2920,7 @@
       </p:sp>
       <p:sp>
         <p:nvSpPr>
-          <p:cNvPr id="33" name="Shape 31"/>
+          <p:cNvPr id="23" name="Shape 21"/>
           <p:cNvSpPr/>
           <p:nvPr/>
         </p:nvSpPr>
@@ -3230,7 +2949,7 @@
       </p:sp>
       <p:sp>
         <p:nvSpPr>
-          <p:cNvPr id="34" name="Shape 32"/>
+          <p:cNvPr id="24" name="Shape 22"/>
           <p:cNvSpPr/>
           <p:nvPr/>
         </p:nvSpPr>
@@ -3252,7 +2971,7 @@
       </p:sp>
       <p:sp>
         <p:nvSpPr>
-          <p:cNvPr id="35" name="Shape 33"/>
+          <p:cNvPr id="25" name="Shape 23"/>
           <p:cNvSpPr/>
           <p:nvPr/>
         </p:nvSpPr>
@@ -3286,36 +3005,7 @@
       </p:sp>
       <p:sp>
         <p:nvSpPr>
-          <p:cNvPr id="36" name="Shape 34"/>
-          <p:cNvSpPr/>
-          <p:nvPr/>
-        </p:nvSpPr>
-        <p:spPr>
-          <a:xfrm>
-            <a:off x="796625" y="3366089"/>
-            <a:ext cx="190927" cy="190927"/>
-          </a:xfrm>
-          <a:prstGeom prst="roundRect">
-            <a:avLst>
-              <a:gd name="adj" fmla="val 181992"/>
-            </a:avLst>
-          </a:prstGeom>
-          <a:solidFill>
-            <a:srgbClr val="60A5FA">
-              <a:alpha val="80000"/>
-            </a:srgbClr>
-          </a:solidFill>
-          <a:ln w="12700">
-            <a:solidFill>
-              <a:srgbClr val="333333"/>
-            </a:solidFill>
-            <a:prstDash val="solid"/>
-          </a:ln>
-        </p:spPr>
-      </p:sp>
-      <p:sp>
-        <p:nvSpPr>
-          <p:cNvPr id="37" name="Text 35"/>
+          <p:cNvPr id="26" name="Text 24"/>
           <p:cNvSpPr/>
           <p:nvPr/>
         </p:nvSpPr>
@@ -3354,7 +3044,7 @@
       </p:sp>
       <p:sp>
         <p:nvSpPr>
-          <p:cNvPr id="38" name="Text 36"/>
+          <p:cNvPr id="27" name="Text 25"/>
           <p:cNvSpPr/>
           <p:nvPr/>
         </p:nvSpPr>
@@ -3374,9 +3064,6 @@
           <a:lstStyle/>
           <a:p>
             <a:pPr indent="0" marL="0">
-              <a:lnSpc>
-                <a:spcPct val="115000"/>
-              </a:lnSpc>
               <a:buNone/>
             </a:pPr>
             <a:r>
@@ -3396,7 +3083,7 @@
       </p:sp>
       <p:sp>
         <p:nvSpPr>
-          <p:cNvPr id="39" name="Shape 37"/>
+          <p:cNvPr id="28" name="Shape 26"/>
           <p:cNvSpPr/>
           <p:nvPr/>
         </p:nvSpPr>
@@ -3425,7 +3112,7 @@
       </p:sp>
       <p:sp>
         <p:nvSpPr>
-          <p:cNvPr id="40" name="Shape 38"/>
+          <p:cNvPr id="29" name="Shape 27"/>
           <p:cNvSpPr/>
           <p:nvPr/>
         </p:nvSpPr>
@@ -3447,7 +3134,7 @@
       </p:sp>
       <p:sp>
         <p:nvSpPr>
-          <p:cNvPr id="41" name="Shape 39"/>
+          <p:cNvPr id="30" name="Shape 28"/>
           <p:cNvSpPr/>
           <p:nvPr/>
         </p:nvSpPr>
@@ -3481,36 +3168,7 @@
       </p:sp>
       <p:sp>
         <p:nvSpPr>
-          <p:cNvPr id="42" name="Shape 40"/>
-          <p:cNvSpPr/>
-          <p:nvPr/>
-        </p:nvSpPr>
-        <p:spPr>
-          <a:xfrm>
-            <a:off x="796625" y="3987881"/>
-            <a:ext cx="190927" cy="190927"/>
-          </a:xfrm>
-          <a:prstGeom prst="roundRect">
-            <a:avLst>
-              <a:gd name="adj" fmla="val 181992"/>
-            </a:avLst>
-          </a:prstGeom>
-          <a:solidFill>
-            <a:srgbClr val="60A5FA">
-              <a:alpha val="80000"/>
-            </a:srgbClr>
-          </a:solidFill>
-          <a:ln w="12700">
-            <a:solidFill>
-              <a:srgbClr val="333333"/>
-            </a:solidFill>
-            <a:prstDash val="solid"/>
-          </a:ln>
-        </p:spPr>
-      </p:sp>
-      <p:sp>
-        <p:nvSpPr>
-          <p:cNvPr id="43" name="Text 41"/>
+          <p:cNvPr id="31" name="Text 29"/>
           <p:cNvSpPr/>
           <p:nvPr/>
         </p:nvSpPr>
@@ -3549,7 +3207,7 @@
       </p:sp>
       <p:sp>
         <p:nvSpPr>
-          <p:cNvPr id="44" name="Text 42"/>
+          <p:cNvPr id="32" name="Text 30"/>
           <p:cNvSpPr/>
           <p:nvPr/>
         </p:nvSpPr>
@@ -3569,9 +3227,6 @@
           <a:lstStyle/>
           <a:p>
             <a:pPr indent="0" marL="0">
-              <a:lnSpc>
-                <a:spcPct val="115000"/>
-              </a:lnSpc>
               <a:buNone/>
             </a:pPr>
             <a:r>
@@ -3591,14 +3246,14 @@
       </p:sp>
       <p:sp>
         <p:nvSpPr>
-          <p:cNvPr id="45" name="Shape 43"/>
-          <p:cNvSpPr/>
-          <p:nvPr/>
-        </p:nvSpPr>
-        <p:spPr>
-          <a:xfrm>
-            <a:off x="109728" y="4681728"/>
-            <a:ext cx="9034272" cy="457200"/>
+          <p:cNvPr id="33" name="Shape 31"/>
+          <p:cNvSpPr/>
+          <p:nvPr/>
+        </p:nvSpPr>
+        <p:spPr>
+          <a:xfrm>
+            <a:off x="2478024" y="4681728"/>
+            <a:ext cx="6665976" cy="457200"/>
           </a:xfrm>
           <a:prstGeom prst="rect">
             <a:avLst/>
@@ -3611,66 +3266,13 @@
       </p:sp>
       <p:sp>
         <p:nvSpPr>
-          <p:cNvPr id="46" name="Shape 44"/>
-          <p:cNvSpPr/>
-          <p:nvPr/>
-        </p:nvSpPr>
-        <p:spPr>
-          <a:xfrm>
-            <a:off x="109728" y="4681728"/>
-            <a:ext cx="2529596" cy="457200"/>
-          </a:xfrm>
-          <a:prstGeom prst="rect">
-            <a:avLst/>
-          </a:prstGeom>
-          <a:solidFill>
-            <a:srgbClr val="60A5FA">
-              <a:alpha val="90000"/>
-            </a:srgbClr>
-          </a:solidFill>
-          <a:ln/>
-        </p:spPr>
-      </p:sp>
-      <p:sp>
-        <p:nvSpPr>
-          <p:cNvPr id="47" name="Shape 45"/>
-          <p:cNvSpPr/>
-          <p:nvPr/>
-        </p:nvSpPr>
-        <p:spPr>
-          <a:xfrm>
-            <a:off x="8119872" y="4736592"/>
-            <a:ext cx="621792" cy="329184"/>
-          </a:xfrm>
-          <a:prstGeom prst="roundRect">
-            <a:avLst>
-              <a:gd name="adj" fmla="val 138889"/>
-            </a:avLst>
-          </a:prstGeom>
-          <a:solidFill>
-            <a:srgbClr val="FFFFFF">
-              <a:alpha val="15000"/>
-            </a:srgbClr>
-          </a:solidFill>
-          <a:ln w="6350">
-            <a:solidFill>
-              <a:srgbClr val="FFFFFF">
-                <a:alpha val="25000"/>
-              </a:srgbClr>
-            </a:solidFill>
-            <a:prstDash val="solid"/>
-          </a:ln>
-        </p:spPr>
-      </p:sp>
-      <p:sp>
-        <p:nvSpPr>
-          <p:cNvPr id="48" name="Text 46"/>
-          <p:cNvSpPr/>
-          <p:nvPr/>
-        </p:nvSpPr>
-        <p:spPr>
-          <a:xfrm>
-            <a:off x="8119872" y="4736592"/>
+          <p:cNvPr id="34" name="Text 32"/>
+          <p:cNvSpPr/>
+          <p:nvPr/>
+        </p:nvSpPr>
+        <p:spPr>
+          <a:xfrm>
+            <a:off x="8229600" y="4736592"/>
             <a:ext cx="621792" cy="329184"/>
           </a:xfrm>
           <a:prstGeom prst="rect">
@@ -3741,26 +3343,6 @@
         </p:nvSpPr>
         <p:spPr>
           <a:xfrm>
-            <a:off x="0" y="0"/>
-            <a:ext cx="109728" cy="5143500"/>
-          </a:xfrm>
-          <a:prstGeom prst="rect">
-            <a:avLst/>
-          </a:prstGeom>
-          <a:solidFill>
-            <a:srgbClr val="60A5FA"/>
-          </a:solidFill>
-          <a:ln/>
-        </p:spPr>
-      </p:sp>
-      <p:sp>
-        <p:nvSpPr>
-          <p:cNvPr id="3" name="Shape 1"/>
-          <p:cNvSpPr/>
-          <p:nvPr/>
-        </p:nvSpPr>
-        <p:spPr>
-          <a:xfrm>
             <a:off x="6720840" y="-182880"/>
             <a:ext cx="2743200" cy="2377440"/>
           </a:xfrm>
@@ -3782,7 +3364,7 @@
       </p:sp>
       <p:sp>
         <p:nvSpPr>
-          <p:cNvPr id="4" name="Shape 2"/>
+          <p:cNvPr id="3" name="Shape 1"/>
           <p:cNvSpPr/>
           <p:nvPr/>
         </p:nvSpPr>
@@ -3809,127 +3391,34 @@
       </p:sp>
       <p:sp>
         <p:nvSpPr>
+          <p:cNvPr id="4" name="Shape 2"/>
+          <p:cNvSpPr/>
+          <p:nvPr/>
+        </p:nvSpPr>
+        <p:spPr>
+          <a:xfrm>
+            <a:off x="0" y="0"/>
+            <a:ext cx="2423160" cy="5143500"/>
+          </a:xfrm>
+          <a:prstGeom prst="rect">
+            <a:avLst/>
+          </a:prstGeom>
+          <a:solidFill>
+            <a:srgbClr val="1E3A5F"/>
+          </a:solidFill>
+          <a:ln/>
+        </p:spPr>
+      </p:sp>
+      <p:sp>
+        <p:nvSpPr>
           <p:cNvPr id="5" name="Shape 3"/>
           <p:cNvSpPr/>
           <p:nvPr/>
         </p:nvSpPr>
         <p:spPr>
           <a:xfrm>
-            <a:off x="7909560" y="201168"/>
-            <a:ext cx="685800" cy="685800"/>
-          </a:xfrm>
-          <a:prstGeom prst="ellipse">
-            <a:avLst/>
-          </a:prstGeom>
-          <a:solidFill>
-            <a:srgbClr val="EFF6FF">
-              <a:alpha val="0"/>
-            </a:srgbClr>
-          </a:solidFill>
-          <a:ln w="15875">
-            <a:solidFill>
-              <a:srgbClr val="60A5FA"/>
-            </a:solidFill>
-            <a:prstDash val="solid"/>
-          </a:ln>
-        </p:spPr>
-      </p:sp>
-      <p:sp>
-        <p:nvSpPr>
-          <p:cNvPr id="6" name="Shape 4"/>
-          <p:cNvSpPr/>
-          <p:nvPr/>
-        </p:nvSpPr>
-        <p:spPr>
-          <a:xfrm>
-            <a:off x="8183880" y="384048"/>
-            <a:ext cx="384048" cy="384048"/>
-          </a:xfrm>
-          <a:prstGeom prst="ellipse">
-            <a:avLst/>
-          </a:prstGeom>
-          <a:solidFill>
-            <a:srgbClr val="60A5FA">
-              <a:alpha val="35000"/>
-            </a:srgbClr>
-          </a:solidFill>
-          <a:ln/>
-        </p:spPr>
-      </p:sp>
-      <p:sp>
-        <p:nvSpPr>
-          <p:cNvPr id="7" name="Shape 5"/>
-          <p:cNvSpPr/>
-          <p:nvPr/>
-        </p:nvSpPr>
-        <p:spPr>
-          <a:xfrm>
-            <a:off x="109728" y="0"/>
-            <a:ext cx="9034272" cy="960120"/>
-          </a:xfrm>
-          <a:prstGeom prst="rect">
-            <a:avLst/>
-          </a:prstGeom>
-          <a:solidFill>
-            <a:srgbClr val="1E3A5F"/>
-          </a:solidFill>
-          <a:ln/>
-        </p:spPr>
-      </p:sp>
-      <p:sp>
-        <p:nvSpPr>
-          <p:cNvPr id="8" name="Shape 6"/>
-          <p:cNvSpPr/>
-          <p:nvPr/>
-        </p:nvSpPr>
-        <p:spPr>
-          <a:xfrm>
-            <a:off x="4389120" y="0"/>
-            <a:ext cx="4754880" cy="960120"/>
-          </a:xfrm>
-          <a:prstGeom prst="rect">
-            <a:avLst/>
-          </a:prstGeom>
-          <a:solidFill>
-            <a:srgbClr val="2563EB">
-              <a:alpha val="75000"/>
-            </a:srgbClr>
-          </a:solidFill>
-          <a:ln/>
-        </p:spPr>
-      </p:sp>
-      <p:sp>
-        <p:nvSpPr>
-          <p:cNvPr id="9" name="Shape 7"/>
-          <p:cNvSpPr/>
-          <p:nvPr/>
-        </p:nvSpPr>
-        <p:spPr>
-          <a:xfrm rot="21000000">
-            <a:off x="6263640" y="-320040"/>
-            <a:ext cx="3108960" cy="1234440"/>
-          </a:xfrm>
-          <a:prstGeom prst="rect">
-            <a:avLst/>
-          </a:prstGeom>
-          <a:solidFill>
-            <a:srgbClr val="FFFFFF">
-              <a:alpha val="12000"/>
-            </a:srgbClr>
-          </a:solidFill>
-          <a:ln/>
-        </p:spPr>
-      </p:sp>
-      <p:sp>
-        <p:nvSpPr>
-          <p:cNvPr id="10" name="Shape 8"/>
-          <p:cNvSpPr/>
-          <p:nvPr/>
-        </p:nvSpPr>
-        <p:spPr>
-          <a:xfrm>
-            <a:off x="109728" y="932688"/>
-            <a:ext cx="9034272" cy="36576"/>
+            <a:off x="2423160" y="0"/>
+            <a:ext cx="54864" cy="5143500"/>
           </a:xfrm>
           <a:prstGeom prst="rect">
             <a:avLst/>
@@ -3942,45 +3431,14 @@
       </p:sp>
       <p:sp>
         <p:nvSpPr>
-          <p:cNvPr id="11" name="Shape 9"/>
-          <p:cNvSpPr/>
-          <p:nvPr/>
-        </p:nvSpPr>
-        <p:spPr>
-          <a:xfrm>
-            <a:off x="475488" y="91440"/>
-            <a:ext cx="960120" cy="201168"/>
-          </a:xfrm>
-          <a:prstGeom prst="roundRect">
-            <a:avLst>
-              <a:gd name="adj" fmla="val 227273"/>
-            </a:avLst>
-          </a:prstGeom>
-          <a:solidFill>
-            <a:srgbClr val="FFFFFF">
-              <a:alpha val="12000"/>
-            </a:srgbClr>
-          </a:solidFill>
-          <a:ln w="6350">
-            <a:solidFill>
-              <a:srgbClr val="FFFFFF">
-                <a:alpha val="20000"/>
-              </a:srgbClr>
-            </a:solidFill>
-            <a:prstDash val="solid"/>
-          </a:ln>
-        </p:spPr>
-      </p:sp>
-      <p:sp>
-        <p:nvSpPr>
-          <p:cNvPr id="12" name="Text 10"/>
-          <p:cNvSpPr/>
-          <p:nvPr/>
-        </p:nvSpPr>
-        <p:spPr>
-          <a:xfrm>
-            <a:off x="502920" y="109728"/>
-            <a:ext cx="914400" cy="164592"/>
+          <p:cNvPr id="6" name="Text 4"/>
+          <p:cNvSpPr/>
+          <p:nvPr/>
+        </p:nvSpPr>
+        <p:spPr>
+          <a:xfrm>
+            <a:off x="228600" y="411480"/>
+            <a:ext cx="1965960" cy="4114800"/>
           </a:xfrm>
           <a:prstGeom prst="rect">
             <a:avLst/>
@@ -3989,55 +3447,14 @@
           <a:ln/>
         </p:spPr>
         <p:txBody>
-          <a:bodyPr wrap="square" rtlCol="0" anchor="ctr"/>
+          <a:bodyPr wrap="square" rtlCol="0" anchor="t"/>
           <a:lstStyle/>
           <a:p>
             <a:pPr indent="0" marL="0">
               <a:buNone/>
             </a:pPr>
             <a:r>
-              <a:rPr lang="en-US" sz="700" b="1" spc="120" kern="0" dirty="0">
-                <a:solidFill>
-                  <a:srgbClr val="FFFFFF">
-                    <a:alpha val="75000"/>
-                  </a:srgbClr>
-                </a:solidFill>
-                <a:latin typeface="Microsoft YaHei" pitchFamily="34" charset="0"/>
-                <a:ea typeface="Microsoft YaHei" pitchFamily="34" charset="-122"/>
-                <a:cs typeface="Microsoft YaHei" pitchFamily="34" charset="-120"/>
-              </a:rPr>
-              <a:t>KEY POINTS</a:t>
-            </a:r>
-            <a:endParaRPr lang="en-US" sz="700" dirty="0"/>
-          </a:p>
-        </p:txBody>
-      </p:sp>
-      <p:sp>
-        <p:nvSpPr>
-          <p:cNvPr id="13" name="Text 11"/>
-          <p:cNvSpPr/>
-          <p:nvPr/>
-        </p:nvSpPr>
-        <p:spPr>
-          <a:xfrm>
-            <a:off x="502920" y="329184"/>
-            <a:ext cx="8046720" cy="530352"/>
-          </a:xfrm>
-          <a:prstGeom prst="rect">
-            <a:avLst/>
-          </a:prstGeom>
-          <a:noFill/>
-          <a:ln/>
-        </p:spPr>
-        <p:txBody>
-          <a:bodyPr wrap="square" rtlCol="0" anchor="t"/>
-          <a:lstStyle/>
-          <a:p>
-            <a:pPr indent="0" marL="0">
-              <a:buNone/>
-            </a:pPr>
-            <a:r>
-              <a:rPr lang="en-US" sz="2200" b="1" dirty="0">
+              <a:rPr lang="en-US" sz="1800" b="1" dirty="0">
                 <a:solidFill>
                   <a:srgbClr val="FFFFFF"/>
                 </a:solidFill>
@@ -4047,20 +3464,20 @@
               </a:rPr>
               <a:t>CC_TITLE</a:t>
             </a:r>
-            <a:endParaRPr lang="en-US" sz="2200" dirty="0"/>
-          </a:p>
-        </p:txBody>
-      </p:sp>
-      <p:sp>
-        <p:nvSpPr>
-          <p:cNvPr id="14" name="Shape 12"/>
-          <p:cNvSpPr/>
-          <p:nvPr/>
-        </p:nvSpPr>
-        <p:spPr>
-          <a:xfrm>
-            <a:off x="411480" y="1078992"/>
-            <a:ext cx="8321040" cy="3493008"/>
+            <a:endParaRPr lang="en-US" sz="1800" dirty="0"/>
+          </a:p>
+        </p:txBody>
+      </p:sp>
+      <p:sp>
+        <p:nvSpPr>
+          <p:cNvPr id="7" name="Shape 5"/>
+          <p:cNvSpPr/>
+          <p:nvPr/>
+        </p:nvSpPr>
+        <p:spPr>
+          <a:xfrm>
+            <a:off x="2606040" y="1078992"/>
+            <a:ext cx="6126480" cy="3493008"/>
           </a:xfrm>
           <a:prstGeom prst="roundRect">
             <a:avLst>
@@ -4087,7 +3504,7 @@
       </p:sp>
       <p:sp>
         <p:nvSpPr>
-          <p:cNvPr id="15" name="Shape 13"/>
+          <p:cNvPr id="8" name="Shape 6"/>
           <p:cNvSpPr/>
           <p:nvPr/>
         </p:nvSpPr>
@@ -4116,7 +3533,7 @@
       </p:sp>
       <p:sp>
         <p:nvSpPr>
-          <p:cNvPr id="16" name="Shape 14"/>
+          <p:cNvPr id="9" name="Shape 7"/>
           <p:cNvSpPr/>
           <p:nvPr/>
         </p:nvSpPr>
@@ -4138,7 +3555,7 @@
       </p:sp>
       <p:sp>
         <p:nvSpPr>
-          <p:cNvPr id="17" name="Shape 15"/>
+          <p:cNvPr id="10" name="Shape 8"/>
           <p:cNvSpPr/>
           <p:nvPr/>
         </p:nvSpPr>
@@ -4172,36 +3589,7 @@
       </p:sp>
       <p:sp>
         <p:nvSpPr>
-          <p:cNvPr id="18" name="Shape 16"/>
-          <p:cNvSpPr/>
-          <p:nvPr/>
-        </p:nvSpPr>
-        <p:spPr>
-          <a:xfrm>
-            <a:off x="796625" y="1500713"/>
-            <a:ext cx="190927" cy="190927"/>
-          </a:xfrm>
-          <a:prstGeom prst="roundRect">
-            <a:avLst>
-              <a:gd name="adj" fmla="val 181992"/>
-            </a:avLst>
-          </a:prstGeom>
-          <a:solidFill>
-            <a:srgbClr val="60A5FA">
-              <a:alpha val="80000"/>
-            </a:srgbClr>
-          </a:solidFill>
-          <a:ln w="12700">
-            <a:solidFill>
-              <a:srgbClr val="333333"/>
-            </a:solidFill>
-            <a:prstDash val="solid"/>
-          </a:ln>
-        </p:spPr>
-      </p:sp>
-      <p:sp>
-        <p:nvSpPr>
-          <p:cNvPr id="19" name="Text 17"/>
+          <p:cNvPr id="11" name="Text 9"/>
           <p:cNvSpPr/>
           <p:nvPr/>
         </p:nvSpPr>
@@ -4240,7 +3628,7 @@
       </p:sp>
       <p:sp>
         <p:nvSpPr>
-          <p:cNvPr id="20" name="Text 18"/>
+          <p:cNvPr id="12" name="Text 10"/>
           <p:cNvSpPr/>
           <p:nvPr/>
         </p:nvSpPr>
@@ -4260,9 +3648,6 @@
           <a:lstStyle/>
           <a:p>
             <a:pPr indent="0" marL="0">
-              <a:lnSpc>
-                <a:spcPct val="115000"/>
-              </a:lnSpc>
               <a:buNone/>
             </a:pPr>
             <a:r>
@@ -4282,7 +3667,7 @@
       </p:sp>
       <p:sp>
         <p:nvSpPr>
-          <p:cNvPr id="21" name="Shape 19"/>
+          <p:cNvPr id="13" name="Shape 11"/>
           <p:cNvSpPr/>
           <p:nvPr/>
         </p:nvSpPr>
@@ -4311,7 +3696,7 @@
       </p:sp>
       <p:sp>
         <p:nvSpPr>
-          <p:cNvPr id="22" name="Shape 20"/>
+          <p:cNvPr id="14" name="Shape 12"/>
           <p:cNvSpPr/>
           <p:nvPr/>
         </p:nvSpPr>
@@ -4333,7 +3718,7 @@
       </p:sp>
       <p:sp>
         <p:nvSpPr>
-          <p:cNvPr id="23" name="Shape 21"/>
+          <p:cNvPr id="15" name="Shape 13"/>
           <p:cNvSpPr/>
           <p:nvPr/>
         </p:nvSpPr>
@@ -4367,36 +3752,7 @@
       </p:sp>
       <p:sp>
         <p:nvSpPr>
-          <p:cNvPr id="24" name="Shape 22"/>
-          <p:cNvSpPr/>
-          <p:nvPr/>
-        </p:nvSpPr>
-        <p:spPr>
-          <a:xfrm>
-            <a:off x="796625" y="2122505"/>
-            <a:ext cx="190927" cy="190927"/>
-          </a:xfrm>
-          <a:prstGeom prst="roundRect">
-            <a:avLst>
-              <a:gd name="adj" fmla="val 181992"/>
-            </a:avLst>
-          </a:prstGeom>
-          <a:solidFill>
-            <a:srgbClr val="60A5FA">
-              <a:alpha val="80000"/>
-            </a:srgbClr>
-          </a:solidFill>
-          <a:ln w="12700">
-            <a:solidFill>
-              <a:srgbClr val="333333"/>
-            </a:solidFill>
-            <a:prstDash val="solid"/>
-          </a:ln>
-        </p:spPr>
-      </p:sp>
-      <p:sp>
-        <p:nvSpPr>
-          <p:cNvPr id="25" name="Text 23"/>
+          <p:cNvPr id="16" name="Text 14"/>
           <p:cNvSpPr/>
           <p:nvPr/>
         </p:nvSpPr>
@@ -4435,7 +3791,7 @@
       </p:sp>
       <p:sp>
         <p:nvSpPr>
-          <p:cNvPr id="26" name="Text 24"/>
+          <p:cNvPr id="17" name="Text 15"/>
           <p:cNvSpPr/>
           <p:nvPr/>
         </p:nvSpPr>
@@ -4455,9 +3811,6 @@
           <a:lstStyle/>
           <a:p>
             <a:pPr indent="0" marL="0">
-              <a:lnSpc>
-                <a:spcPct val="115000"/>
-              </a:lnSpc>
               <a:buNone/>
             </a:pPr>
             <a:r>
@@ -4477,7 +3830,7 @@
       </p:sp>
       <p:sp>
         <p:nvSpPr>
-          <p:cNvPr id="27" name="Shape 25"/>
+          <p:cNvPr id="18" name="Shape 16"/>
           <p:cNvSpPr/>
           <p:nvPr/>
         </p:nvSpPr>
@@ -4506,7 +3859,7 @@
       </p:sp>
       <p:sp>
         <p:nvSpPr>
-          <p:cNvPr id="28" name="Shape 26"/>
+          <p:cNvPr id="19" name="Shape 17"/>
           <p:cNvSpPr/>
           <p:nvPr/>
         </p:nvSpPr>
@@ -4528,7 +3881,7 @@
       </p:sp>
       <p:sp>
         <p:nvSpPr>
-          <p:cNvPr id="29" name="Shape 27"/>
+          <p:cNvPr id="20" name="Shape 18"/>
           <p:cNvSpPr/>
           <p:nvPr/>
         </p:nvSpPr>
@@ -4562,36 +3915,7 @@
       </p:sp>
       <p:sp>
         <p:nvSpPr>
-          <p:cNvPr id="30" name="Shape 28"/>
-          <p:cNvSpPr/>
-          <p:nvPr/>
-        </p:nvSpPr>
-        <p:spPr>
-          <a:xfrm>
-            <a:off x="796625" y="2744297"/>
-            <a:ext cx="190927" cy="190927"/>
-          </a:xfrm>
-          <a:prstGeom prst="roundRect">
-            <a:avLst>
-              <a:gd name="adj" fmla="val 181992"/>
-            </a:avLst>
-          </a:prstGeom>
-          <a:solidFill>
-            <a:srgbClr val="60A5FA">
-              <a:alpha val="80000"/>
-            </a:srgbClr>
-          </a:solidFill>
-          <a:ln w="12700">
-            <a:solidFill>
-              <a:srgbClr val="333333"/>
-            </a:solidFill>
-            <a:prstDash val="solid"/>
-          </a:ln>
-        </p:spPr>
-      </p:sp>
-      <p:sp>
-        <p:nvSpPr>
-          <p:cNvPr id="31" name="Text 29"/>
+          <p:cNvPr id="21" name="Text 19"/>
           <p:cNvSpPr/>
           <p:nvPr/>
         </p:nvSpPr>
@@ -4630,7 +3954,7 @@
       </p:sp>
       <p:sp>
         <p:nvSpPr>
-          <p:cNvPr id="32" name="Text 30"/>
+          <p:cNvPr id="22" name="Text 20"/>
           <p:cNvSpPr/>
           <p:nvPr/>
         </p:nvSpPr>
@@ -4650,9 +3974,6 @@
           <a:lstStyle/>
           <a:p>
             <a:pPr indent="0" marL="0">
-              <a:lnSpc>
-                <a:spcPct val="115000"/>
-              </a:lnSpc>
               <a:buNone/>
             </a:pPr>
             <a:r>
@@ -4672,7 +3993,7 @@
       </p:sp>
       <p:sp>
         <p:nvSpPr>
-          <p:cNvPr id="33" name="Shape 31"/>
+          <p:cNvPr id="23" name="Shape 21"/>
           <p:cNvSpPr/>
           <p:nvPr/>
         </p:nvSpPr>
@@ -4701,7 +4022,7 @@
       </p:sp>
       <p:sp>
         <p:nvSpPr>
-          <p:cNvPr id="34" name="Shape 32"/>
+          <p:cNvPr id="24" name="Shape 22"/>
           <p:cNvSpPr/>
           <p:nvPr/>
         </p:nvSpPr>
@@ -4723,7 +4044,7 @@
       </p:sp>
       <p:sp>
         <p:nvSpPr>
-          <p:cNvPr id="35" name="Shape 33"/>
+          <p:cNvPr id="25" name="Shape 23"/>
           <p:cNvSpPr/>
           <p:nvPr/>
         </p:nvSpPr>
@@ -4757,36 +4078,7 @@
       </p:sp>
       <p:sp>
         <p:nvSpPr>
-          <p:cNvPr id="36" name="Shape 34"/>
-          <p:cNvSpPr/>
-          <p:nvPr/>
-        </p:nvSpPr>
-        <p:spPr>
-          <a:xfrm>
-            <a:off x="796625" y="3366089"/>
-            <a:ext cx="190927" cy="190927"/>
-          </a:xfrm>
-          <a:prstGeom prst="roundRect">
-            <a:avLst>
-              <a:gd name="adj" fmla="val 181992"/>
-            </a:avLst>
-          </a:prstGeom>
-          <a:solidFill>
-            <a:srgbClr val="60A5FA">
-              <a:alpha val="80000"/>
-            </a:srgbClr>
-          </a:solidFill>
-          <a:ln w="12700">
-            <a:solidFill>
-              <a:srgbClr val="333333"/>
-            </a:solidFill>
-            <a:prstDash val="solid"/>
-          </a:ln>
-        </p:spPr>
-      </p:sp>
-      <p:sp>
-        <p:nvSpPr>
-          <p:cNvPr id="37" name="Text 35"/>
+          <p:cNvPr id="26" name="Text 24"/>
           <p:cNvSpPr/>
           <p:nvPr/>
         </p:nvSpPr>
@@ -4825,7 +4117,7 @@
       </p:sp>
       <p:sp>
         <p:nvSpPr>
-          <p:cNvPr id="38" name="Text 36"/>
+          <p:cNvPr id="27" name="Text 25"/>
           <p:cNvSpPr/>
           <p:nvPr/>
         </p:nvSpPr>
@@ -4845,9 +4137,6 @@
           <a:lstStyle/>
           <a:p>
             <a:pPr indent="0" marL="0">
-              <a:lnSpc>
-                <a:spcPct val="115000"/>
-              </a:lnSpc>
               <a:buNone/>
             </a:pPr>
             <a:r>
@@ -4867,7 +4156,7 @@
       </p:sp>
       <p:sp>
         <p:nvSpPr>
-          <p:cNvPr id="39" name="Shape 37"/>
+          <p:cNvPr id="28" name="Shape 26"/>
           <p:cNvSpPr/>
           <p:nvPr/>
         </p:nvSpPr>
@@ -4896,7 +4185,7 @@
       </p:sp>
       <p:sp>
         <p:nvSpPr>
-          <p:cNvPr id="40" name="Shape 38"/>
+          <p:cNvPr id="29" name="Shape 27"/>
           <p:cNvSpPr/>
           <p:nvPr/>
         </p:nvSpPr>
@@ -4918,7 +4207,7 @@
       </p:sp>
       <p:sp>
         <p:nvSpPr>
-          <p:cNvPr id="41" name="Shape 39"/>
+          <p:cNvPr id="30" name="Shape 28"/>
           <p:cNvSpPr/>
           <p:nvPr/>
         </p:nvSpPr>
@@ -4952,36 +4241,7 @@
       </p:sp>
       <p:sp>
         <p:nvSpPr>
-          <p:cNvPr id="42" name="Shape 40"/>
-          <p:cNvSpPr/>
-          <p:nvPr/>
-        </p:nvSpPr>
-        <p:spPr>
-          <a:xfrm>
-            <a:off x="796625" y="3987881"/>
-            <a:ext cx="190927" cy="190927"/>
-          </a:xfrm>
-          <a:prstGeom prst="roundRect">
-            <a:avLst>
-              <a:gd name="adj" fmla="val 181992"/>
-            </a:avLst>
-          </a:prstGeom>
-          <a:solidFill>
-            <a:srgbClr val="60A5FA">
-              <a:alpha val="80000"/>
-            </a:srgbClr>
-          </a:solidFill>
-          <a:ln w="12700">
-            <a:solidFill>
-              <a:srgbClr val="333333"/>
-            </a:solidFill>
-            <a:prstDash val="solid"/>
-          </a:ln>
-        </p:spPr>
-      </p:sp>
-      <p:sp>
-        <p:nvSpPr>
-          <p:cNvPr id="43" name="Text 41"/>
+          <p:cNvPr id="31" name="Text 29"/>
           <p:cNvSpPr/>
           <p:nvPr/>
         </p:nvSpPr>
@@ -5020,7 +4280,7 @@
       </p:sp>
       <p:sp>
         <p:nvSpPr>
-          <p:cNvPr id="44" name="Text 42"/>
+          <p:cNvPr id="32" name="Text 30"/>
           <p:cNvSpPr/>
           <p:nvPr/>
         </p:nvSpPr>
@@ -5040,9 +4300,6 @@
           <a:lstStyle/>
           <a:p>
             <a:pPr indent="0" marL="0">
-              <a:lnSpc>
-                <a:spcPct val="115000"/>
-              </a:lnSpc>
               <a:buNone/>
             </a:pPr>
             <a:r>
@@ -5062,14 +4319,14 @@
       </p:sp>
       <p:sp>
         <p:nvSpPr>
-          <p:cNvPr id="45" name="Shape 43"/>
-          <p:cNvSpPr/>
-          <p:nvPr/>
-        </p:nvSpPr>
-        <p:spPr>
-          <a:xfrm>
-            <a:off x="109728" y="4681728"/>
-            <a:ext cx="9034272" cy="457200"/>
+          <p:cNvPr id="33" name="Shape 31"/>
+          <p:cNvSpPr/>
+          <p:nvPr/>
+        </p:nvSpPr>
+        <p:spPr>
+          <a:xfrm>
+            <a:off x="2478024" y="4681728"/>
+            <a:ext cx="6665976" cy="457200"/>
           </a:xfrm>
           <a:prstGeom prst="rect">
             <a:avLst/>
@@ -5082,66 +4339,13 @@
       </p:sp>
       <p:sp>
         <p:nvSpPr>
-          <p:cNvPr id="46" name="Shape 44"/>
-          <p:cNvSpPr/>
-          <p:nvPr/>
-        </p:nvSpPr>
-        <p:spPr>
-          <a:xfrm>
-            <a:off x="109728" y="4681728"/>
-            <a:ext cx="2529596" cy="457200"/>
-          </a:xfrm>
-          <a:prstGeom prst="rect">
-            <a:avLst/>
-          </a:prstGeom>
-          <a:solidFill>
-            <a:srgbClr val="60A5FA">
-              <a:alpha val="90000"/>
-            </a:srgbClr>
-          </a:solidFill>
-          <a:ln/>
-        </p:spPr>
-      </p:sp>
-      <p:sp>
-        <p:nvSpPr>
-          <p:cNvPr id="47" name="Shape 45"/>
-          <p:cNvSpPr/>
-          <p:nvPr/>
-        </p:nvSpPr>
-        <p:spPr>
-          <a:xfrm>
-            <a:off x="8119872" y="4736592"/>
-            <a:ext cx="621792" cy="329184"/>
-          </a:xfrm>
-          <a:prstGeom prst="roundRect">
-            <a:avLst>
-              <a:gd name="adj" fmla="val 138889"/>
-            </a:avLst>
-          </a:prstGeom>
-          <a:solidFill>
-            <a:srgbClr val="FFFFFF">
-              <a:alpha val="15000"/>
-            </a:srgbClr>
-          </a:solidFill>
-          <a:ln w="6350">
-            <a:solidFill>
-              <a:srgbClr val="FFFFFF">
-                <a:alpha val="25000"/>
-              </a:srgbClr>
-            </a:solidFill>
-            <a:prstDash val="solid"/>
-          </a:ln>
-        </p:spPr>
-      </p:sp>
-      <p:sp>
-        <p:nvSpPr>
-          <p:cNvPr id="48" name="Text 46"/>
-          <p:cNvSpPr/>
-          <p:nvPr/>
-        </p:nvSpPr>
-        <p:spPr>
-          <a:xfrm>
-            <a:off x="8119872" y="4736592"/>
+          <p:cNvPr id="34" name="Text 32"/>
+          <p:cNvSpPr/>
+          <p:nvPr/>
+        </p:nvSpPr>
+        <p:spPr>
+          <a:xfrm>
+            <a:off x="8229600" y="4736592"/>
             <a:ext cx="621792" cy="329184"/>
           </a:xfrm>
           <a:prstGeom prst="rect">
@@ -5212,26 +4416,6 @@
         </p:nvSpPr>
         <p:spPr>
           <a:xfrm>
-            <a:off x="0" y="0"/>
-            <a:ext cx="109728" cy="5143500"/>
-          </a:xfrm>
-          <a:prstGeom prst="rect">
-            <a:avLst/>
-          </a:prstGeom>
-          <a:solidFill>
-            <a:srgbClr val="60A5FA"/>
-          </a:solidFill>
-          <a:ln/>
-        </p:spPr>
-      </p:sp>
-      <p:sp>
-        <p:nvSpPr>
-          <p:cNvPr id="3" name="Shape 1"/>
-          <p:cNvSpPr/>
-          <p:nvPr/>
-        </p:nvSpPr>
-        <p:spPr>
-          <a:xfrm>
             <a:off x="6720840" y="-182880"/>
             <a:ext cx="2743200" cy="2377440"/>
           </a:xfrm>
@@ -5253,7 +4437,7 @@
       </p:sp>
       <p:sp>
         <p:nvSpPr>
-          <p:cNvPr id="4" name="Shape 2"/>
+          <p:cNvPr id="3" name="Shape 1"/>
           <p:cNvSpPr/>
           <p:nvPr/>
         </p:nvSpPr>
@@ -5280,127 +4464,34 @@
       </p:sp>
       <p:sp>
         <p:nvSpPr>
+          <p:cNvPr id="4" name="Shape 2"/>
+          <p:cNvSpPr/>
+          <p:nvPr/>
+        </p:nvSpPr>
+        <p:spPr>
+          <a:xfrm>
+            <a:off x="0" y="0"/>
+            <a:ext cx="2423160" cy="5143500"/>
+          </a:xfrm>
+          <a:prstGeom prst="rect">
+            <a:avLst/>
+          </a:prstGeom>
+          <a:solidFill>
+            <a:srgbClr val="1E3A5F"/>
+          </a:solidFill>
+          <a:ln/>
+        </p:spPr>
+      </p:sp>
+      <p:sp>
+        <p:nvSpPr>
           <p:cNvPr id="5" name="Shape 3"/>
           <p:cNvSpPr/>
           <p:nvPr/>
         </p:nvSpPr>
         <p:spPr>
           <a:xfrm>
-            <a:off x="7909560" y="201168"/>
-            <a:ext cx="685800" cy="685800"/>
-          </a:xfrm>
-          <a:prstGeom prst="ellipse">
-            <a:avLst/>
-          </a:prstGeom>
-          <a:solidFill>
-            <a:srgbClr val="EFF6FF">
-              <a:alpha val="0"/>
-            </a:srgbClr>
-          </a:solidFill>
-          <a:ln w="15875">
-            <a:solidFill>
-              <a:srgbClr val="60A5FA"/>
-            </a:solidFill>
-            <a:prstDash val="solid"/>
-          </a:ln>
-        </p:spPr>
-      </p:sp>
-      <p:sp>
-        <p:nvSpPr>
-          <p:cNvPr id="6" name="Shape 4"/>
-          <p:cNvSpPr/>
-          <p:nvPr/>
-        </p:nvSpPr>
-        <p:spPr>
-          <a:xfrm>
-            <a:off x="8183880" y="384048"/>
-            <a:ext cx="384048" cy="384048"/>
-          </a:xfrm>
-          <a:prstGeom prst="ellipse">
-            <a:avLst/>
-          </a:prstGeom>
-          <a:solidFill>
-            <a:srgbClr val="60A5FA">
-              <a:alpha val="35000"/>
-            </a:srgbClr>
-          </a:solidFill>
-          <a:ln/>
-        </p:spPr>
-      </p:sp>
-      <p:sp>
-        <p:nvSpPr>
-          <p:cNvPr id="7" name="Shape 5"/>
-          <p:cNvSpPr/>
-          <p:nvPr/>
-        </p:nvSpPr>
-        <p:spPr>
-          <a:xfrm>
-            <a:off x="109728" y="0"/>
-            <a:ext cx="9034272" cy="960120"/>
-          </a:xfrm>
-          <a:prstGeom prst="rect">
-            <a:avLst/>
-          </a:prstGeom>
-          <a:solidFill>
-            <a:srgbClr val="1E3A5F"/>
-          </a:solidFill>
-          <a:ln/>
-        </p:spPr>
-      </p:sp>
-      <p:sp>
-        <p:nvSpPr>
-          <p:cNvPr id="8" name="Shape 6"/>
-          <p:cNvSpPr/>
-          <p:nvPr/>
-        </p:nvSpPr>
-        <p:spPr>
-          <a:xfrm>
-            <a:off x="4389120" y="0"/>
-            <a:ext cx="4754880" cy="960120"/>
-          </a:xfrm>
-          <a:prstGeom prst="rect">
-            <a:avLst/>
-          </a:prstGeom>
-          <a:solidFill>
-            <a:srgbClr val="2563EB">
-              <a:alpha val="75000"/>
-            </a:srgbClr>
-          </a:solidFill>
-          <a:ln/>
-        </p:spPr>
-      </p:sp>
-      <p:sp>
-        <p:nvSpPr>
-          <p:cNvPr id="9" name="Shape 7"/>
-          <p:cNvSpPr/>
-          <p:nvPr/>
-        </p:nvSpPr>
-        <p:spPr>
-          <a:xfrm rot="21000000">
-            <a:off x="6263640" y="-320040"/>
-            <a:ext cx="3108960" cy="1234440"/>
-          </a:xfrm>
-          <a:prstGeom prst="rect">
-            <a:avLst/>
-          </a:prstGeom>
-          <a:solidFill>
-            <a:srgbClr val="FFFFFF">
-              <a:alpha val="12000"/>
-            </a:srgbClr>
-          </a:solidFill>
-          <a:ln/>
-        </p:spPr>
-      </p:sp>
-      <p:sp>
-        <p:nvSpPr>
-          <p:cNvPr id="10" name="Shape 8"/>
-          <p:cNvSpPr/>
-          <p:nvPr/>
-        </p:nvSpPr>
-        <p:spPr>
-          <a:xfrm>
-            <a:off x="109728" y="932688"/>
-            <a:ext cx="9034272" cy="36576"/>
+            <a:off x="2423160" y="0"/>
+            <a:ext cx="54864" cy="5143500"/>
           </a:xfrm>
           <a:prstGeom prst="rect">
             <a:avLst/>
@@ -5413,45 +4504,14 @@
       </p:sp>
       <p:sp>
         <p:nvSpPr>
-          <p:cNvPr id="11" name="Shape 9"/>
-          <p:cNvSpPr/>
-          <p:nvPr/>
-        </p:nvSpPr>
-        <p:spPr>
-          <a:xfrm>
-            <a:off x="475488" y="91440"/>
-            <a:ext cx="960120" cy="201168"/>
-          </a:xfrm>
-          <a:prstGeom prst="roundRect">
-            <a:avLst>
-              <a:gd name="adj" fmla="val 227273"/>
-            </a:avLst>
-          </a:prstGeom>
-          <a:solidFill>
-            <a:srgbClr val="FFFFFF">
-              <a:alpha val="12000"/>
-            </a:srgbClr>
-          </a:solidFill>
-          <a:ln w="6350">
-            <a:solidFill>
-              <a:srgbClr val="FFFFFF">
-                <a:alpha val="20000"/>
-              </a:srgbClr>
-            </a:solidFill>
-            <a:prstDash val="solid"/>
-          </a:ln>
-        </p:spPr>
-      </p:sp>
-      <p:sp>
-        <p:nvSpPr>
-          <p:cNvPr id="12" name="Text 10"/>
-          <p:cNvSpPr/>
-          <p:nvPr/>
-        </p:nvSpPr>
-        <p:spPr>
-          <a:xfrm>
-            <a:off x="502920" y="109728"/>
-            <a:ext cx="914400" cy="164592"/>
+          <p:cNvPr id="6" name="Text 4"/>
+          <p:cNvSpPr/>
+          <p:nvPr/>
+        </p:nvSpPr>
+        <p:spPr>
+          <a:xfrm>
+            <a:off x="228600" y="411480"/>
+            <a:ext cx="1965960" cy="4114800"/>
           </a:xfrm>
           <a:prstGeom prst="rect">
             <a:avLst/>
@@ -5460,55 +4520,14 @@
           <a:ln/>
         </p:spPr>
         <p:txBody>
-          <a:bodyPr wrap="square" rtlCol="0" anchor="ctr"/>
+          <a:bodyPr wrap="square" rtlCol="0" anchor="t"/>
           <a:lstStyle/>
           <a:p>
             <a:pPr indent="0" marL="0">
               <a:buNone/>
             </a:pPr>
             <a:r>
-              <a:rPr lang="en-US" sz="700" b="1" spc="120" kern="0" dirty="0">
-                <a:solidFill>
-                  <a:srgbClr val="FFFFFF">
-                    <a:alpha val="75000"/>
-                  </a:srgbClr>
-                </a:solidFill>
-                <a:latin typeface="Microsoft YaHei" pitchFamily="34" charset="0"/>
-                <a:ea typeface="Microsoft YaHei" pitchFamily="34" charset="-122"/>
-                <a:cs typeface="Microsoft YaHei" pitchFamily="34" charset="-120"/>
-              </a:rPr>
-              <a:t>KEY POINTS</a:t>
-            </a:r>
-            <a:endParaRPr lang="en-US" sz="700" dirty="0"/>
-          </a:p>
-        </p:txBody>
-      </p:sp>
-      <p:sp>
-        <p:nvSpPr>
-          <p:cNvPr id="13" name="Text 11"/>
-          <p:cNvSpPr/>
-          <p:nvPr/>
-        </p:nvSpPr>
-        <p:spPr>
-          <a:xfrm>
-            <a:off x="502920" y="329184"/>
-            <a:ext cx="8046720" cy="530352"/>
-          </a:xfrm>
-          <a:prstGeom prst="rect">
-            <a:avLst/>
-          </a:prstGeom>
-          <a:noFill/>
-          <a:ln/>
-        </p:spPr>
-        <p:txBody>
-          <a:bodyPr wrap="square" rtlCol="0" anchor="t"/>
-          <a:lstStyle/>
-          <a:p>
-            <a:pPr indent="0" marL="0">
-              <a:buNone/>
-            </a:pPr>
-            <a:r>
-              <a:rPr lang="en-US" sz="2200" b="1" dirty="0">
+              <a:rPr lang="en-US" sz="1800" b="1" dirty="0">
                 <a:solidFill>
                   <a:srgbClr val="FFFFFF"/>
                 </a:solidFill>
@@ -5518,20 +4537,20 @@
               </a:rPr>
               <a:t>CC_TITLE</a:t>
             </a:r>
-            <a:endParaRPr lang="en-US" sz="2200" dirty="0"/>
-          </a:p>
-        </p:txBody>
-      </p:sp>
-      <p:sp>
-        <p:nvSpPr>
-          <p:cNvPr id="14" name="Shape 12"/>
-          <p:cNvSpPr/>
-          <p:nvPr/>
-        </p:nvSpPr>
-        <p:spPr>
-          <a:xfrm>
-            <a:off x="411480" y="1078992"/>
-            <a:ext cx="8321040" cy="3493008"/>
+            <a:endParaRPr lang="en-US" sz="1800" dirty="0"/>
+          </a:p>
+        </p:txBody>
+      </p:sp>
+      <p:sp>
+        <p:nvSpPr>
+          <p:cNvPr id="7" name="Shape 5"/>
+          <p:cNvSpPr/>
+          <p:nvPr/>
+        </p:nvSpPr>
+        <p:spPr>
+          <a:xfrm>
+            <a:off x="2606040" y="1078992"/>
+            <a:ext cx="6126480" cy="3493008"/>
           </a:xfrm>
           <a:prstGeom prst="roundRect">
             <a:avLst>
@@ -5558,7 +4577,7 @@
       </p:sp>
       <p:sp>
         <p:nvSpPr>
-          <p:cNvPr id="15" name="Shape 13"/>
+          <p:cNvPr id="8" name="Shape 6"/>
           <p:cNvSpPr/>
           <p:nvPr/>
         </p:nvSpPr>
@@ -5587,7 +4606,7 @@
       </p:sp>
       <p:sp>
         <p:nvSpPr>
-          <p:cNvPr id="16" name="Shape 14"/>
+          <p:cNvPr id="9" name="Shape 7"/>
           <p:cNvSpPr/>
           <p:nvPr/>
         </p:nvSpPr>
@@ -5609,7 +4628,7 @@
       </p:sp>
       <p:sp>
         <p:nvSpPr>
-          <p:cNvPr id="17" name="Shape 15"/>
+          <p:cNvPr id="10" name="Shape 8"/>
           <p:cNvSpPr/>
           <p:nvPr/>
         </p:nvSpPr>
@@ -5643,36 +4662,7 @@
       </p:sp>
       <p:sp>
         <p:nvSpPr>
-          <p:cNvPr id="18" name="Shape 16"/>
-          <p:cNvSpPr/>
-          <p:nvPr/>
-        </p:nvSpPr>
-        <p:spPr>
-          <a:xfrm>
-            <a:off x="796625" y="1500713"/>
-            <a:ext cx="190927" cy="190927"/>
-          </a:xfrm>
-          <a:prstGeom prst="roundRect">
-            <a:avLst>
-              <a:gd name="adj" fmla="val 181992"/>
-            </a:avLst>
-          </a:prstGeom>
-          <a:solidFill>
-            <a:srgbClr val="60A5FA">
-              <a:alpha val="80000"/>
-            </a:srgbClr>
-          </a:solidFill>
-          <a:ln w="12700">
-            <a:solidFill>
-              <a:srgbClr val="333333"/>
-            </a:solidFill>
-            <a:prstDash val="solid"/>
-          </a:ln>
-        </p:spPr>
-      </p:sp>
-      <p:sp>
-        <p:nvSpPr>
-          <p:cNvPr id="19" name="Text 17"/>
+          <p:cNvPr id="11" name="Text 9"/>
           <p:cNvSpPr/>
           <p:nvPr/>
         </p:nvSpPr>
@@ -5711,7 +4701,7 @@
       </p:sp>
       <p:sp>
         <p:nvSpPr>
-          <p:cNvPr id="20" name="Text 18"/>
+          <p:cNvPr id="12" name="Text 10"/>
           <p:cNvSpPr/>
           <p:nvPr/>
         </p:nvSpPr>
@@ -5731,9 +4721,6 @@
           <a:lstStyle/>
           <a:p>
             <a:pPr indent="0" marL="0">
-              <a:lnSpc>
-                <a:spcPct val="115000"/>
-              </a:lnSpc>
               <a:buNone/>
             </a:pPr>
             <a:r>
@@ -5753,7 +4740,7 @@
       </p:sp>
       <p:sp>
         <p:nvSpPr>
-          <p:cNvPr id="21" name="Shape 19"/>
+          <p:cNvPr id="13" name="Shape 11"/>
           <p:cNvSpPr/>
           <p:nvPr/>
         </p:nvSpPr>
@@ -5782,7 +4769,7 @@
       </p:sp>
       <p:sp>
         <p:nvSpPr>
-          <p:cNvPr id="22" name="Shape 20"/>
+          <p:cNvPr id="14" name="Shape 12"/>
           <p:cNvSpPr/>
           <p:nvPr/>
         </p:nvSpPr>
@@ -5804,7 +4791,7 @@
       </p:sp>
       <p:sp>
         <p:nvSpPr>
-          <p:cNvPr id="23" name="Shape 21"/>
+          <p:cNvPr id="15" name="Shape 13"/>
           <p:cNvSpPr/>
           <p:nvPr/>
         </p:nvSpPr>
@@ -5838,36 +4825,7 @@
       </p:sp>
       <p:sp>
         <p:nvSpPr>
-          <p:cNvPr id="24" name="Shape 22"/>
-          <p:cNvSpPr/>
-          <p:nvPr/>
-        </p:nvSpPr>
-        <p:spPr>
-          <a:xfrm>
-            <a:off x="796625" y="2122505"/>
-            <a:ext cx="190927" cy="190927"/>
-          </a:xfrm>
-          <a:prstGeom prst="roundRect">
-            <a:avLst>
-              <a:gd name="adj" fmla="val 181992"/>
-            </a:avLst>
-          </a:prstGeom>
-          <a:solidFill>
-            <a:srgbClr val="60A5FA">
-              <a:alpha val="80000"/>
-            </a:srgbClr>
-          </a:solidFill>
-          <a:ln w="12700">
-            <a:solidFill>
-              <a:srgbClr val="333333"/>
-            </a:solidFill>
-            <a:prstDash val="solid"/>
-          </a:ln>
-        </p:spPr>
-      </p:sp>
-      <p:sp>
-        <p:nvSpPr>
-          <p:cNvPr id="25" name="Text 23"/>
+          <p:cNvPr id="16" name="Text 14"/>
           <p:cNvSpPr/>
           <p:nvPr/>
         </p:nvSpPr>
@@ -5906,7 +4864,7 @@
       </p:sp>
       <p:sp>
         <p:nvSpPr>
-          <p:cNvPr id="26" name="Text 24"/>
+          <p:cNvPr id="17" name="Text 15"/>
           <p:cNvSpPr/>
           <p:nvPr/>
         </p:nvSpPr>
@@ -5926,9 +4884,6 @@
           <a:lstStyle/>
           <a:p>
             <a:pPr indent="0" marL="0">
-              <a:lnSpc>
-                <a:spcPct val="115000"/>
-              </a:lnSpc>
               <a:buNone/>
             </a:pPr>
             <a:r>
@@ -5948,7 +4903,7 @@
       </p:sp>
       <p:sp>
         <p:nvSpPr>
-          <p:cNvPr id="27" name="Shape 25"/>
+          <p:cNvPr id="18" name="Shape 16"/>
           <p:cNvSpPr/>
           <p:nvPr/>
         </p:nvSpPr>
@@ -5977,7 +4932,7 @@
       </p:sp>
       <p:sp>
         <p:nvSpPr>
-          <p:cNvPr id="28" name="Shape 26"/>
+          <p:cNvPr id="19" name="Shape 17"/>
           <p:cNvSpPr/>
           <p:nvPr/>
         </p:nvSpPr>
@@ -5999,7 +4954,7 @@
       </p:sp>
       <p:sp>
         <p:nvSpPr>
-          <p:cNvPr id="29" name="Shape 27"/>
+          <p:cNvPr id="20" name="Shape 18"/>
           <p:cNvSpPr/>
           <p:nvPr/>
         </p:nvSpPr>
@@ -6033,36 +4988,7 @@
       </p:sp>
       <p:sp>
         <p:nvSpPr>
-          <p:cNvPr id="30" name="Shape 28"/>
-          <p:cNvSpPr/>
-          <p:nvPr/>
-        </p:nvSpPr>
-        <p:spPr>
-          <a:xfrm>
-            <a:off x="796625" y="2744297"/>
-            <a:ext cx="190927" cy="190927"/>
-          </a:xfrm>
-          <a:prstGeom prst="roundRect">
-            <a:avLst>
-              <a:gd name="adj" fmla="val 181992"/>
-            </a:avLst>
-          </a:prstGeom>
-          <a:solidFill>
-            <a:srgbClr val="60A5FA">
-              <a:alpha val="80000"/>
-            </a:srgbClr>
-          </a:solidFill>
-          <a:ln w="12700">
-            <a:solidFill>
-              <a:srgbClr val="333333"/>
-            </a:solidFill>
-            <a:prstDash val="solid"/>
-          </a:ln>
-        </p:spPr>
-      </p:sp>
-      <p:sp>
-        <p:nvSpPr>
-          <p:cNvPr id="31" name="Text 29"/>
+          <p:cNvPr id="21" name="Text 19"/>
           <p:cNvSpPr/>
           <p:nvPr/>
         </p:nvSpPr>
@@ -6101,7 +5027,7 @@
       </p:sp>
       <p:sp>
         <p:nvSpPr>
-          <p:cNvPr id="32" name="Text 30"/>
+          <p:cNvPr id="22" name="Text 20"/>
           <p:cNvSpPr/>
           <p:nvPr/>
         </p:nvSpPr>
@@ -6121,9 +5047,6 @@
           <a:lstStyle/>
           <a:p>
             <a:pPr indent="0" marL="0">
-              <a:lnSpc>
-                <a:spcPct val="115000"/>
-              </a:lnSpc>
               <a:buNone/>
             </a:pPr>
             <a:r>
@@ -6143,7 +5066,7 @@
       </p:sp>
       <p:sp>
         <p:nvSpPr>
-          <p:cNvPr id="33" name="Shape 31"/>
+          <p:cNvPr id="23" name="Shape 21"/>
           <p:cNvSpPr/>
           <p:nvPr/>
         </p:nvSpPr>
@@ -6172,7 +5095,7 @@
       </p:sp>
       <p:sp>
         <p:nvSpPr>
-          <p:cNvPr id="34" name="Shape 32"/>
+          <p:cNvPr id="24" name="Shape 22"/>
           <p:cNvSpPr/>
           <p:nvPr/>
         </p:nvSpPr>
@@ -6194,7 +5117,7 @@
       </p:sp>
       <p:sp>
         <p:nvSpPr>
-          <p:cNvPr id="35" name="Shape 33"/>
+          <p:cNvPr id="25" name="Shape 23"/>
           <p:cNvSpPr/>
           <p:nvPr/>
         </p:nvSpPr>
@@ -6228,36 +5151,7 @@
       </p:sp>
       <p:sp>
         <p:nvSpPr>
-          <p:cNvPr id="36" name="Shape 34"/>
-          <p:cNvSpPr/>
-          <p:nvPr/>
-        </p:nvSpPr>
-        <p:spPr>
-          <a:xfrm>
-            <a:off x="796625" y="3366089"/>
-            <a:ext cx="190927" cy="190927"/>
-          </a:xfrm>
-          <a:prstGeom prst="roundRect">
-            <a:avLst>
-              <a:gd name="adj" fmla="val 181992"/>
-            </a:avLst>
-          </a:prstGeom>
-          <a:solidFill>
-            <a:srgbClr val="60A5FA">
-              <a:alpha val="80000"/>
-            </a:srgbClr>
-          </a:solidFill>
-          <a:ln w="12700">
-            <a:solidFill>
-              <a:srgbClr val="333333"/>
-            </a:solidFill>
-            <a:prstDash val="solid"/>
-          </a:ln>
-        </p:spPr>
-      </p:sp>
-      <p:sp>
-        <p:nvSpPr>
-          <p:cNvPr id="37" name="Text 35"/>
+          <p:cNvPr id="26" name="Text 24"/>
           <p:cNvSpPr/>
           <p:nvPr/>
         </p:nvSpPr>
@@ -6296,7 +5190,7 @@
       </p:sp>
       <p:sp>
         <p:nvSpPr>
-          <p:cNvPr id="38" name="Text 36"/>
+          <p:cNvPr id="27" name="Text 25"/>
           <p:cNvSpPr/>
           <p:nvPr/>
         </p:nvSpPr>
@@ -6316,9 +5210,6 @@
           <a:lstStyle/>
           <a:p>
             <a:pPr indent="0" marL="0">
-              <a:lnSpc>
-                <a:spcPct val="115000"/>
-              </a:lnSpc>
               <a:buNone/>
             </a:pPr>
             <a:r>
@@ -6338,7 +5229,7 @@
       </p:sp>
       <p:sp>
         <p:nvSpPr>
-          <p:cNvPr id="39" name="Shape 37"/>
+          <p:cNvPr id="28" name="Shape 26"/>
           <p:cNvSpPr/>
           <p:nvPr/>
         </p:nvSpPr>
@@ -6367,7 +5258,7 @@
       </p:sp>
       <p:sp>
         <p:nvSpPr>
-          <p:cNvPr id="40" name="Shape 38"/>
+          <p:cNvPr id="29" name="Shape 27"/>
           <p:cNvSpPr/>
           <p:nvPr/>
         </p:nvSpPr>
@@ -6389,7 +5280,7 @@
       </p:sp>
       <p:sp>
         <p:nvSpPr>
-          <p:cNvPr id="41" name="Shape 39"/>
+          <p:cNvPr id="30" name="Shape 28"/>
           <p:cNvSpPr/>
           <p:nvPr/>
         </p:nvSpPr>
@@ -6423,36 +5314,7 @@
       </p:sp>
       <p:sp>
         <p:nvSpPr>
-          <p:cNvPr id="42" name="Shape 40"/>
-          <p:cNvSpPr/>
-          <p:nvPr/>
-        </p:nvSpPr>
-        <p:spPr>
-          <a:xfrm>
-            <a:off x="796625" y="3987881"/>
-            <a:ext cx="190927" cy="190927"/>
-          </a:xfrm>
-          <a:prstGeom prst="roundRect">
-            <a:avLst>
-              <a:gd name="adj" fmla="val 181992"/>
-            </a:avLst>
-          </a:prstGeom>
-          <a:solidFill>
-            <a:srgbClr val="60A5FA">
-              <a:alpha val="80000"/>
-            </a:srgbClr>
-          </a:solidFill>
-          <a:ln w="12700">
-            <a:solidFill>
-              <a:srgbClr val="333333"/>
-            </a:solidFill>
-            <a:prstDash val="solid"/>
-          </a:ln>
-        </p:spPr>
-      </p:sp>
-      <p:sp>
-        <p:nvSpPr>
-          <p:cNvPr id="43" name="Text 41"/>
+          <p:cNvPr id="31" name="Text 29"/>
           <p:cNvSpPr/>
           <p:nvPr/>
         </p:nvSpPr>
@@ -6491,7 +5353,7 @@
       </p:sp>
       <p:sp>
         <p:nvSpPr>
-          <p:cNvPr id="44" name="Text 42"/>
+          <p:cNvPr id="32" name="Text 30"/>
           <p:cNvSpPr/>
           <p:nvPr/>
         </p:nvSpPr>
@@ -6511,9 +5373,6 @@
           <a:lstStyle/>
           <a:p>
             <a:pPr indent="0" marL="0">
-              <a:lnSpc>
-                <a:spcPct val="115000"/>
-              </a:lnSpc>
               <a:buNone/>
             </a:pPr>
             <a:r>
@@ -6533,14 +5392,14 @@
       </p:sp>
       <p:sp>
         <p:nvSpPr>
-          <p:cNvPr id="45" name="Shape 43"/>
-          <p:cNvSpPr/>
-          <p:nvPr/>
-        </p:nvSpPr>
-        <p:spPr>
-          <a:xfrm>
-            <a:off x="109728" y="4681728"/>
-            <a:ext cx="9034272" cy="457200"/>
+          <p:cNvPr id="33" name="Shape 31"/>
+          <p:cNvSpPr/>
+          <p:nvPr/>
+        </p:nvSpPr>
+        <p:spPr>
+          <a:xfrm>
+            <a:off x="2478024" y="4681728"/>
+            <a:ext cx="6665976" cy="457200"/>
           </a:xfrm>
           <a:prstGeom prst="rect">
             <a:avLst/>
@@ -6553,66 +5412,13 @@
       </p:sp>
       <p:sp>
         <p:nvSpPr>
-          <p:cNvPr id="46" name="Shape 44"/>
-          <p:cNvSpPr/>
-          <p:nvPr/>
-        </p:nvSpPr>
-        <p:spPr>
-          <a:xfrm>
-            <a:off x="109728" y="4681728"/>
-            <a:ext cx="2529596" cy="457200"/>
-          </a:xfrm>
-          <a:prstGeom prst="rect">
-            <a:avLst/>
-          </a:prstGeom>
-          <a:solidFill>
-            <a:srgbClr val="60A5FA">
-              <a:alpha val="90000"/>
-            </a:srgbClr>
-          </a:solidFill>
-          <a:ln/>
-        </p:spPr>
-      </p:sp>
-      <p:sp>
-        <p:nvSpPr>
-          <p:cNvPr id="47" name="Shape 45"/>
-          <p:cNvSpPr/>
-          <p:nvPr/>
-        </p:nvSpPr>
-        <p:spPr>
-          <a:xfrm>
-            <a:off x="8119872" y="4736592"/>
-            <a:ext cx="621792" cy="329184"/>
-          </a:xfrm>
-          <a:prstGeom prst="roundRect">
-            <a:avLst>
-              <a:gd name="adj" fmla="val 138889"/>
-            </a:avLst>
-          </a:prstGeom>
-          <a:solidFill>
-            <a:srgbClr val="FFFFFF">
-              <a:alpha val="15000"/>
-            </a:srgbClr>
-          </a:solidFill>
-          <a:ln w="6350">
-            <a:solidFill>
-              <a:srgbClr val="FFFFFF">
-                <a:alpha val="25000"/>
-              </a:srgbClr>
-            </a:solidFill>
-            <a:prstDash val="solid"/>
-          </a:ln>
-        </p:spPr>
-      </p:sp>
-      <p:sp>
-        <p:nvSpPr>
-          <p:cNvPr id="48" name="Text 46"/>
-          <p:cNvSpPr/>
-          <p:nvPr/>
-        </p:nvSpPr>
-        <p:spPr>
-          <a:xfrm>
-            <a:off x="8119872" y="4736592"/>
+          <p:cNvPr id="34" name="Text 32"/>
+          <p:cNvSpPr/>
+          <p:nvPr/>
+        </p:nvSpPr>
+        <p:spPr>
+          <a:xfrm>
+            <a:off x="8229600" y="4736592"/>
             <a:ext cx="621792" cy="329184"/>
           </a:xfrm>
           <a:prstGeom prst="rect">
@@ -7093,26 +5899,6 @@
         </p:nvSpPr>
         <p:spPr>
           <a:xfrm>
-            <a:off x="0" y="0"/>
-            <a:ext cx="109728" cy="5143500"/>
-          </a:xfrm>
-          <a:prstGeom prst="rect">
-            <a:avLst/>
-          </a:prstGeom>
-          <a:solidFill>
-            <a:srgbClr val="60A5FA"/>
-          </a:solidFill>
-          <a:ln/>
-        </p:spPr>
-      </p:sp>
-      <p:sp>
-        <p:nvSpPr>
-          <p:cNvPr id="3" name="Shape 1"/>
-          <p:cNvSpPr/>
-          <p:nvPr/>
-        </p:nvSpPr>
-        <p:spPr>
-          <a:xfrm>
             <a:off x="6720840" y="-182880"/>
             <a:ext cx="2743200" cy="2377440"/>
           </a:xfrm>
@@ -7134,7 +5920,7 @@
       </p:sp>
       <p:sp>
         <p:nvSpPr>
-          <p:cNvPr id="4" name="Shape 2"/>
+          <p:cNvPr id="3" name="Shape 1"/>
           <p:cNvSpPr/>
           <p:nvPr/>
         </p:nvSpPr>
@@ -7161,127 +5947,34 @@
       </p:sp>
       <p:sp>
         <p:nvSpPr>
+          <p:cNvPr id="4" name="Shape 2"/>
+          <p:cNvSpPr/>
+          <p:nvPr/>
+        </p:nvSpPr>
+        <p:spPr>
+          <a:xfrm>
+            <a:off x="0" y="0"/>
+            <a:ext cx="2423160" cy="5143500"/>
+          </a:xfrm>
+          <a:prstGeom prst="rect">
+            <a:avLst/>
+          </a:prstGeom>
+          <a:solidFill>
+            <a:srgbClr val="1E3A5F"/>
+          </a:solidFill>
+          <a:ln/>
+        </p:spPr>
+      </p:sp>
+      <p:sp>
+        <p:nvSpPr>
           <p:cNvPr id="5" name="Shape 3"/>
           <p:cNvSpPr/>
           <p:nvPr/>
         </p:nvSpPr>
         <p:spPr>
           <a:xfrm>
-            <a:off x="7909560" y="201168"/>
-            <a:ext cx="685800" cy="685800"/>
-          </a:xfrm>
-          <a:prstGeom prst="ellipse">
-            <a:avLst/>
-          </a:prstGeom>
-          <a:solidFill>
-            <a:srgbClr val="EFF6FF">
-              <a:alpha val="0"/>
-            </a:srgbClr>
-          </a:solidFill>
-          <a:ln w="15875">
-            <a:solidFill>
-              <a:srgbClr val="60A5FA"/>
-            </a:solidFill>
-            <a:prstDash val="solid"/>
-          </a:ln>
-        </p:spPr>
-      </p:sp>
-      <p:sp>
-        <p:nvSpPr>
-          <p:cNvPr id="6" name="Shape 4"/>
-          <p:cNvSpPr/>
-          <p:nvPr/>
-        </p:nvSpPr>
-        <p:spPr>
-          <a:xfrm>
-            <a:off x="8183880" y="384048"/>
-            <a:ext cx="384048" cy="384048"/>
-          </a:xfrm>
-          <a:prstGeom prst="ellipse">
-            <a:avLst/>
-          </a:prstGeom>
-          <a:solidFill>
-            <a:srgbClr val="60A5FA">
-              <a:alpha val="35000"/>
-            </a:srgbClr>
-          </a:solidFill>
-          <a:ln/>
-        </p:spPr>
-      </p:sp>
-      <p:sp>
-        <p:nvSpPr>
-          <p:cNvPr id="7" name="Shape 5"/>
-          <p:cNvSpPr/>
-          <p:nvPr/>
-        </p:nvSpPr>
-        <p:spPr>
-          <a:xfrm>
-            <a:off x="109728" y="0"/>
-            <a:ext cx="9034272" cy="960120"/>
-          </a:xfrm>
-          <a:prstGeom prst="rect">
-            <a:avLst/>
-          </a:prstGeom>
-          <a:solidFill>
-            <a:srgbClr val="1E3A5F"/>
-          </a:solidFill>
-          <a:ln/>
-        </p:spPr>
-      </p:sp>
-      <p:sp>
-        <p:nvSpPr>
-          <p:cNvPr id="8" name="Shape 6"/>
-          <p:cNvSpPr/>
-          <p:nvPr/>
-        </p:nvSpPr>
-        <p:spPr>
-          <a:xfrm>
-            <a:off x="4389120" y="0"/>
-            <a:ext cx="4754880" cy="960120"/>
-          </a:xfrm>
-          <a:prstGeom prst="rect">
-            <a:avLst/>
-          </a:prstGeom>
-          <a:solidFill>
-            <a:srgbClr val="2563EB">
-              <a:alpha val="75000"/>
-            </a:srgbClr>
-          </a:solidFill>
-          <a:ln/>
-        </p:spPr>
-      </p:sp>
-      <p:sp>
-        <p:nvSpPr>
-          <p:cNvPr id="9" name="Shape 7"/>
-          <p:cNvSpPr/>
-          <p:nvPr/>
-        </p:nvSpPr>
-        <p:spPr>
-          <a:xfrm rot="21000000">
-            <a:off x="6263640" y="-320040"/>
-            <a:ext cx="3108960" cy="1234440"/>
-          </a:xfrm>
-          <a:prstGeom prst="rect">
-            <a:avLst/>
-          </a:prstGeom>
-          <a:solidFill>
-            <a:srgbClr val="FFFFFF">
-              <a:alpha val="12000"/>
-            </a:srgbClr>
-          </a:solidFill>
-          <a:ln/>
-        </p:spPr>
-      </p:sp>
-      <p:sp>
-        <p:nvSpPr>
-          <p:cNvPr id="10" name="Shape 8"/>
-          <p:cNvSpPr/>
-          <p:nvPr/>
-        </p:nvSpPr>
-        <p:spPr>
-          <a:xfrm>
-            <a:off x="109728" y="932688"/>
-            <a:ext cx="9034272" cy="36576"/>
+            <a:off x="2423160" y="0"/>
+            <a:ext cx="54864" cy="5143500"/>
           </a:xfrm>
           <a:prstGeom prst="rect">
             <a:avLst/>
@@ -7294,45 +5987,14 @@
       </p:sp>
       <p:sp>
         <p:nvSpPr>
-          <p:cNvPr id="11" name="Shape 9"/>
-          <p:cNvSpPr/>
-          <p:nvPr/>
-        </p:nvSpPr>
-        <p:spPr>
-          <a:xfrm>
-            <a:off x="475488" y="91440"/>
-            <a:ext cx="960120" cy="201168"/>
-          </a:xfrm>
-          <a:prstGeom prst="roundRect">
-            <a:avLst>
-              <a:gd name="adj" fmla="val 227273"/>
-            </a:avLst>
-          </a:prstGeom>
-          <a:solidFill>
-            <a:srgbClr val="FFFFFF">
-              <a:alpha val="12000"/>
-            </a:srgbClr>
-          </a:solidFill>
-          <a:ln w="6350">
-            <a:solidFill>
-              <a:srgbClr val="FFFFFF">
-                <a:alpha val="20000"/>
-              </a:srgbClr>
-            </a:solidFill>
-            <a:prstDash val="solid"/>
-          </a:ln>
-        </p:spPr>
-      </p:sp>
-      <p:sp>
-        <p:nvSpPr>
-          <p:cNvPr id="12" name="Text 10"/>
-          <p:cNvSpPr/>
-          <p:nvPr/>
-        </p:nvSpPr>
-        <p:spPr>
-          <a:xfrm>
-            <a:off x="502920" y="109728"/>
-            <a:ext cx="914400" cy="164592"/>
+          <p:cNvPr id="6" name="Text 4"/>
+          <p:cNvSpPr/>
+          <p:nvPr/>
+        </p:nvSpPr>
+        <p:spPr>
+          <a:xfrm>
+            <a:off x="228600" y="411480"/>
+            <a:ext cx="1965960" cy="4114800"/>
           </a:xfrm>
           <a:prstGeom prst="rect">
             <a:avLst/>
@@ -7341,55 +6003,14 @@
           <a:ln/>
         </p:spPr>
         <p:txBody>
-          <a:bodyPr wrap="square" rtlCol="0" anchor="ctr"/>
+          <a:bodyPr wrap="square" rtlCol="0" anchor="t"/>
           <a:lstStyle/>
           <a:p>
             <a:pPr indent="0" marL="0">
               <a:buNone/>
             </a:pPr>
             <a:r>
-              <a:rPr lang="en-US" sz="700" b="1" spc="120" kern="0" dirty="0">
-                <a:solidFill>
-                  <a:srgbClr val="FFFFFF">
-                    <a:alpha val="75000"/>
-                  </a:srgbClr>
-                </a:solidFill>
-                <a:latin typeface="Microsoft YaHei" pitchFamily="34" charset="0"/>
-                <a:ea typeface="Microsoft YaHei" pitchFamily="34" charset="-122"/>
-                <a:cs typeface="Microsoft YaHei" pitchFamily="34" charset="-120"/>
-              </a:rPr>
-              <a:t>KEY POINTS</a:t>
-            </a:r>
-            <a:endParaRPr lang="en-US" sz="700" dirty="0"/>
-          </a:p>
-        </p:txBody>
-      </p:sp>
-      <p:sp>
-        <p:nvSpPr>
-          <p:cNvPr id="13" name="Text 11"/>
-          <p:cNvSpPr/>
-          <p:nvPr/>
-        </p:nvSpPr>
-        <p:spPr>
-          <a:xfrm>
-            <a:off x="502920" y="329184"/>
-            <a:ext cx="8046720" cy="530352"/>
-          </a:xfrm>
-          <a:prstGeom prst="rect">
-            <a:avLst/>
-          </a:prstGeom>
-          <a:noFill/>
-          <a:ln/>
-        </p:spPr>
-        <p:txBody>
-          <a:bodyPr wrap="square" rtlCol="0" anchor="t"/>
-          <a:lstStyle/>
-          <a:p>
-            <a:pPr indent="0" marL="0">
-              <a:buNone/>
-            </a:pPr>
-            <a:r>
-              <a:rPr lang="en-US" sz="2200" b="1" dirty="0">
+              <a:rPr lang="en-US" sz="1800" b="1" dirty="0">
                 <a:solidFill>
                   <a:srgbClr val="FFFFFF"/>
                 </a:solidFill>
@@ -7399,20 +6020,20 @@
               </a:rPr>
               <a:t>CC_TITLE</a:t>
             </a:r>
-            <a:endParaRPr lang="en-US" sz="2200" dirty="0"/>
-          </a:p>
-        </p:txBody>
-      </p:sp>
-      <p:sp>
-        <p:nvSpPr>
-          <p:cNvPr id="14" name="Shape 12"/>
-          <p:cNvSpPr/>
-          <p:nvPr/>
-        </p:nvSpPr>
-        <p:spPr>
-          <a:xfrm>
-            <a:off x="411480" y="1078992"/>
-            <a:ext cx="8321040" cy="3493008"/>
+            <a:endParaRPr lang="en-US" sz="1800" dirty="0"/>
+          </a:p>
+        </p:txBody>
+      </p:sp>
+      <p:sp>
+        <p:nvSpPr>
+          <p:cNvPr id="7" name="Shape 5"/>
+          <p:cNvSpPr/>
+          <p:nvPr/>
+        </p:nvSpPr>
+        <p:spPr>
+          <a:xfrm>
+            <a:off x="2606040" y="1078992"/>
+            <a:ext cx="6126480" cy="3493008"/>
           </a:xfrm>
           <a:prstGeom prst="roundRect">
             <a:avLst>
@@ -7439,7 +6060,7 @@
       </p:sp>
       <p:sp>
         <p:nvSpPr>
-          <p:cNvPr id="15" name="Shape 13"/>
+          <p:cNvPr id="8" name="Shape 6"/>
           <p:cNvSpPr/>
           <p:nvPr/>
         </p:nvSpPr>
@@ -7468,7 +6089,7 @@
       </p:sp>
       <p:sp>
         <p:nvSpPr>
-          <p:cNvPr id="16" name="Shape 14"/>
+          <p:cNvPr id="9" name="Shape 7"/>
           <p:cNvSpPr/>
           <p:nvPr/>
         </p:nvSpPr>
@@ -7490,7 +6111,7 @@
       </p:sp>
       <p:sp>
         <p:nvSpPr>
-          <p:cNvPr id="17" name="Shape 15"/>
+          <p:cNvPr id="10" name="Shape 8"/>
           <p:cNvSpPr/>
           <p:nvPr/>
         </p:nvSpPr>
@@ -7524,36 +6145,7 @@
       </p:sp>
       <p:sp>
         <p:nvSpPr>
-          <p:cNvPr id="18" name="Shape 16"/>
-          <p:cNvSpPr/>
-          <p:nvPr/>
-        </p:nvSpPr>
-        <p:spPr>
-          <a:xfrm>
-            <a:off x="796625" y="1500713"/>
-            <a:ext cx="190927" cy="190927"/>
-          </a:xfrm>
-          <a:prstGeom prst="roundRect">
-            <a:avLst>
-              <a:gd name="adj" fmla="val 181992"/>
-            </a:avLst>
-          </a:prstGeom>
-          <a:solidFill>
-            <a:srgbClr val="60A5FA">
-              <a:alpha val="80000"/>
-            </a:srgbClr>
-          </a:solidFill>
-          <a:ln w="12700">
-            <a:solidFill>
-              <a:srgbClr val="333333"/>
-            </a:solidFill>
-            <a:prstDash val="solid"/>
-          </a:ln>
-        </p:spPr>
-      </p:sp>
-      <p:sp>
-        <p:nvSpPr>
-          <p:cNvPr id="19" name="Text 17"/>
+          <p:cNvPr id="11" name="Text 9"/>
           <p:cNvSpPr/>
           <p:nvPr/>
         </p:nvSpPr>
@@ -7592,7 +6184,7 @@
       </p:sp>
       <p:sp>
         <p:nvSpPr>
-          <p:cNvPr id="20" name="Text 18"/>
+          <p:cNvPr id="12" name="Text 10"/>
           <p:cNvSpPr/>
           <p:nvPr/>
         </p:nvSpPr>
@@ -7612,9 +6204,6 @@
           <a:lstStyle/>
           <a:p>
             <a:pPr indent="0" marL="0">
-              <a:lnSpc>
-                <a:spcPct val="115000"/>
-              </a:lnSpc>
               <a:buNone/>
             </a:pPr>
             <a:r>
@@ -7634,7 +6223,7 @@
       </p:sp>
       <p:sp>
         <p:nvSpPr>
-          <p:cNvPr id="21" name="Shape 19"/>
+          <p:cNvPr id="13" name="Shape 11"/>
           <p:cNvSpPr/>
           <p:nvPr/>
         </p:nvSpPr>
@@ -7663,7 +6252,7 @@
       </p:sp>
       <p:sp>
         <p:nvSpPr>
-          <p:cNvPr id="22" name="Shape 20"/>
+          <p:cNvPr id="14" name="Shape 12"/>
           <p:cNvSpPr/>
           <p:nvPr/>
         </p:nvSpPr>
@@ -7685,7 +6274,7 @@
       </p:sp>
       <p:sp>
         <p:nvSpPr>
-          <p:cNvPr id="23" name="Shape 21"/>
+          <p:cNvPr id="15" name="Shape 13"/>
           <p:cNvSpPr/>
           <p:nvPr/>
         </p:nvSpPr>
@@ -7719,36 +6308,7 @@
       </p:sp>
       <p:sp>
         <p:nvSpPr>
-          <p:cNvPr id="24" name="Shape 22"/>
-          <p:cNvSpPr/>
-          <p:nvPr/>
-        </p:nvSpPr>
-        <p:spPr>
-          <a:xfrm>
-            <a:off x="796625" y="2122505"/>
-            <a:ext cx="190927" cy="190927"/>
-          </a:xfrm>
-          <a:prstGeom prst="roundRect">
-            <a:avLst>
-              <a:gd name="adj" fmla="val 181992"/>
-            </a:avLst>
-          </a:prstGeom>
-          <a:solidFill>
-            <a:srgbClr val="60A5FA">
-              <a:alpha val="80000"/>
-            </a:srgbClr>
-          </a:solidFill>
-          <a:ln w="12700">
-            <a:solidFill>
-              <a:srgbClr val="333333"/>
-            </a:solidFill>
-            <a:prstDash val="solid"/>
-          </a:ln>
-        </p:spPr>
-      </p:sp>
-      <p:sp>
-        <p:nvSpPr>
-          <p:cNvPr id="25" name="Text 23"/>
+          <p:cNvPr id="16" name="Text 14"/>
           <p:cNvSpPr/>
           <p:nvPr/>
         </p:nvSpPr>
@@ -7787,7 +6347,7 @@
       </p:sp>
       <p:sp>
         <p:nvSpPr>
-          <p:cNvPr id="26" name="Text 24"/>
+          <p:cNvPr id="17" name="Text 15"/>
           <p:cNvSpPr/>
           <p:nvPr/>
         </p:nvSpPr>
@@ -7807,9 +6367,6 @@
           <a:lstStyle/>
           <a:p>
             <a:pPr indent="0" marL="0">
-              <a:lnSpc>
-                <a:spcPct val="115000"/>
-              </a:lnSpc>
               <a:buNone/>
             </a:pPr>
             <a:r>
@@ -7829,7 +6386,7 @@
       </p:sp>
       <p:sp>
         <p:nvSpPr>
-          <p:cNvPr id="27" name="Shape 25"/>
+          <p:cNvPr id="18" name="Shape 16"/>
           <p:cNvSpPr/>
           <p:nvPr/>
         </p:nvSpPr>
@@ -7858,7 +6415,7 @@
       </p:sp>
       <p:sp>
         <p:nvSpPr>
-          <p:cNvPr id="28" name="Shape 26"/>
+          <p:cNvPr id="19" name="Shape 17"/>
           <p:cNvSpPr/>
           <p:nvPr/>
         </p:nvSpPr>
@@ -7880,7 +6437,7 @@
       </p:sp>
       <p:sp>
         <p:nvSpPr>
-          <p:cNvPr id="29" name="Shape 27"/>
+          <p:cNvPr id="20" name="Shape 18"/>
           <p:cNvSpPr/>
           <p:nvPr/>
         </p:nvSpPr>
@@ -7914,36 +6471,7 @@
       </p:sp>
       <p:sp>
         <p:nvSpPr>
-          <p:cNvPr id="30" name="Shape 28"/>
-          <p:cNvSpPr/>
-          <p:nvPr/>
-        </p:nvSpPr>
-        <p:spPr>
-          <a:xfrm>
-            <a:off x="796625" y="2744297"/>
-            <a:ext cx="190927" cy="190927"/>
-          </a:xfrm>
-          <a:prstGeom prst="roundRect">
-            <a:avLst>
-              <a:gd name="adj" fmla="val 181992"/>
-            </a:avLst>
-          </a:prstGeom>
-          <a:solidFill>
-            <a:srgbClr val="60A5FA">
-              <a:alpha val="80000"/>
-            </a:srgbClr>
-          </a:solidFill>
-          <a:ln w="12700">
-            <a:solidFill>
-              <a:srgbClr val="333333"/>
-            </a:solidFill>
-            <a:prstDash val="solid"/>
-          </a:ln>
-        </p:spPr>
-      </p:sp>
-      <p:sp>
-        <p:nvSpPr>
-          <p:cNvPr id="31" name="Text 29"/>
+          <p:cNvPr id="21" name="Text 19"/>
           <p:cNvSpPr/>
           <p:nvPr/>
         </p:nvSpPr>
@@ -7982,7 +6510,7 @@
       </p:sp>
       <p:sp>
         <p:nvSpPr>
-          <p:cNvPr id="32" name="Text 30"/>
+          <p:cNvPr id="22" name="Text 20"/>
           <p:cNvSpPr/>
           <p:nvPr/>
         </p:nvSpPr>
@@ -8002,9 +6530,6 @@
           <a:lstStyle/>
           <a:p>
             <a:pPr indent="0" marL="0">
-              <a:lnSpc>
-                <a:spcPct val="115000"/>
-              </a:lnSpc>
               <a:buNone/>
             </a:pPr>
             <a:r>
@@ -8024,7 +6549,7 @@
       </p:sp>
       <p:sp>
         <p:nvSpPr>
-          <p:cNvPr id="33" name="Shape 31"/>
+          <p:cNvPr id="23" name="Shape 21"/>
           <p:cNvSpPr/>
           <p:nvPr/>
         </p:nvSpPr>
@@ -8053,7 +6578,7 @@
       </p:sp>
       <p:sp>
         <p:nvSpPr>
-          <p:cNvPr id="34" name="Shape 32"/>
+          <p:cNvPr id="24" name="Shape 22"/>
           <p:cNvSpPr/>
           <p:nvPr/>
         </p:nvSpPr>
@@ -8075,7 +6600,7 @@
       </p:sp>
       <p:sp>
         <p:nvSpPr>
-          <p:cNvPr id="35" name="Shape 33"/>
+          <p:cNvPr id="25" name="Shape 23"/>
           <p:cNvSpPr/>
           <p:nvPr/>
         </p:nvSpPr>
@@ -8109,36 +6634,7 @@
       </p:sp>
       <p:sp>
         <p:nvSpPr>
-          <p:cNvPr id="36" name="Shape 34"/>
-          <p:cNvSpPr/>
-          <p:nvPr/>
-        </p:nvSpPr>
-        <p:spPr>
-          <a:xfrm>
-            <a:off x="796625" y="3366089"/>
-            <a:ext cx="190927" cy="190927"/>
-          </a:xfrm>
-          <a:prstGeom prst="roundRect">
-            <a:avLst>
-              <a:gd name="adj" fmla="val 181992"/>
-            </a:avLst>
-          </a:prstGeom>
-          <a:solidFill>
-            <a:srgbClr val="60A5FA">
-              <a:alpha val="80000"/>
-            </a:srgbClr>
-          </a:solidFill>
-          <a:ln w="12700">
-            <a:solidFill>
-              <a:srgbClr val="333333"/>
-            </a:solidFill>
-            <a:prstDash val="solid"/>
-          </a:ln>
-        </p:spPr>
-      </p:sp>
-      <p:sp>
-        <p:nvSpPr>
-          <p:cNvPr id="37" name="Text 35"/>
+          <p:cNvPr id="26" name="Text 24"/>
           <p:cNvSpPr/>
           <p:nvPr/>
         </p:nvSpPr>
@@ -8177,7 +6673,7 @@
       </p:sp>
       <p:sp>
         <p:nvSpPr>
-          <p:cNvPr id="38" name="Text 36"/>
+          <p:cNvPr id="27" name="Text 25"/>
           <p:cNvSpPr/>
           <p:nvPr/>
         </p:nvSpPr>
@@ -8197,9 +6693,6 @@
           <a:lstStyle/>
           <a:p>
             <a:pPr indent="0" marL="0">
-              <a:lnSpc>
-                <a:spcPct val="115000"/>
-              </a:lnSpc>
               <a:buNone/>
             </a:pPr>
             <a:r>
@@ -8219,7 +6712,7 @@
       </p:sp>
       <p:sp>
         <p:nvSpPr>
-          <p:cNvPr id="39" name="Shape 37"/>
+          <p:cNvPr id="28" name="Shape 26"/>
           <p:cNvSpPr/>
           <p:nvPr/>
         </p:nvSpPr>
@@ -8248,7 +6741,7 @@
       </p:sp>
       <p:sp>
         <p:nvSpPr>
-          <p:cNvPr id="40" name="Shape 38"/>
+          <p:cNvPr id="29" name="Shape 27"/>
           <p:cNvSpPr/>
           <p:nvPr/>
         </p:nvSpPr>
@@ -8270,7 +6763,7 @@
       </p:sp>
       <p:sp>
         <p:nvSpPr>
-          <p:cNvPr id="41" name="Shape 39"/>
+          <p:cNvPr id="30" name="Shape 28"/>
           <p:cNvSpPr/>
           <p:nvPr/>
         </p:nvSpPr>
@@ -8304,36 +6797,7 @@
       </p:sp>
       <p:sp>
         <p:nvSpPr>
-          <p:cNvPr id="42" name="Shape 40"/>
-          <p:cNvSpPr/>
-          <p:nvPr/>
-        </p:nvSpPr>
-        <p:spPr>
-          <a:xfrm>
-            <a:off x="796625" y="3987881"/>
-            <a:ext cx="190927" cy="190927"/>
-          </a:xfrm>
-          <a:prstGeom prst="roundRect">
-            <a:avLst>
-              <a:gd name="adj" fmla="val 181992"/>
-            </a:avLst>
-          </a:prstGeom>
-          <a:solidFill>
-            <a:srgbClr val="60A5FA">
-              <a:alpha val="80000"/>
-            </a:srgbClr>
-          </a:solidFill>
-          <a:ln w="12700">
-            <a:solidFill>
-              <a:srgbClr val="333333"/>
-            </a:solidFill>
-            <a:prstDash val="solid"/>
-          </a:ln>
-        </p:spPr>
-      </p:sp>
-      <p:sp>
-        <p:nvSpPr>
-          <p:cNvPr id="43" name="Text 41"/>
+          <p:cNvPr id="31" name="Text 29"/>
           <p:cNvSpPr/>
           <p:nvPr/>
         </p:nvSpPr>
@@ -8372,7 +6836,7 @@
       </p:sp>
       <p:sp>
         <p:nvSpPr>
-          <p:cNvPr id="44" name="Text 42"/>
+          <p:cNvPr id="32" name="Text 30"/>
           <p:cNvSpPr/>
           <p:nvPr/>
         </p:nvSpPr>
@@ -8392,9 +6856,6 @@
           <a:lstStyle/>
           <a:p>
             <a:pPr indent="0" marL="0">
-              <a:lnSpc>
-                <a:spcPct val="115000"/>
-              </a:lnSpc>
               <a:buNone/>
             </a:pPr>
             <a:r>
@@ -8414,14 +6875,14 @@
       </p:sp>
       <p:sp>
         <p:nvSpPr>
-          <p:cNvPr id="45" name="Shape 43"/>
-          <p:cNvSpPr/>
-          <p:nvPr/>
-        </p:nvSpPr>
-        <p:spPr>
-          <a:xfrm>
-            <a:off x="109728" y="4681728"/>
-            <a:ext cx="9034272" cy="457200"/>
+          <p:cNvPr id="33" name="Shape 31"/>
+          <p:cNvSpPr/>
+          <p:nvPr/>
+        </p:nvSpPr>
+        <p:spPr>
+          <a:xfrm>
+            <a:off x="2478024" y="4681728"/>
+            <a:ext cx="6665976" cy="457200"/>
           </a:xfrm>
           <a:prstGeom prst="rect">
             <a:avLst/>
@@ -8434,66 +6895,13 @@
       </p:sp>
       <p:sp>
         <p:nvSpPr>
-          <p:cNvPr id="46" name="Shape 44"/>
-          <p:cNvSpPr/>
-          <p:nvPr/>
-        </p:nvSpPr>
-        <p:spPr>
-          <a:xfrm>
-            <a:off x="109728" y="4681728"/>
-            <a:ext cx="2529596" cy="457200"/>
-          </a:xfrm>
-          <a:prstGeom prst="rect">
-            <a:avLst/>
-          </a:prstGeom>
-          <a:solidFill>
-            <a:srgbClr val="60A5FA">
-              <a:alpha val="90000"/>
-            </a:srgbClr>
-          </a:solidFill>
-          <a:ln/>
-        </p:spPr>
-      </p:sp>
-      <p:sp>
-        <p:nvSpPr>
-          <p:cNvPr id="47" name="Shape 45"/>
-          <p:cNvSpPr/>
-          <p:nvPr/>
-        </p:nvSpPr>
-        <p:spPr>
-          <a:xfrm>
-            <a:off x="8119872" y="4736592"/>
-            <a:ext cx="621792" cy="329184"/>
-          </a:xfrm>
-          <a:prstGeom prst="roundRect">
-            <a:avLst>
-              <a:gd name="adj" fmla="val 138889"/>
-            </a:avLst>
-          </a:prstGeom>
-          <a:solidFill>
-            <a:srgbClr val="FFFFFF">
-              <a:alpha val="15000"/>
-            </a:srgbClr>
-          </a:solidFill>
-          <a:ln w="6350">
-            <a:solidFill>
-              <a:srgbClr val="FFFFFF">
-                <a:alpha val="25000"/>
-              </a:srgbClr>
-            </a:solidFill>
-            <a:prstDash val="solid"/>
-          </a:ln>
-        </p:spPr>
-      </p:sp>
-      <p:sp>
-        <p:nvSpPr>
-          <p:cNvPr id="48" name="Text 46"/>
-          <p:cNvSpPr/>
-          <p:nvPr/>
-        </p:nvSpPr>
-        <p:spPr>
-          <a:xfrm>
-            <a:off x="8119872" y="4736592"/>
+          <p:cNvPr id="34" name="Text 32"/>
+          <p:cNvSpPr/>
+          <p:nvPr/>
+        </p:nvSpPr>
+        <p:spPr>
+          <a:xfrm>
+            <a:off x="8229600" y="4736592"/>
             <a:ext cx="621792" cy="329184"/>
           </a:xfrm>
           <a:prstGeom prst="rect">
@@ -8564,26 +6972,6 @@
         </p:nvSpPr>
         <p:spPr>
           <a:xfrm>
-            <a:off x="0" y="0"/>
-            <a:ext cx="109728" cy="5143500"/>
-          </a:xfrm>
-          <a:prstGeom prst="rect">
-            <a:avLst/>
-          </a:prstGeom>
-          <a:solidFill>
-            <a:srgbClr val="60A5FA"/>
-          </a:solidFill>
-          <a:ln/>
-        </p:spPr>
-      </p:sp>
-      <p:sp>
-        <p:nvSpPr>
-          <p:cNvPr id="3" name="Shape 1"/>
-          <p:cNvSpPr/>
-          <p:nvPr/>
-        </p:nvSpPr>
-        <p:spPr>
-          <a:xfrm>
             <a:off x="6720840" y="-182880"/>
             <a:ext cx="2743200" cy="2377440"/>
           </a:xfrm>
@@ -8605,7 +6993,7 @@
       </p:sp>
       <p:sp>
         <p:nvSpPr>
-          <p:cNvPr id="4" name="Shape 2"/>
+          <p:cNvPr id="3" name="Shape 1"/>
           <p:cNvSpPr/>
           <p:nvPr/>
         </p:nvSpPr>
@@ -8632,127 +7020,34 @@
       </p:sp>
       <p:sp>
         <p:nvSpPr>
+          <p:cNvPr id="4" name="Shape 2"/>
+          <p:cNvSpPr/>
+          <p:nvPr/>
+        </p:nvSpPr>
+        <p:spPr>
+          <a:xfrm>
+            <a:off x="0" y="0"/>
+            <a:ext cx="2423160" cy="5143500"/>
+          </a:xfrm>
+          <a:prstGeom prst="rect">
+            <a:avLst/>
+          </a:prstGeom>
+          <a:solidFill>
+            <a:srgbClr val="1E3A5F"/>
+          </a:solidFill>
+          <a:ln/>
+        </p:spPr>
+      </p:sp>
+      <p:sp>
+        <p:nvSpPr>
           <p:cNvPr id="5" name="Shape 3"/>
           <p:cNvSpPr/>
           <p:nvPr/>
         </p:nvSpPr>
         <p:spPr>
           <a:xfrm>
-            <a:off x="7909560" y="201168"/>
-            <a:ext cx="685800" cy="685800"/>
-          </a:xfrm>
-          <a:prstGeom prst="ellipse">
-            <a:avLst/>
-          </a:prstGeom>
-          <a:solidFill>
-            <a:srgbClr val="EFF6FF">
-              <a:alpha val="0"/>
-            </a:srgbClr>
-          </a:solidFill>
-          <a:ln w="15875">
-            <a:solidFill>
-              <a:srgbClr val="60A5FA"/>
-            </a:solidFill>
-            <a:prstDash val="solid"/>
-          </a:ln>
-        </p:spPr>
-      </p:sp>
-      <p:sp>
-        <p:nvSpPr>
-          <p:cNvPr id="6" name="Shape 4"/>
-          <p:cNvSpPr/>
-          <p:nvPr/>
-        </p:nvSpPr>
-        <p:spPr>
-          <a:xfrm>
-            <a:off x="8183880" y="384048"/>
-            <a:ext cx="384048" cy="384048"/>
-          </a:xfrm>
-          <a:prstGeom prst="ellipse">
-            <a:avLst/>
-          </a:prstGeom>
-          <a:solidFill>
-            <a:srgbClr val="60A5FA">
-              <a:alpha val="35000"/>
-            </a:srgbClr>
-          </a:solidFill>
-          <a:ln/>
-        </p:spPr>
-      </p:sp>
-      <p:sp>
-        <p:nvSpPr>
-          <p:cNvPr id="7" name="Shape 5"/>
-          <p:cNvSpPr/>
-          <p:nvPr/>
-        </p:nvSpPr>
-        <p:spPr>
-          <a:xfrm>
-            <a:off x="109728" y="0"/>
-            <a:ext cx="9034272" cy="960120"/>
-          </a:xfrm>
-          <a:prstGeom prst="rect">
-            <a:avLst/>
-          </a:prstGeom>
-          <a:solidFill>
-            <a:srgbClr val="1E3A5F"/>
-          </a:solidFill>
-          <a:ln/>
-        </p:spPr>
-      </p:sp>
-      <p:sp>
-        <p:nvSpPr>
-          <p:cNvPr id="8" name="Shape 6"/>
-          <p:cNvSpPr/>
-          <p:nvPr/>
-        </p:nvSpPr>
-        <p:spPr>
-          <a:xfrm>
-            <a:off x="4389120" y="0"/>
-            <a:ext cx="4754880" cy="960120"/>
-          </a:xfrm>
-          <a:prstGeom prst="rect">
-            <a:avLst/>
-          </a:prstGeom>
-          <a:solidFill>
-            <a:srgbClr val="2563EB">
-              <a:alpha val="75000"/>
-            </a:srgbClr>
-          </a:solidFill>
-          <a:ln/>
-        </p:spPr>
-      </p:sp>
-      <p:sp>
-        <p:nvSpPr>
-          <p:cNvPr id="9" name="Shape 7"/>
-          <p:cNvSpPr/>
-          <p:nvPr/>
-        </p:nvSpPr>
-        <p:spPr>
-          <a:xfrm rot="21000000">
-            <a:off x="6263640" y="-320040"/>
-            <a:ext cx="3108960" cy="1234440"/>
-          </a:xfrm>
-          <a:prstGeom prst="rect">
-            <a:avLst/>
-          </a:prstGeom>
-          <a:solidFill>
-            <a:srgbClr val="FFFFFF">
-              <a:alpha val="12000"/>
-            </a:srgbClr>
-          </a:solidFill>
-          <a:ln/>
-        </p:spPr>
-      </p:sp>
-      <p:sp>
-        <p:nvSpPr>
-          <p:cNvPr id="10" name="Shape 8"/>
-          <p:cNvSpPr/>
-          <p:nvPr/>
-        </p:nvSpPr>
-        <p:spPr>
-          <a:xfrm>
-            <a:off x="109728" y="932688"/>
-            <a:ext cx="9034272" cy="36576"/>
+            <a:off x="2423160" y="0"/>
+            <a:ext cx="54864" cy="5143500"/>
           </a:xfrm>
           <a:prstGeom prst="rect">
             <a:avLst/>
@@ -8765,45 +7060,14 @@
       </p:sp>
       <p:sp>
         <p:nvSpPr>
-          <p:cNvPr id="11" name="Shape 9"/>
-          <p:cNvSpPr/>
-          <p:nvPr/>
-        </p:nvSpPr>
-        <p:spPr>
-          <a:xfrm>
-            <a:off x="475488" y="91440"/>
-            <a:ext cx="960120" cy="201168"/>
-          </a:xfrm>
-          <a:prstGeom prst="roundRect">
-            <a:avLst>
-              <a:gd name="adj" fmla="val 227273"/>
-            </a:avLst>
-          </a:prstGeom>
-          <a:solidFill>
-            <a:srgbClr val="FFFFFF">
-              <a:alpha val="12000"/>
-            </a:srgbClr>
-          </a:solidFill>
-          <a:ln w="6350">
-            <a:solidFill>
-              <a:srgbClr val="FFFFFF">
-                <a:alpha val="20000"/>
-              </a:srgbClr>
-            </a:solidFill>
-            <a:prstDash val="solid"/>
-          </a:ln>
-        </p:spPr>
-      </p:sp>
-      <p:sp>
-        <p:nvSpPr>
-          <p:cNvPr id="12" name="Text 10"/>
-          <p:cNvSpPr/>
-          <p:nvPr/>
-        </p:nvSpPr>
-        <p:spPr>
-          <a:xfrm>
-            <a:off x="502920" y="109728"/>
-            <a:ext cx="914400" cy="164592"/>
+          <p:cNvPr id="6" name="Text 4"/>
+          <p:cNvSpPr/>
+          <p:nvPr/>
+        </p:nvSpPr>
+        <p:spPr>
+          <a:xfrm>
+            <a:off x="228600" y="411480"/>
+            <a:ext cx="1965960" cy="4114800"/>
           </a:xfrm>
           <a:prstGeom prst="rect">
             <a:avLst/>
@@ -8812,55 +7076,14 @@
           <a:ln/>
         </p:spPr>
         <p:txBody>
-          <a:bodyPr wrap="square" rtlCol="0" anchor="ctr"/>
+          <a:bodyPr wrap="square" rtlCol="0" anchor="t"/>
           <a:lstStyle/>
           <a:p>
             <a:pPr indent="0" marL="0">
               <a:buNone/>
             </a:pPr>
             <a:r>
-              <a:rPr lang="en-US" sz="700" b="1" spc="120" kern="0" dirty="0">
-                <a:solidFill>
-                  <a:srgbClr val="FFFFFF">
-                    <a:alpha val="75000"/>
-                  </a:srgbClr>
-                </a:solidFill>
-                <a:latin typeface="Microsoft YaHei" pitchFamily="34" charset="0"/>
-                <a:ea typeface="Microsoft YaHei" pitchFamily="34" charset="-122"/>
-                <a:cs typeface="Microsoft YaHei" pitchFamily="34" charset="-120"/>
-              </a:rPr>
-              <a:t>KEY POINTS</a:t>
-            </a:r>
-            <a:endParaRPr lang="en-US" sz="700" dirty="0"/>
-          </a:p>
-        </p:txBody>
-      </p:sp>
-      <p:sp>
-        <p:nvSpPr>
-          <p:cNvPr id="13" name="Text 11"/>
-          <p:cNvSpPr/>
-          <p:nvPr/>
-        </p:nvSpPr>
-        <p:spPr>
-          <a:xfrm>
-            <a:off x="502920" y="329184"/>
-            <a:ext cx="8046720" cy="530352"/>
-          </a:xfrm>
-          <a:prstGeom prst="rect">
-            <a:avLst/>
-          </a:prstGeom>
-          <a:noFill/>
-          <a:ln/>
-        </p:spPr>
-        <p:txBody>
-          <a:bodyPr wrap="square" rtlCol="0" anchor="t"/>
-          <a:lstStyle/>
-          <a:p>
-            <a:pPr indent="0" marL="0">
-              <a:buNone/>
-            </a:pPr>
-            <a:r>
-              <a:rPr lang="en-US" sz="2200" b="1" dirty="0">
+              <a:rPr lang="en-US" sz="1800" b="1" dirty="0">
                 <a:solidFill>
                   <a:srgbClr val="FFFFFF"/>
                 </a:solidFill>
@@ -8870,20 +7093,20 @@
               </a:rPr>
               <a:t>CC_TITLE</a:t>
             </a:r>
-            <a:endParaRPr lang="en-US" sz="2200" dirty="0"/>
-          </a:p>
-        </p:txBody>
-      </p:sp>
-      <p:sp>
-        <p:nvSpPr>
-          <p:cNvPr id="14" name="Shape 12"/>
-          <p:cNvSpPr/>
-          <p:nvPr/>
-        </p:nvSpPr>
-        <p:spPr>
-          <a:xfrm>
-            <a:off x="411480" y="1078992"/>
-            <a:ext cx="8321040" cy="3493008"/>
+            <a:endParaRPr lang="en-US" sz="1800" dirty="0"/>
+          </a:p>
+        </p:txBody>
+      </p:sp>
+      <p:sp>
+        <p:nvSpPr>
+          <p:cNvPr id="7" name="Shape 5"/>
+          <p:cNvSpPr/>
+          <p:nvPr/>
+        </p:nvSpPr>
+        <p:spPr>
+          <a:xfrm>
+            <a:off x="2606040" y="1078992"/>
+            <a:ext cx="6126480" cy="3493008"/>
           </a:xfrm>
           <a:prstGeom prst="roundRect">
             <a:avLst>
@@ -8910,7 +7133,7 @@
       </p:sp>
       <p:sp>
         <p:nvSpPr>
-          <p:cNvPr id="15" name="Shape 13"/>
+          <p:cNvPr id="8" name="Shape 6"/>
           <p:cNvSpPr/>
           <p:nvPr/>
         </p:nvSpPr>
@@ -8939,7 +7162,7 @@
       </p:sp>
       <p:sp>
         <p:nvSpPr>
-          <p:cNvPr id="16" name="Shape 14"/>
+          <p:cNvPr id="9" name="Shape 7"/>
           <p:cNvSpPr/>
           <p:nvPr/>
         </p:nvSpPr>
@@ -8961,7 +7184,7 @@
       </p:sp>
       <p:sp>
         <p:nvSpPr>
-          <p:cNvPr id="17" name="Shape 15"/>
+          <p:cNvPr id="10" name="Shape 8"/>
           <p:cNvSpPr/>
           <p:nvPr/>
         </p:nvSpPr>
@@ -8995,36 +7218,7 @@
       </p:sp>
       <p:sp>
         <p:nvSpPr>
-          <p:cNvPr id="18" name="Shape 16"/>
-          <p:cNvSpPr/>
-          <p:nvPr/>
-        </p:nvSpPr>
-        <p:spPr>
-          <a:xfrm>
-            <a:off x="796625" y="1500713"/>
-            <a:ext cx="190927" cy="190927"/>
-          </a:xfrm>
-          <a:prstGeom prst="roundRect">
-            <a:avLst>
-              <a:gd name="adj" fmla="val 181992"/>
-            </a:avLst>
-          </a:prstGeom>
-          <a:solidFill>
-            <a:srgbClr val="60A5FA">
-              <a:alpha val="80000"/>
-            </a:srgbClr>
-          </a:solidFill>
-          <a:ln w="12700">
-            <a:solidFill>
-              <a:srgbClr val="333333"/>
-            </a:solidFill>
-            <a:prstDash val="solid"/>
-          </a:ln>
-        </p:spPr>
-      </p:sp>
-      <p:sp>
-        <p:nvSpPr>
-          <p:cNvPr id="19" name="Text 17"/>
+          <p:cNvPr id="11" name="Text 9"/>
           <p:cNvSpPr/>
           <p:nvPr/>
         </p:nvSpPr>
@@ -9063,7 +7257,7 @@
       </p:sp>
       <p:sp>
         <p:nvSpPr>
-          <p:cNvPr id="20" name="Text 18"/>
+          <p:cNvPr id="12" name="Text 10"/>
           <p:cNvSpPr/>
           <p:nvPr/>
         </p:nvSpPr>
@@ -9083,9 +7277,6 @@
           <a:lstStyle/>
           <a:p>
             <a:pPr indent="0" marL="0">
-              <a:lnSpc>
-                <a:spcPct val="115000"/>
-              </a:lnSpc>
               <a:buNone/>
             </a:pPr>
             <a:r>
@@ -9105,7 +7296,7 @@
       </p:sp>
       <p:sp>
         <p:nvSpPr>
-          <p:cNvPr id="21" name="Shape 19"/>
+          <p:cNvPr id="13" name="Shape 11"/>
           <p:cNvSpPr/>
           <p:nvPr/>
         </p:nvSpPr>
@@ -9134,7 +7325,7 @@
       </p:sp>
       <p:sp>
         <p:nvSpPr>
-          <p:cNvPr id="22" name="Shape 20"/>
+          <p:cNvPr id="14" name="Shape 12"/>
           <p:cNvSpPr/>
           <p:nvPr/>
         </p:nvSpPr>
@@ -9156,7 +7347,7 @@
       </p:sp>
       <p:sp>
         <p:nvSpPr>
-          <p:cNvPr id="23" name="Shape 21"/>
+          <p:cNvPr id="15" name="Shape 13"/>
           <p:cNvSpPr/>
           <p:nvPr/>
         </p:nvSpPr>
@@ -9190,36 +7381,7 @@
       </p:sp>
       <p:sp>
         <p:nvSpPr>
-          <p:cNvPr id="24" name="Shape 22"/>
-          <p:cNvSpPr/>
-          <p:nvPr/>
-        </p:nvSpPr>
-        <p:spPr>
-          <a:xfrm>
-            <a:off x="796625" y="2122505"/>
-            <a:ext cx="190927" cy="190927"/>
-          </a:xfrm>
-          <a:prstGeom prst="roundRect">
-            <a:avLst>
-              <a:gd name="adj" fmla="val 181992"/>
-            </a:avLst>
-          </a:prstGeom>
-          <a:solidFill>
-            <a:srgbClr val="60A5FA">
-              <a:alpha val="80000"/>
-            </a:srgbClr>
-          </a:solidFill>
-          <a:ln w="12700">
-            <a:solidFill>
-              <a:srgbClr val="333333"/>
-            </a:solidFill>
-            <a:prstDash val="solid"/>
-          </a:ln>
-        </p:spPr>
-      </p:sp>
-      <p:sp>
-        <p:nvSpPr>
-          <p:cNvPr id="25" name="Text 23"/>
+          <p:cNvPr id="16" name="Text 14"/>
           <p:cNvSpPr/>
           <p:nvPr/>
         </p:nvSpPr>
@@ -9258,7 +7420,7 @@
       </p:sp>
       <p:sp>
         <p:nvSpPr>
-          <p:cNvPr id="26" name="Text 24"/>
+          <p:cNvPr id="17" name="Text 15"/>
           <p:cNvSpPr/>
           <p:nvPr/>
         </p:nvSpPr>
@@ -9278,9 +7440,6 @@
           <a:lstStyle/>
           <a:p>
             <a:pPr indent="0" marL="0">
-              <a:lnSpc>
-                <a:spcPct val="115000"/>
-              </a:lnSpc>
               <a:buNone/>
             </a:pPr>
             <a:r>
@@ -9300,7 +7459,7 @@
       </p:sp>
       <p:sp>
         <p:nvSpPr>
-          <p:cNvPr id="27" name="Shape 25"/>
+          <p:cNvPr id="18" name="Shape 16"/>
           <p:cNvSpPr/>
           <p:nvPr/>
         </p:nvSpPr>
@@ -9329,7 +7488,7 @@
       </p:sp>
       <p:sp>
         <p:nvSpPr>
-          <p:cNvPr id="28" name="Shape 26"/>
+          <p:cNvPr id="19" name="Shape 17"/>
           <p:cNvSpPr/>
           <p:nvPr/>
         </p:nvSpPr>
@@ -9351,7 +7510,7 @@
       </p:sp>
       <p:sp>
         <p:nvSpPr>
-          <p:cNvPr id="29" name="Shape 27"/>
+          <p:cNvPr id="20" name="Shape 18"/>
           <p:cNvSpPr/>
           <p:nvPr/>
         </p:nvSpPr>
@@ -9385,36 +7544,7 @@
       </p:sp>
       <p:sp>
         <p:nvSpPr>
-          <p:cNvPr id="30" name="Shape 28"/>
-          <p:cNvSpPr/>
-          <p:nvPr/>
-        </p:nvSpPr>
-        <p:spPr>
-          <a:xfrm>
-            <a:off x="796625" y="2744297"/>
-            <a:ext cx="190927" cy="190927"/>
-          </a:xfrm>
-          <a:prstGeom prst="roundRect">
-            <a:avLst>
-              <a:gd name="adj" fmla="val 181992"/>
-            </a:avLst>
-          </a:prstGeom>
-          <a:solidFill>
-            <a:srgbClr val="60A5FA">
-              <a:alpha val="80000"/>
-            </a:srgbClr>
-          </a:solidFill>
-          <a:ln w="12700">
-            <a:solidFill>
-              <a:srgbClr val="333333"/>
-            </a:solidFill>
-            <a:prstDash val="solid"/>
-          </a:ln>
-        </p:spPr>
-      </p:sp>
-      <p:sp>
-        <p:nvSpPr>
-          <p:cNvPr id="31" name="Text 29"/>
+          <p:cNvPr id="21" name="Text 19"/>
           <p:cNvSpPr/>
           <p:nvPr/>
         </p:nvSpPr>
@@ -9453,7 +7583,7 @@
       </p:sp>
       <p:sp>
         <p:nvSpPr>
-          <p:cNvPr id="32" name="Text 30"/>
+          <p:cNvPr id="22" name="Text 20"/>
           <p:cNvSpPr/>
           <p:nvPr/>
         </p:nvSpPr>
@@ -9473,9 +7603,6 @@
           <a:lstStyle/>
           <a:p>
             <a:pPr indent="0" marL="0">
-              <a:lnSpc>
-                <a:spcPct val="115000"/>
-              </a:lnSpc>
               <a:buNone/>
             </a:pPr>
             <a:r>
@@ -9495,7 +7622,7 @@
       </p:sp>
       <p:sp>
         <p:nvSpPr>
-          <p:cNvPr id="33" name="Shape 31"/>
+          <p:cNvPr id="23" name="Shape 21"/>
           <p:cNvSpPr/>
           <p:nvPr/>
         </p:nvSpPr>
@@ -9524,7 +7651,7 @@
       </p:sp>
       <p:sp>
         <p:nvSpPr>
-          <p:cNvPr id="34" name="Shape 32"/>
+          <p:cNvPr id="24" name="Shape 22"/>
           <p:cNvSpPr/>
           <p:nvPr/>
         </p:nvSpPr>
@@ -9546,7 +7673,7 @@
       </p:sp>
       <p:sp>
         <p:nvSpPr>
-          <p:cNvPr id="35" name="Shape 33"/>
+          <p:cNvPr id="25" name="Shape 23"/>
           <p:cNvSpPr/>
           <p:nvPr/>
         </p:nvSpPr>
@@ -9580,36 +7707,7 @@
       </p:sp>
       <p:sp>
         <p:nvSpPr>
-          <p:cNvPr id="36" name="Shape 34"/>
-          <p:cNvSpPr/>
-          <p:nvPr/>
-        </p:nvSpPr>
-        <p:spPr>
-          <a:xfrm>
-            <a:off x="796625" y="3366089"/>
-            <a:ext cx="190927" cy="190927"/>
-          </a:xfrm>
-          <a:prstGeom prst="roundRect">
-            <a:avLst>
-              <a:gd name="adj" fmla="val 181992"/>
-            </a:avLst>
-          </a:prstGeom>
-          <a:solidFill>
-            <a:srgbClr val="60A5FA">
-              <a:alpha val="80000"/>
-            </a:srgbClr>
-          </a:solidFill>
-          <a:ln w="12700">
-            <a:solidFill>
-              <a:srgbClr val="333333"/>
-            </a:solidFill>
-            <a:prstDash val="solid"/>
-          </a:ln>
-        </p:spPr>
-      </p:sp>
-      <p:sp>
-        <p:nvSpPr>
-          <p:cNvPr id="37" name="Text 35"/>
+          <p:cNvPr id="26" name="Text 24"/>
           <p:cNvSpPr/>
           <p:nvPr/>
         </p:nvSpPr>
@@ -9648,7 +7746,7 @@
       </p:sp>
       <p:sp>
         <p:nvSpPr>
-          <p:cNvPr id="38" name="Text 36"/>
+          <p:cNvPr id="27" name="Text 25"/>
           <p:cNvSpPr/>
           <p:nvPr/>
         </p:nvSpPr>
@@ -9668,9 +7766,6 @@
           <a:lstStyle/>
           <a:p>
             <a:pPr indent="0" marL="0">
-              <a:lnSpc>
-                <a:spcPct val="115000"/>
-              </a:lnSpc>
               <a:buNone/>
             </a:pPr>
             <a:r>
@@ -9690,7 +7785,7 @@
       </p:sp>
       <p:sp>
         <p:nvSpPr>
-          <p:cNvPr id="39" name="Shape 37"/>
+          <p:cNvPr id="28" name="Shape 26"/>
           <p:cNvSpPr/>
           <p:nvPr/>
         </p:nvSpPr>
@@ -9719,7 +7814,7 @@
       </p:sp>
       <p:sp>
         <p:nvSpPr>
-          <p:cNvPr id="40" name="Shape 38"/>
+          <p:cNvPr id="29" name="Shape 27"/>
           <p:cNvSpPr/>
           <p:nvPr/>
         </p:nvSpPr>
@@ -9741,7 +7836,7 @@
       </p:sp>
       <p:sp>
         <p:nvSpPr>
-          <p:cNvPr id="41" name="Shape 39"/>
+          <p:cNvPr id="30" name="Shape 28"/>
           <p:cNvSpPr/>
           <p:nvPr/>
         </p:nvSpPr>
@@ -9775,36 +7870,7 @@
       </p:sp>
       <p:sp>
         <p:nvSpPr>
-          <p:cNvPr id="42" name="Shape 40"/>
-          <p:cNvSpPr/>
-          <p:nvPr/>
-        </p:nvSpPr>
-        <p:spPr>
-          <a:xfrm>
-            <a:off x="796625" y="3987881"/>
-            <a:ext cx="190927" cy="190927"/>
-          </a:xfrm>
-          <a:prstGeom prst="roundRect">
-            <a:avLst>
-              <a:gd name="adj" fmla="val 181992"/>
-            </a:avLst>
-          </a:prstGeom>
-          <a:solidFill>
-            <a:srgbClr val="60A5FA">
-              <a:alpha val="80000"/>
-            </a:srgbClr>
-          </a:solidFill>
-          <a:ln w="12700">
-            <a:solidFill>
-              <a:srgbClr val="333333"/>
-            </a:solidFill>
-            <a:prstDash val="solid"/>
-          </a:ln>
-        </p:spPr>
-      </p:sp>
-      <p:sp>
-        <p:nvSpPr>
-          <p:cNvPr id="43" name="Text 41"/>
+          <p:cNvPr id="31" name="Text 29"/>
           <p:cNvSpPr/>
           <p:nvPr/>
         </p:nvSpPr>
@@ -9843,7 +7909,7 @@
       </p:sp>
       <p:sp>
         <p:nvSpPr>
-          <p:cNvPr id="44" name="Text 42"/>
+          <p:cNvPr id="32" name="Text 30"/>
           <p:cNvSpPr/>
           <p:nvPr/>
         </p:nvSpPr>
@@ -9863,9 +7929,6 @@
           <a:lstStyle/>
           <a:p>
             <a:pPr indent="0" marL="0">
-              <a:lnSpc>
-                <a:spcPct val="115000"/>
-              </a:lnSpc>
               <a:buNone/>
             </a:pPr>
             <a:r>
@@ -9885,14 +7948,14 @@
       </p:sp>
       <p:sp>
         <p:nvSpPr>
-          <p:cNvPr id="45" name="Shape 43"/>
-          <p:cNvSpPr/>
-          <p:nvPr/>
-        </p:nvSpPr>
-        <p:spPr>
-          <a:xfrm>
-            <a:off x="109728" y="4681728"/>
-            <a:ext cx="9034272" cy="457200"/>
+          <p:cNvPr id="33" name="Shape 31"/>
+          <p:cNvSpPr/>
+          <p:nvPr/>
+        </p:nvSpPr>
+        <p:spPr>
+          <a:xfrm>
+            <a:off x="2478024" y="4681728"/>
+            <a:ext cx="6665976" cy="457200"/>
           </a:xfrm>
           <a:prstGeom prst="rect">
             <a:avLst/>
@@ -9905,66 +7968,13 @@
       </p:sp>
       <p:sp>
         <p:nvSpPr>
-          <p:cNvPr id="46" name="Shape 44"/>
-          <p:cNvSpPr/>
-          <p:nvPr/>
-        </p:nvSpPr>
-        <p:spPr>
-          <a:xfrm>
-            <a:off x="109728" y="4681728"/>
-            <a:ext cx="2529596" cy="457200"/>
-          </a:xfrm>
-          <a:prstGeom prst="rect">
-            <a:avLst/>
-          </a:prstGeom>
-          <a:solidFill>
-            <a:srgbClr val="60A5FA">
-              <a:alpha val="90000"/>
-            </a:srgbClr>
-          </a:solidFill>
-          <a:ln/>
-        </p:spPr>
-      </p:sp>
-      <p:sp>
-        <p:nvSpPr>
-          <p:cNvPr id="47" name="Shape 45"/>
-          <p:cNvSpPr/>
-          <p:nvPr/>
-        </p:nvSpPr>
-        <p:spPr>
-          <a:xfrm>
-            <a:off x="8119872" y="4736592"/>
-            <a:ext cx="621792" cy="329184"/>
-          </a:xfrm>
-          <a:prstGeom prst="roundRect">
-            <a:avLst>
-              <a:gd name="adj" fmla="val 138889"/>
-            </a:avLst>
-          </a:prstGeom>
-          <a:solidFill>
-            <a:srgbClr val="FFFFFF">
-              <a:alpha val="15000"/>
-            </a:srgbClr>
-          </a:solidFill>
-          <a:ln w="6350">
-            <a:solidFill>
-              <a:srgbClr val="FFFFFF">
-                <a:alpha val="25000"/>
-              </a:srgbClr>
-            </a:solidFill>
-            <a:prstDash val="solid"/>
-          </a:ln>
-        </p:spPr>
-      </p:sp>
-      <p:sp>
-        <p:nvSpPr>
-          <p:cNvPr id="48" name="Text 46"/>
-          <p:cNvSpPr/>
-          <p:nvPr/>
-        </p:nvSpPr>
-        <p:spPr>
-          <a:xfrm>
-            <a:off x="8119872" y="4736592"/>
+          <p:cNvPr id="34" name="Text 32"/>
+          <p:cNvSpPr/>
+          <p:nvPr/>
+        </p:nvSpPr>
+        <p:spPr>
+          <a:xfrm>
+            <a:off x="8229600" y="4736592"/>
             <a:ext cx="621792" cy="329184"/>
           </a:xfrm>
           <a:prstGeom prst="rect">
@@ -10035,26 +8045,6 @@
         </p:nvSpPr>
         <p:spPr>
           <a:xfrm>
-            <a:off x="0" y="0"/>
-            <a:ext cx="109728" cy="5143500"/>
-          </a:xfrm>
-          <a:prstGeom prst="rect">
-            <a:avLst/>
-          </a:prstGeom>
-          <a:solidFill>
-            <a:srgbClr val="60A5FA"/>
-          </a:solidFill>
-          <a:ln/>
-        </p:spPr>
-      </p:sp>
-      <p:sp>
-        <p:nvSpPr>
-          <p:cNvPr id="3" name="Shape 1"/>
-          <p:cNvSpPr/>
-          <p:nvPr/>
-        </p:nvSpPr>
-        <p:spPr>
-          <a:xfrm>
             <a:off x="6720840" y="-182880"/>
             <a:ext cx="2743200" cy="2377440"/>
           </a:xfrm>
@@ -10076,7 +8066,7 @@
       </p:sp>
       <p:sp>
         <p:nvSpPr>
-          <p:cNvPr id="4" name="Shape 2"/>
+          <p:cNvPr id="3" name="Shape 1"/>
           <p:cNvSpPr/>
           <p:nvPr/>
         </p:nvSpPr>
@@ -10103,127 +8093,34 @@
       </p:sp>
       <p:sp>
         <p:nvSpPr>
+          <p:cNvPr id="4" name="Shape 2"/>
+          <p:cNvSpPr/>
+          <p:nvPr/>
+        </p:nvSpPr>
+        <p:spPr>
+          <a:xfrm>
+            <a:off x="0" y="0"/>
+            <a:ext cx="2423160" cy="5143500"/>
+          </a:xfrm>
+          <a:prstGeom prst="rect">
+            <a:avLst/>
+          </a:prstGeom>
+          <a:solidFill>
+            <a:srgbClr val="1E3A5F"/>
+          </a:solidFill>
+          <a:ln/>
+        </p:spPr>
+      </p:sp>
+      <p:sp>
+        <p:nvSpPr>
           <p:cNvPr id="5" name="Shape 3"/>
           <p:cNvSpPr/>
           <p:nvPr/>
         </p:nvSpPr>
         <p:spPr>
           <a:xfrm>
-            <a:off x="7909560" y="201168"/>
-            <a:ext cx="685800" cy="685800"/>
-          </a:xfrm>
-          <a:prstGeom prst="ellipse">
-            <a:avLst/>
-          </a:prstGeom>
-          <a:solidFill>
-            <a:srgbClr val="EFF6FF">
-              <a:alpha val="0"/>
-            </a:srgbClr>
-          </a:solidFill>
-          <a:ln w="15875">
-            <a:solidFill>
-              <a:srgbClr val="60A5FA"/>
-            </a:solidFill>
-            <a:prstDash val="solid"/>
-          </a:ln>
-        </p:spPr>
-      </p:sp>
-      <p:sp>
-        <p:nvSpPr>
-          <p:cNvPr id="6" name="Shape 4"/>
-          <p:cNvSpPr/>
-          <p:nvPr/>
-        </p:nvSpPr>
-        <p:spPr>
-          <a:xfrm>
-            <a:off x="8183880" y="384048"/>
-            <a:ext cx="384048" cy="384048"/>
-          </a:xfrm>
-          <a:prstGeom prst="ellipse">
-            <a:avLst/>
-          </a:prstGeom>
-          <a:solidFill>
-            <a:srgbClr val="60A5FA">
-              <a:alpha val="35000"/>
-            </a:srgbClr>
-          </a:solidFill>
-          <a:ln/>
-        </p:spPr>
-      </p:sp>
-      <p:sp>
-        <p:nvSpPr>
-          <p:cNvPr id="7" name="Shape 5"/>
-          <p:cNvSpPr/>
-          <p:nvPr/>
-        </p:nvSpPr>
-        <p:spPr>
-          <a:xfrm>
-            <a:off x="109728" y="0"/>
-            <a:ext cx="9034272" cy="960120"/>
-          </a:xfrm>
-          <a:prstGeom prst="rect">
-            <a:avLst/>
-          </a:prstGeom>
-          <a:solidFill>
-            <a:srgbClr val="1E3A5F"/>
-          </a:solidFill>
-          <a:ln/>
-        </p:spPr>
-      </p:sp>
-      <p:sp>
-        <p:nvSpPr>
-          <p:cNvPr id="8" name="Shape 6"/>
-          <p:cNvSpPr/>
-          <p:nvPr/>
-        </p:nvSpPr>
-        <p:spPr>
-          <a:xfrm>
-            <a:off x="4389120" y="0"/>
-            <a:ext cx="4754880" cy="960120"/>
-          </a:xfrm>
-          <a:prstGeom prst="rect">
-            <a:avLst/>
-          </a:prstGeom>
-          <a:solidFill>
-            <a:srgbClr val="2563EB">
-              <a:alpha val="75000"/>
-            </a:srgbClr>
-          </a:solidFill>
-          <a:ln/>
-        </p:spPr>
-      </p:sp>
-      <p:sp>
-        <p:nvSpPr>
-          <p:cNvPr id="9" name="Shape 7"/>
-          <p:cNvSpPr/>
-          <p:nvPr/>
-        </p:nvSpPr>
-        <p:spPr>
-          <a:xfrm rot="21000000">
-            <a:off x="6263640" y="-320040"/>
-            <a:ext cx="3108960" cy="1234440"/>
-          </a:xfrm>
-          <a:prstGeom prst="rect">
-            <a:avLst/>
-          </a:prstGeom>
-          <a:solidFill>
-            <a:srgbClr val="FFFFFF">
-              <a:alpha val="12000"/>
-            </a:srgbClr>
-          </a:solidFill>
-          <a:ln/>
-        </p:spPr>
-      </p:sp>
-      <p:sp>
-        <p:nvSpPr>
-          <p:cNvPr id="10" name="Shape 8"/>
-          <p:cNvSpPr/>
-          <p:nvPr/>
-        </p:nvSpPr>
-        <p:spPr>
-          <a:xfrm>
-            <a:off x="109728" y="932688"/>
-            <a:ext cx="9034272" cy="36576"/>
+            <a:off x="2423160" y="0"/>
+            <a:ext cx="54864" cy="5143500"/>
           </a:xfrm>
           <a:prstGeom prst="rect">
             <a:avLst/>
@@ -10236,45 +8133,14 @@
       </p:sp>
       <p:sp>
         <p:nvSpPr>
-          <p:cNvPr id="11" name="Shape 9"/>
-          <p:cNvSpPr/>
-          <p:nvPr/>
-        </p:nvSpPr>
-        <p:spPr>
-          <a:xfrm>
-            <a:off x="475488" y="91440"/>
-            <a:ext cx="960120" cy="201168"/>
-          </a:xfrm>
-          <a:prstGeom prst="roundRect">
-            <a:avLst>
-              <a:gd name="adj" fmla="val 227273"/>
-            </a:avLst>
-          </a:prstGeom>
-          <a:solidFill>
-            <a:srgbClr val="FFFFFF">
-              <a:alpha val="12000"/>
-            </a:srgbClr>
-          </a:solidFill>
-          <a:ln w="6350">
-            <a:solidFill>
-              <a:srgbClr val="FFFFFF">
-                <a:alpha val="20000"/>
-              </a:srgbClr>
-            </a:solidFill>
-            <a:prstDash val="solid"/>
-          </a:ln>
-        </p:spPr>
-      </p:sp>
-      <p:sp>
-        <p:nvSpPr>
-          <p:cNvPr id="12" name="Text 10"/>
-          <p:cNvSpPr/>
-          <p:nvPr/>
-        </p:nvSpPr>
-        <p:spPr>
-          <a:xfrm>
-            <a:off x="502920" y="109728"/>
-            <a:ext cx="914400" cy="164592"/>
+          <p:cNvPr id="6" name="Text 4"/>
+          <p:cNvSpPr/>
+          <p:nvPr/>
+        </p:nvSpPr>
+        <p:spPr>
+          <a:xfrm>
+            <a:off x="228600" y="411480"/>
+            <a:ext cx="1965960" cy="4114800"/>
           </a:xfrm>
           <a:prstGeom prst="rect">
             <a:avLst/>
@@ -10283,55 +8149,14 @@
           <a:ln/>
         </p:spPr>
         <p:txBody>
-          <a:bodyPr wrap="square" rtlCol="0" anchor="ctr"/>
+          <a:bodyPr wrap="square" rtlCol="0" anchor="t"/>
           <a:lstStyle/>
           <a:p>
             <a:pPr indent="0" marL="0">
               <a:buNone/>
             </a:pPr>
             <a:r>
-              <a:rPr lang="en-US" sz="700" b="1" spc="120" kern="0" dirty="0">
-                <a:solidFill>
-                  <a:srgbClr val="FFFFFF">
-                    <a:alpha val="75000"/>
-                  </a:srgbClr>
-                </a:solidFill>
-                <a:latin typeface="Microsoft YaHei" pitchFamily="34" charset="0"/>
-                <a:ea typeface="Microsoft YaHei" pitchFamily="34" charset="-122"/>
-                <a:cs typeface="Microsoft YaHei" pitchFamily="34" charset="-120"/>
-              </a:rPr>
-              <a:t>KEY POINTS</a:t>
-            </a:r>
-            <a:endParaRPr lang="en-US" sz="700" dirty="0"/>
-          </a:p>
-        </p:txBody>
-      </p:sp>
-      <p:sp>
-        <p:nvSpPr>
-          <p:cNvPr id="13" name="Text 11"/>
-          <p:cNvSpPr/>
-          <p:nvPr/>
-        </p:nvSpPr>
-        <p:spPr>
-          <a:xfrm>
-            <a:off x="502920" y="329184"/>
-            <a:ext cx="8046720" cy="530352"/>
-          </a:xfrm>
-          <a:prstGeom prst="rect">
-            <a:avLst/>
-          </a:prstGeom>
-          <a:noFill/>
-          <a:ln/>
-        </p:spPr>
-        <p:txBody>
-          <a:bodyPr wrap="square" rtlCol="0" anchor="t"/>
-          <a:lstStyle/>
-          <a:p>
-            <a:pPr indent="0" marL="0">
-              <a:buNone/>
-            </a:pPr>
-            <a:r>
-              <a:rPr lang="en-US" sz="2200" b="1" dirty="0">
+              <a:rPr lang="en-US" sz="1800" b="1" dirty="0">
                 <a:solidFill>
                   <a:srgbClr val="FFFFFF"/>
                 </a:solidFill>
@@ -10341,20 +8166,20 @@
               </a:rPr>
               <a:t>CC_TITLE</a:t>
             </a:r>
-            <a:endParaRPr lang="en-US" sz="2200" dirty="0"/>
-          </a:p>
-        </p:txBody>
-      </p:sp>
-      <p:sp>
-        <p:nvSpPr>
-          <p:cNvPr id="14" name="Shape 12"/>
-          <p:cNvSpPr/>
-          <p:nvPr/>
-        </p:nvSpPr>
-        <p:spPr>
-          <a:xfrm>
-            <a:off x="411480" y="1078992"/>
-            <a:ext cx="8321040" cy="3493008"/>
+            <a:endParaRPr lang="en-US" sz="1800" dirty="0"/>
+          </a:p>
+        </p:txBody>
+      </p:sp>
+      <p:sp>
+        <p:nvSpPr>
+          <p:cNvPr id="7" name="Shape 5"/>
+          <p:cNvSpPr/>
+          <p:nvPr/>
+        </p:nvSpPr>
+        <p:spPr>
+          <a:xfrm>
+            <a:off x="2606040" y="1078992"/>
+            <a:ext cx="6126480" cy="3493008"/>
           </a:xfrm>
           <a:prstGeom prst="roundRect">
             <a:avLst>
@@ -10381,7 +8206,7 @@
       </p:sp>
       <p:sp>
         <p:nvSpPr>
-          <p:cNvPr id="15" name="Shape 13"/>
+          <p:cNvPr id="8" name="Shape 6"/>
           <p:cNvSpPr/>
           <p:nvPr/>
         </p:nvSpPr>
@@ -10410,7 +8235,7 @@
       </p:sp>
       <p:sp>
         <p:nvSpPr>
-          <p:cNvPr id="16" name="Shape 14"/>
+          <p:cNvPr id="9" name="Shape 7"/>
           <p:cNvSpPr/>
           <p:nvPr/>
         </p:nvSpPr>
@@ -10432,7 +8257,7 @@
       </p:sp>
       <p:sp>
         <p:nvSpPr>
-          <p:cNvPr id="17" name="Shape 15"/>
+          <p:cNvPr id="10" name="Shape 8"/>
           <p:cNvSpPr/>
           <p:nvPr/>
         </p:nvSpPr>
@@ -10466,36 +8291,7 @@
       </p:sp>
       <p:sp>
         <p:nvSpPr>
-          <p:cNvPr id="18" name="Shape 16"/>
-          <p:cNvSpPr/>
-          <p:nvPr/>
-        </p:nvSpPr>
-        <p:spPr>
-          <a:xfrm>
-            <a:off x="796625" y="1500713"/>
-            <a:ext cx="190927" cy="190927"/>
-          </a:xfrm>
-          <a:prstGeom prst="roundRect">
-            <a:avLst>
-              <a:gd name="adj" fmla="val 181992"/>
-            </a:avLst>
-          </a:prstGeom>
-          <a:solidFill>
-            <a:srgbClr val="60A5FA">
-              <a:alpha val="80000"/>
-            </a:srgbClr>
-          </a:solidFill>
-          <a:ln w="12700">
-            <a:solidFill>
-              <a:srgbClr val="333333"/>
-            </a:solidFill>
-            <a:prstDash val="solid"/>
-          </a:ln>
-        </p:spPr>
-      </p:sp>
-      <p:sp>
-        <p:nvSpPr>
-          <p:cNvPr id="19" name="Text 17"/>
+          <p:cNvPr id="11" name="Text 9"/>
           <p:cNvSpPr/>
           <p:nvPr/>
         </p:nvSpPr>
@@ -10534,7 +8330,7 @@
       </p:sp>
       <p:sp>
         <p:nvSpPr>
-          <p:cNvPr id="20" name="Text 18"/>
+          <p:cNvPr id="12" name="Text 10"/>
           <p:cNvSpPr/>
           <p:nvPr/>
         </p:nvSpPr>
@@ -10554,9 +8350,6 @@
           <a:lstStyle/>
           <a:p>
             <a:pPr indent="0" marL="0">
-              <a:lnSpc>
-                <a:spcPct val="115000"/>
-              </a:lnSpc>
               <a:buNone/>
             </a:pPr>
             <a:r>
@@ -10576,7 +8369,7 @@
       </p:sp>
       <p:sp>
         <p:nvSpPr>
-          <p:cNvPr id="21" name="Shape 19"/>
+          <p:cNvPr id="13" name="Shape 11"/>
           <p:cNvSpPr/>
           <p:nvPr/>
         </p:nvSpPr>
@@ -10605,7 +8398,7 @@
       </p:sp>
       <p:sp>
         <p:nvSpPr>
-          <p:cNvPr id="22" name="Shape 20"/>
+          <p:cNvPr id="14" name="Shape 12"/>
           <p:cNvSpPr/>
           <p:nvPr/>
         </p:nvSpPr>
@@ -10627,7 +8420,7 @@
       </p:sp>
       <p:sp>
         <p:nvSpPr>
-          <p:cNvPr id="23" name="Shape 21"/>
+          <p:cNvPr id="15" name="Shape 13"/>
           <p:cNvSpPr/>
           <p:nvPr/>
         </p:nvSpPr>
@@ -10661,36 +8454,7 @@
       </p:sp>
       <p:sp>
         <p:nvSpPr>
-          <p:cNvPr id="24" name="Shape 22"/>
-          <p:cNvSpPr/>
-          <p:nvPr/>
-        </p:nvSpPr>
-        <p:spPr>
-          <a:xfrm>
-            <a:off x="796625" y="2122505"/>
-            <a:ext cx="190927" cy="190927"/>
-          </a:xfrm>
-          <a:prstGeom prst="roundRect">
-            <a:avLst>
-              <a:gd name="adj" fmla="val 181992"/>
-            </a:avLst>
-          </a:prstGeom>
-          <a:solidFill>
-            <a:srgbClr val="60A5FA">
-              <a:alpha val="80000"/>
-            </a:srgbClr>
-          </a:solidFill>
-          <a:ln w="12700">
-            <a:solidFill>
-              <a:srgbClr val="333333"/>
-            </a:solidFill>
-            <a:prstDash val="solid"/>
-          </a:ln>
-        </p:spPr>
-      </p:sp>
-      <p:sp>
-        <p:nvSpPr>
-          <p:cNvPr id="25" name="Text 23"/>
+          <p:cNvPr id="16" name="Text 14"/>
           <p:cNvSpPr/>
           <p:nvPr/>
         </p:nvSpPr>
@@ -10729,7 +8493,7 @@
       </p:sp>
       <p:sp>
         <p:nvSpPr>
-          <p:cNvPr id="26" name="Text 24"/>
+          <p:cNvPr id="17" name="Text 15"/>
           <p:cNvSpPr/>
           <p:nvPr/>
         </p:nvSpPr>
@@ -10749,9 +8513,6 @@
           <a:lstStyle/>
           <a:p>
             <a:pPr indent="0" marL="0">
-              <a:lnSpc>
-                <a:spcPct val="115000"/>
-              </a:lnSpc>
               <a:buNone/>
             </a:pPr>
             <a:r>
@@ -10771,7 +8532,7 @@
       </p:sp>
       <p:sp>
         <p:nvSpPr>
-          <p:cNvPr id="27" name="Shape 25"/>
+          <p:cNvPr id="18" name="Shape 16"/>
           <p:cNvSpPr/>
           <p:nvPr/>
         </p:nvSpPr>
@@ -10800,7 +8561,7 @@
       </p:sp>
       <p:sp>
         <p:nvSpPr>
-          <p:cNvPr id="28" name="Shape 26"/>
+          <p:cNvPr id="19" name="Shape 17"/>
           <p:cNvSpPr/>
           <p:nvPr/>
         </p:nvSpPr>
@@ -10822,7 +8583,7 @@
       </p:sp>
       <p:sp>
         <p:nvSpPr>
-          <p:cNvPr id="29" name="Shape 27"/>
+          <p:cNvPr id="20" name="Shape 18"/>
           <p:cNvSpPr/>
           <p:nvPr/>
         </p:nvSpPr>
@@ -10856,36 +8617,7 @@
       </p:sp>
       <p:sp>
         <p:nvSpPr>
-          <p:cNvPr id="30" name="Shape 28"/>
-          <p:cNvSpPr/>
-          <p:nvPr/>
-        </p:nvSpPr>
-        <p:spPr>
-          <a:xfrm>
-            <a:off x="796625" y="2744297"/>
-            <a:ext cx="190927" cy="190927"/>
-          </a:xfrm>
-          <a:prstGeom prst="roundRect">
-            <a:avLst>
-              <a:gd name="adj" fmla="val 181992"/>
-            </a:avLst>
-          </a:prstGeom>
-          <a:solidFill>
-            <a:srgbClr val="60A5FA">
-              <a:alpha val="80000"/>
-            </a:srgbClr>
-          </a:solidFill>
-          <a:ln w="12700">
-            <a:solidFill>
-              <a:srgbClr val="333333"/>
-            </a:solidFill>
-            <a:prstDash val="solid"/>
-          </a:ln>
-        </p:spPr>
-      </p:sp>
-      <p:sp>
-        <p:nvSpPr>
-          <p:cNvPr id="31" name="Text 29"/>
+          <p:cNvPr id="21" name="Text 19"/>
           <p:cNvSpPr/>
           <p:nvPr/>
         </p:nvSpPr>
@@ -10924,7 +8656,7 @@
       </p:sp>
       <p:sp>
         <p:nvSpPr>
-          <p:cNvPr id="32" name="Text 30"/>
+          <p:cNvPr id="22" name="Text 20"/>
           <p:cNvSpPr/>
           <p:nvPr/>
         </p:nvSpPr>
@@ -10944,9 +8676,6 @@
           <a:lstStyle/>
           <a:p>
             <a:pPr indent="0" marL="0">
-              <a:lnSpc>
-                <a:spcPct val="115000"/>
-              </a:lnSpc>
               <a:buNone/>
             </a:pPr>
             <a:r>
@@ -10966,7 +8695,7 @@
       </p:sp>
       <p:sp>
         <p:nvSpPr>
-          <p:cNvPr id="33" name="Shape 31"/>
+          <p:cNvPr id="23" name="Shape 21"/>
           <p:cNvSpPr/>
           <p:nvPr/>
         </p:nvSpPr>
@@ -10995,7 +8724,7 @@
       </p:sp>
       <p:sp>
         <p:nvSpPr>
-          <p:cNvPr id="34" name="Shape 32"/>
+          <p:cNvPr id="24" name="Shape 22"/>
           <p:cNvSpPr/>
           <p:nvPr/>
         </p:nvSpPr>
@@ -11017,7 +8746,7 @@
       </p:sp>
       <p:sp>
         <p:nvSpPr>
-          <p:cNvPr id="35" name="Shape 33"/>
+          <p:cNvPr id="25" name="Shape 23"/>
           <p:cNvSpPr/>
           <p:nvPr/>
         </p:nvSpPr>
@@ -11051,36 +8780,7 @@
       </p:sp>
       <p:sp>
         <p:nvSpPr>
-          <p:cNvPr id="36" name="Shape 34"/>
-          <p:cNvSpPr/>
-          <p:nvPr/>
-        </p:nvSpPr>
-        <p:spPr>
-          <a:xfrm>
-            <a:off x="796625" y="3366089"/>
-            <a:ext cx="190927" cy="190927"/>
-          </a:xfrm>
-          <a:prstGeom prst="roundRect">
-            <a:avLst>
-              <a:gd name="adj" fmla="val 181992"/>
-            </a:avLst>
-          </a:prstGeom>
-          <a:solidFill>
-            <a:srgbClr val="60A5FA">
-              <a:alpha val="80000"/>
-            </a:srgbClr>
-          </a:solidFill>
-          <a:ln w="12700">
-            <a:solidFill>
-              <a:srgbClr val="333333"/>
-            </a:solidFill>
-            <a:prstDash val="solid"/>
-          </a:ln>
-        </p:spPr>
-      </p:sp>
-      <p:sp>
-        <p:nvSpPr>
-          <p:cNvPr id="37" name="Text 35"/>
+          <p:cNvPr id="26" name="Text 24"/>
           <p:cNvSpPr/>
           <p:nvPr/>
         </p:nvSpPr>
@@ -11119,7 +8819,7 @@
       </p:sp>
       <p:sp>
         <p:nvSpPr>
-          <p:cNvPr id="38" name="Text 36"/>
+          <p:cNvPr id="27" name="Text 25"/>
           <p:cNvSpPr/>
           <p:nvPr/>
         </p:nvSpPr>
@@ -11139,9 +8839,6 @@
           <a:lstStyle/>
           <a:p>
             <a:pPr indent="0" marL="0">
-              <a:lnSpc>
-                <a:spcPct val="115000"/>
-              </a:lnSpc>
               <a:buNone/>
             </a:pPr>
             <a:r>
@@ -11161,7 +8858,7 @@
       </p:sp>
       <p:sp>
         <p:nvSpPr>
-          <p:cNvPr id="39" name="Shape 37"/>
+          <p:cNvPr id="28" name="Shape 26"/>
           <p:cNvSpPr/>
           <p:nvPr/>
         </p:nvSpPr>
@@ -11190,7 +8887,7 @@
       </p:sp>
       <p:sp>
         <p:nvSpPr>
-          <p:cNvPr id="40" name="Shape 38"/>
+          <p:cNvPr id="29" name="Shape 27"/>
           <p:cNvSpPr/>
           <p:nvPr/>
         </p:nvSpPr>
@@ -11212,7 +8909,7 @@
       </p:sp>
       <p:sp>
         <p:nvSpPr>
-          <p:cNvPr id="41" name="Shape 39"/>
+          <p:cNvPr id="30" name="Shape 28"/>
           <p:cNvSpPr/>
           <p:nvPr/>
         </p:nvSpPr>
@@ -11246,36 +8943,7 @@
       </p:sp>
       <p:sp>
         <p:nvSpPr>
-          <p:cNvPr id="42" name="Shape 40"/>
-          <p:cNvSpPr/>
-          <p:nvPr/>
-        </p:nvSpPr>
-        <p:spPr>
-          <a:xfrm>
-            <a:off x="796625" y="3987881"/>
-            <a:ext cx="190927" cy="190927"/>
-          </a:xfrm>
-          <a:prstGeom prst="roundRect">
-            <a:avLst>
-              <a:gd name="adj" fmla="val 181992"/>
-            </a:avLst>
-          </a:prstGeom>
-          <a:solidFill>
-            <a:srgbClr val="60A5FA">
-              <a:alpha val="80000"/>
-            </a:srgbClr>
-          </a:solidFill>
-          <a:ln w="12700">
-            <a:solidFill>
-              <a:srgbClr val="333333"/>
-            </a:solidFill>
-            <a:prstDash val="solid"/>
-          </a:ln>
-        </p:spPr>
-      </p:sp>
-      <p:sp>
-        <p:nvSpPr>
-          <p:cNvPr id="43" name="Text 41"/>
+          <p:cNvPr id="31" name="Text 29"/>
           <p:cNvSpPr/>
           <p:nvPr/>
         </p:nvSpPr>
@@ -11314,7 +8982,7 @@
       </p:sp>
       <p:sp>
         <p:nvSpPr>
-          <p:cNvPr id="44" name="Text 42"/>
+          <p:cNvPr id="32" name="Text 30"/>
           <p:cNvSpPr/>
           <p:nvPr/>
         </p:nvSpPr>
@@ -11334,9 +9002,6 @@
           <a:lstStyle/>
           <a:p>
             <a:pPr indent="0" marL="0">
-              <a:lnSpc>
-                <a:spcPct val="115000"/>
-              </a:lnSpc>
               <a:buNone/>
             </a:pPr>
             <a:r>
@@ -11356,14 +9021,14 @@
       </p:sp>
       <p:sp>
         <p:nvSpPr>
-          <p:cNvPr id="45" name="Shape 43"/>
-          <p:cNvSpPr/>
-          <p:nvPr/>
-        </p:nvSpPr>
-        <p:spPr>
-          <a:xfrm>
-            <a:off x="109728" y="4681728"/>
-            <a:ext cx="9034272" cy="457200"/>
+          <p:cNvPr id="33" name="Shape 31"/>
+          <p:cNvSpPr/>
+          <p:nvPr/>
+        </p:nvSpPr>
+        <p:spPr>
+          <a:xfrm>
+            <a:off x="2478024" y="4681728"/>
+            <a:ext cx="6665976" cy="457200"/>
           </a:xfrm>
           <a:prstGeom prst="rect">
             <a:avLst/>
@@ -11376,66 +9041,13 @@
       </p:sp>
       <p:sp>
         <p:nvSpPr>
-          <p:cNvPr id="46" name="Shape 44"/>
-          <p:cNvSpPr/>
-          <p:nvPr/>
-        </p:nvSpPr>
-        <p:spPr>
-          <a:xfrm>
-            <a:off x="109728" y="4681728"/>
-            <a:ext cx="2529596" cy="457200"/>
-          </a:xfrm>
-          <a:prstGeom prst="rect">
-            <a:avLst/>
-          </a:prstGeom>
-          <a:solidFill>
-            <a:srgbClr val="60A5FA">
-              <a:alpha val="90000"/>
-            </a:srgbClr>
-          </a:solidFill>
-          <a:ln/>
-        </p:spPr>
-      </p:sp>
-      <p:sp>
-        <p:nvSpPr>
-          <p:cNvPr id="47" name="Shape 45"/>
-          <p:cNvSpPr/>
-          <p:nvPr/>
-        </p:nvSpPr>
-        <p:spPr>
-          <a:xfrm>
-            <a:off x="8119872" y="4736592"/>
-            <a:ext cx="621792" cy="329184"/>
-          </a:xfrm>
-          <a:prstGeom prst="roundRect">
-            <a:avLst>
-              <a:gd name="adj" fmla="val 138889"/>
-            </a:avLst>
-          </a:prstGeom>
-          <a:solidFill>
-            <a:srgbClr val="FFFFFF">
-              <a:alpha val="15000"/>
-            </a:srgbClr>
-          </a:solidFill>
-          <a:ln w="6350">
-            <a:solidFill>
-              <a:srgbClr val="FFFFFF">
-                <a:alpha val="25000"/>
-              </a:srgbClr>
-            </a:solidFill>
-            <a:prstDash val="solid"/>
-          </a:ln>
-        </p:spPr>
-      </p:sp>
-      <p:sp>
-        <p:nvSpPr>
-          <p:cNvPr id="48" name="Text 46"/>
-          <p:cNvSpPr/>
-          <p:nvPr/>
-        </p:nvSpPr>
-        <p:spPr>
-          <a:xfrm>
-            <a:off x="8119872" y="4736592"/>
+          <p:cNvPr id="34" name="Text 32"/>
+          <p:cNvSpPr/>
+          <p:nvPr/>
+        </p:nvSpPr>
+        <p:spPr>
+          <a:xfrm>
+            <a:off x="8229600" y="4736592"/>
             <a:ext cx="621792" cy="329184"/>
           </a:xfrm>
           <a:prstGeom prst="rect">
@@ -11506,26 +9118,6 @@
         </p:nvSpPr>
         <p:spPr>
           <a:xfrm>
-            <a:off x="0" y="0"/>
-            <a:ext cx="109728" cy="5143500"/>
-          </a:xfrm>
-          <a:prstGeom prst="rect">
-            <a:avLst/>
-          </a:prstGeom>
-          <a:solidFill>
-            <a:srgbClr val="60A5FA"/>
-          </a:solidFill>
-          <a:ln/>
-        </p:spPr>
-      </p:sp>
-      <p:sp>
-        <p:nvSpPr>
-          <p:cNvPr id="3" name="Shape 1"/>
-          <p:cNvSpPr/>
-          <p:nvPr/>
-        </p:nvSpPr>
-        <p:spPr>
-          <a:xfrm>
             <a:off x="6720840" y="-182880"/>
             <a:ext cx="2743200" cy="2377440"/>
           </a:xfrm>
@@ -11547,7 +9139,7 @@
       </p:sp>
       <p:sp>
         <p:nvSpPr>
-          <p:cNvPr id="4" name="Shape 2"/>
+          <p:cNvPr id="3" name="Shape 1"/>
           <p:cNvSpPr/>
           <p:nvPr/>
         </p:nvSpPr>
@@ -11574,127 +9166,34 @@
       </p:sp>
       <p:sp>
         <p:nvSpPr>
+          <p:cNvPr id="4" name="Shape 2"/>
+          <p:cNvSpPr/>
+          <p:nvPr/>
+        </p:nvSpPr>
+        <p:spPr>
+          <a:xfrm>
+            <a:off x="0" y="0"/>
+            <a:ext cx="2423160" cy="5143500"/>
+          </a:xfrm>
+          <a:prstGeom prst="rect">
+            <a:avLst/>
+          </a:prstGeom>
+          <a:solidFill>
+            <a:srgbClr val="1E3A5F"/>
+          </a:solidFill>
+          <a:ln/>
+        </p:spPr>
+      </p:sp>
+      <p:sp>
+        <p:nvSpPr>
           <p:cNvPr id="5" name="Shape 3"/>
           <p:cNvSpPr/>
           <p:nvPr/>
         </p:nvSpPr>
         <p:spPr>
           <a:xfrm>
-            <a:off x="7909560" y="201168"/>
-            <a:ext cx="685800" cy="685800"/>
-          </a:xfrm>
-          <a:prstGeom prst="ellipse">
-            <a:avLst/>
-          </a:prstGeom>
-          <a:solidFill>
-            <a:srgbClr val="EFF6FF">
-              <a:alpha val="0"/>
-            </a:srgbClr>
-          </a:solidFill>
-          <a:ln w="15875">
-            <a:solidFill>
-              <a:srgbClr val="60A5FA"/>
-            </a:solidFill>
-            <a:prstDash val="solid"/>
-          </a:ln>
-        </p:spPr>
-      </p:sp>
-      <p:sp>
-        <p:nvSpPr>
-          <p:cNvPr id="6" name="Shape 4"/>
-          <p:cNvSpPr/>
-          <p:nvPr/>
-        </p:nvSpPr>
-        <p:spPr>
-          <a:xfrm>
-            <a:off x="8183880" y="384048"/>
-            <a:ext cx="384048" cy="384048"/>
-          </a:xfrm>
-          <a:prstGeom prst="ellipse">
-            <a:avLst/>
-          </a:prstGeom>
-          <a:solidFill>
-            <a:srgbClr val="60A5FA">
-              <a:alpha val="35000"/>
-            </a:srgbClr>
-          </a:solidFill>
-          <a:ln/>
-        </p:spPr>
-      </p:sp>
-      <p:sp>
-        <p:nvSpPr>
-          <p:cNvPr id="7" name="Shape 5"/>
-          <p:cNvSpPr/>
-          <p:nvPr/>
-        </p:nvSpPr>
-        <p:spPr>
-          <a:xfrm>
-            <a:off x="109728" y="0"/>
-            <a:ext cx="9034272" cy="960120"/>
-          </a:xfrm>
-          <a:prstGeom prst="rect">
-            <a:avLst/>
-          </a:prstGeom>
-          <a:solidFill>
-            <a:srgbClr val="1E3A5F"/>
-          </a:solidFill>
-          <a:ln/>
-        </p:spPr>
-      </p:sp>
-      <p:sp>
-        <p:nvSpPr>
-          <p:cNvPr id="8" name="Shape 6"/>
-          <p:cNvSpPr/>
-          <p:nvPr/>
-        </p:nvSpPr>
-        <p:spPr>
-          <a:xfrm>
-            <a:off x="4389120" y="0"/>
-            <a:ext cx="4754880" cy="960120"/>
-          </a:xfrm>
-          <a:prstGeom prst="rect">
-            <a:avLst/>
-          </a:prstGeom>
-          <a:solidFill>
-            <a:srgbClr val="2563EB">
-              <a:alpha val="75000"/>
-            </a:srgbClr>
-          </a:solidFill>
-          <a:ln/>
-        </p:spPr>
-      </p:sp>
-      <p:sp>
-        <p:nvSpPr>
-          <p:cNvPr id="9" name="Shape 7"/>
-          <p:cNvSpPr/>
-          <p:nvPr/>
-        </p:nvSpPr>
-        <p:spPr>
-          <a:xfrm rot="21000000">
-            <a:off x="6263640" y="-320040"/>
-            <a:ext cx="3108960" cy="1234440"/>
-          </a:xfrm>
-          <a:prstGeom prst="rect">
-            <a:avLst/>
-          </a:prstGeom>
-          <a:solidFill>
-            <a:srgbClr val="FFFFFF">
-              <a:alpha val="12000"/>
-            </a:srgbClr>
-          </a:solidFill>
-          <a:ln/>
-        </p:spPr>
-      </p:sp>
-      <p:sp>
-        <p:nvSpPr>
-          <p:cNvPr id="10" name="Shape 8"/>
-          <p:cNvSpPr/>
-          <p:nvPr/>
-        </p:nvSpPr>
-        <p:spPr>
-          <a:xfrm>
-            <a:off x="109728" y="932688"/>
-            <a:ext cx="9034272" cy="36576"/>
+            <a:off x="2423160" y="0"/>
+            <a:ext cx="54864" cy="5143500"/>
           </a:xfrm>
           <a:prstGeom prst="rect">
             <a:avLst/>
@@ -11707,45 +9206,14 @@
       </p:sp>
       <p:sp>
         <p:nvSpPr>
-          <p:cNvPr id="11" name="Shape 9"/>
-          <p:cNvSpPr/>
-          <p:nvPr/>
-        </p:nvSpPr>
-        <p:spPr>
-          <a:xfrm>
-            <a:off x="475488" y="91440"/>
-            <a:ext cx="960120" cy="201168"/>
-          </a:xfrm>
-          <a:prstGeom prst="roundRect">
-            <a:avLst>
-              <a:gd name="adj" fmla="val 227273"/>
-            </a:avLst>
-          </a:prstGeom>
-          <a:solidFill>
-            <a:srgbClr val="FFFFFF">
-              <a:alpha val="12000"/>
-            </a:srgbClr>
-          </a:solidFill>
-          <a:ln w="6350">
-            <a:solidFill>
-              <a:srgbClr val="FFFFFF">
-                <a:alpha val="20000"/>
-              </a:srgbClr>
-            </a:solidFill>
-            <a:prstDash val="solid"/>
-          </a:ln>
-        </p:spPr>
-      </p:sp>
-      <p:sp>
-        <p:nvSpPr>
-          <p:cNvPr id="12" name="Text 10"/>
-          <p:cNvSpPr/>
-          <p:nvPr/>
-        </p:nvSpPr>
-        <p:spPr>
-          <a:xfrm>
-            <a:off x="502920" y="109728"/>
-            <a:ext cx="914400" cy="164592"/>
+          <p:cNvPr id="6" name="Text 4"/>
+          <p:cNvSpPr/>
+          <p:nvPr/>
+        </p:nvSpPr>
+        <p:spPr>
+          <a:xfrm>
+            <a:off x="228600" y="411480"/>
+            <a:ext cx="1965960" cy="4114800"/>
           </a:xfrm>
           <a:prstGeom prst="rect">
             <a:avLst/>
@@ -11754,55 +9222,14 @@
           <a:ln/>
         </p:spPr>
         <p:txBody>
-          <a:bodyPr wrap="square" rtlCol="0" anchor="ctr"/>
+          <a:bodyPr wrap="square" rtlCol="0" anchor="t"/>
           <a:lstStyle/>
           <a:p>
             <a:pPr indent="0" marL="0">
               <a:buNone/>
             </a:pPr>
             <a:r>
-              <a:rPr lang="en-US" sz="700" b="1" spc="120" kern="0" dirty="0">
-                <a:solidFill>
-                  <a:srgbClr val="FFFFFF">
-                    <a:alpha val="75000"/>
-                  </a:srgbClr>
-                </a:solidFill>
-                <a:latin typeface="Microsoft YaHei" pitchFamily="34" charset="0"/>
-                <a:ea typeface="Microsoft YaHei" pitchFamily="34" charset="-122"/>
-                <a:cs typeface="Microsoft YaHei" pitchFamily="34" charset="-120"/>
-              </a:rPr>
-              <a:t>KEY POINTS</a:t>
-            </a:r>
-            <a:endParaRPr lang="en-US" sz="700" dirty="0"/>
-          </a:p>
-        </p:txBody>
-      </p:sp>
-      <p:sp>
-        <p:nvSpPr>
-          <p:cNvPr id="13" name="Text 11"/>
-          <p:cNvSpPr/>
-          <p:nvPr/>
-        </p:nvSpPr>
-        <p:spPr>
-          <a:xfrm>
-            <a:off x="502920" y="329184"/>
-            <a:ext cx="8046720" cy="530352"/>
-          </a:xfrm>
-          <a:prstGeom prst="rect">
-            <a:avLst/>
-          </a:prstGeom>
-          <a:noFill/>
-          <a:ln/>
-        </p:spPr>
-        <p:txBody>
-          <a:bodyPr wrap="square" rtlCol="0" anchor="t"/>
-          <a:lstStyle/>
-          <a:p>
-            <a:pPr indent="0" marL="0">
-              <a:buNone/>
-            </a:pPr>
-            <a:r>
-              <a:rPr lang="en-US" sz="2200" b="1" dirty="0">
+              <a:rPr lang="en-US" sz="1800" b="1" dirty="0">
                 <a:solidFill>
                   <a:srgbClr val="FFFFFF"/>
                 </a:solidFill>
@@ -11812,20 +9239,20 @@
               </a:rPr>
               <a:t>CC_TITLE</a:t>
             </a:r>
-            <a:endParaRPr lang="en-US" sz="2200" dirty="0"/>
-          </a:p>
-        </p:txBody>
-      </p:sp>
-      <p:sp>
-        <p:nvSpPr>
-          <p:cNvPr id="14" name="Shape 12"/>
-          <p:cNvSpPr/>
-          <p:nvPr/>
-        </p:nvSpPr>
-        <p:spPr>
-          <a:xfrm>
-            <a:off x="411480" y="1078992"/>
-            <a:ext cx="8321040" cy="3493008"/>
+            <a:endParaRPr lang="en-US" sz="1800" dirty="0"/>
+          </a:p>
+        </p:txBody>
+      </p:sp>
+      <p:sp>
+        <p:nvSpPr>
+          <p:cNvPr id="7" name="Shape 5"/>
+          <p:cNvSpPr/>
+          <p:nvPr/>
+        </p:nvSpPr>
+        <p:spPr>
+          <a:xfrm>
+            <a:off x="2606040" y="1078992"/>
+            <a:ext cx="6126480" cy="3493008"/>
           </a:xfrm>
           <a:prstGeom prst="roundRect">
             <a:avLst>
@@ -11852,7 +9279,7 @@
       </p:sp>
       <p:sp>
         <p:nvSpPr>
-          <p:cNvPr id="15" name="Shape 13"/>
+          <p:cNvPr id="8" name="Shape 6"/>
           <p:cNvSpPr/>
           <p:nvPr/>
         </p:nvSpPr>
@@ -11881,7 +9308,7 @@
       </p:sp>
       <p:sp>
         <p:nvSpPr>
-          <p:cNvPr id="16" name="Shape 14"/>
+          <p:cNvPr id="9" name="Shape 7"/>
           <p:cNvSpPr/>
           <p:nvPr/>
         </p:nvSpPr>
@@ -11903,7 +9330,7 @@
       </p:sp>
       <p:sp>
         <p:nvSpPr>
-          <p:cNvPr id="17" name="Shape 15"/>
+          <p:cNvPr id="10" name="Shape 8"/>
           <p:cNvSpPr/>
           <p:nvPr/>
         </p:nvSpPr>
@@ -11937,36 +9364,7 @@
       </p:sp>
       <p:sp>
         <p:nvSpPr>
-          <p:cNvPr id="18" name="Shape 16"/>
-          <p:cNvSpPr/>
-          <p:nvPr/>
-        </p:nvSpPr>
-        <p:spPr>
-          <a:xfrm>
-            <a:off x="796625" y="1500713"/>
-            <a:ext cx="190927" cy="190927"/>
-          </a:xfrm>
-          <a:prstGeom prst="roundRect">
-            <a:avLst>
-              <a:gd name="adj" fmla="val 181992"/>
-            </a:avLst>
-          </a:prstGeom>
-          <a:solidFill>
-            <a:srgbClr val="60A5FA">
-              <a:alpha val="80000"/>
-            </a:srgbClr>
-          </a:solidFill>
-          <a:ln w="12700">
-            <a:solidFill>
-              <a:srgbClr val="333333"/>
-            </a:solidFill>
-            <a:prstDash val="solid"/>
-          </a:ln>
-        </p:spPr>
-      </p:sp>
-      <p:sp>
-        <p:nvSpPr>
-          <p:cNvPr id="19" name="Text 17"/>
+          <p:cNvPr id="11" name="Text 9"/>
           <p:cNvSpPr/>
           <p:nvPr/>
         </p:nvSpPr>
@@ -12005,7 +9403,7 @@
       </p:sp>
       <p:sp>
         <p:nvSpPr>
-          <p:cNvPr id="20" name="Text 18"/>
+          <p:cNvPr id="12" name="Text 10"/>
           <p:cNvSpPr/>
           <p:nvPr/>
         </p:nvSpPr>
@@ -12025,9 +9423,6 @@
           <a:lstStyle/>
           <a:p>
             <a:pPr indent="0" marL="0">
-              <a:lnSpc>
-                <a:spcPct val="115000"/>
-              </a:lnSpc>
               <a:buNone/>
             </a:pPr>
             <a:r>
@@ -12047,7 +9442,7 @@
       </p:sp>
       <p:sp>
         <p:nvSpPr>
-          <p:cNvPr id="21" name="Shape 19"/>
+          <p:cNvPr id="13" name="Shape 11"/>
           <p:cNvSpPr/>
           <p:nvPr/>
         </p:nvSpPr>
@@ -12076,7 +9471,7 @@
       </p:sp>
       <p:sp>
         <p:nvSpPr>
-          <p:cNvPr id="22" name="Shape 20"/>
+          <p:cNvPr id="14" name="Shape 12"/>
           <p:cNvSpPr/>
           <p:nvPr/>
         </p:nvSpPr>
@@ -12098,7 +9493,7 @@
       </p:sp>
       <p:sp>
         <p:nvSpPr>
-          <p:cNvPr id="23" name="Shape 21"/>
+          <p:cNvPr id="15" name="Shape 13"/>
           <p:cNvSpPr/>
           <p:nvPr/>
         </p:nvSpPr>
@@ -12132,36 +9527,7 @@
       </p:sp>
       <p:sp>
         <p:nvSpPr>
-          <p:cNvPr id="24" name="Shape 22"/>
-          <p:cNvSpPr/>
-          <p:nvPr/>
-        </p:nvSpPr>
-        <p:spPr>
-          <a:xfrm>
-            <a:off x="796625" y="2122505"/>
-            <a:ext cx="190927" cy="190927"/>
-          </a:xfrm>
-          <a:prstGeom prst="roundRect">
-            <a:avLst>
-              <a:gd name="adj" fmla="val 181992"/>
-            </a:avLst>
-          </a:prstGeom>
-          <a:solidFill>
-            <a:srgbClr val="60A5FA">
-              <a:alpha val="80000"/>
-            </a:srgbClr>
-          </a:solidFill>
-          <a:ln w="12700">
-            <a:solidFill>
-              <a:srgbClr val="333333"/>
-            </a:solidFill>
-            <a:prstDash val="solid"/>
-          </a:ln>
-        </p:spPr>
-      </p:sp>
-      <p:sp>
-        <p:nvSpPr>
-          <p:cNvPr id="25" name="Text 23"/>
+          <p:cNvPr id="16" name="Text 14"/>
           <p:cNvSpPr/>
           <p:nvPr/>
         </p:nvSpPr>
@@ -12200,7 +9566,7 @@
       </p:sp>
       <p:sp>
         <p:nvSpPr>
-          <p:cNvPr id="26" name="Text 24"/>
+          <p:cNvPr id="17" name="Text 15"/>
           <p:cNvSpPr/>
           <p:nvPr/>
         </p:nvSpPr>
@@ -12220,9 +9586,6 @@
           <a:lstStyle/>
           <a:p>
             <a:pPr indent="0" marL="0">
-              <a:lnSpc>
-                <a:spcPct val="115000"/>
-              </a:lnSpc>
               <a:buNone/>
             </a:pPr>
             <a:r>
@@ -12242,7 +9605,7 @@
       </p:sp>
       <p:sp>
         <p:nvSpPr>
-          <p:cNvPr id="27" name="Shape 25"/>
+          <p:cNvPr id="18" name="Shape 16"/>
           <p:cNvSpPr/>
           <p:nvPr/>
         </p:nvSpPr>
@@ -12271,7 +9634,7 @@
       </p:sp>
       <p:sp>
         <p:nvSpPr>
-          <p:cNvPr id="28" name="Shape 26"/>
+          <p:cNvPr id="19" name="Shape 17"/>
           <p:cNvSpPr/>
           <p:nvPr/>
         </p:nvSpPr>
@@ -12293,7 +9656,7 @@
       </p:sp>
       <p:sp>
         <p:nvSpPr>
-          <p:cNvPr id="29" name="Shape 27"/>
+          <p:cNvPr id="20" name="Shape 18"/>
           <p:cNvSpPr/>
           <p:nvPr/>
         </p:nvSpPr>
@@ -12327,36 +9690,7 @@
       </p:sp>
       <p:sp>
         <p:nvSpPr>
-          <p:cNvPr id="30" name="Shape 28"/>
-          <p:cNvSpPr/>
-          <p:nvPr/>
-        </p:nvSpPr>
-        <p:spPr>
-          <a:xfrm>
-            <a:off x="796625" y="2744297"/>
-            <a:ext cx="190927" cy="190927"/>
-          </a:xfrm>
-          <a:prstGeom prst="roundRect">
-            <a:avLst>
-              <a:gd name="adj" fmla="val 181992"/>
-            </a:avLst>
-          </a:prstGeom>
-          <a:solidFill>
-            <a:srgbClr val="60A5FA">
-              <a:alpha val="80000"/>
-            </a:srgbClr>
-          </a:solidFill>
-          <a:ln w="12700">
-            <a:solidFill>
-              <a:srgbClr val="333333"/>
-            </a:solidFill>
-            <a:prstDash val="solid"/>
-          </a:ln>
-        </p:spPr>
-      </p:sp>
-      <p:sp>
-        <p:nvSpPr>
-          <p:cNvPr id="31" name="Text 29"/>
+          <p:cNvPr id="21" name="Text 19"/>
           <p:cNvSpPr/>
           <p:nvPr/>
         </p:nvSpPr>
@@ -12395,7 +9729,7 @@
       </p:sp>
       <p:sp>
         <p:nvSpPr>
-          <p:cNvPr id="32" name="Text 30"/>
+          <p:cNvPr id="22" name="Text 20"/>
           <p:cNvSpPr/>
           <p:nvPr/>
         </p:nvSpPr>
@@ -12415,9 +9749,6 @@
           <a:lstStyle/>
           <a:p>
             <a:pPr indent="0" marL="0">
-              <a:lnSpc>
-                <a:spcPct val="115000"/>
-              </a:lnSpc>
               <a:buNone/>
             </a:pPr>
             <a:r>
@@ -12437,7 +9768,7 @@
       </p:sp>
       <p:sp>
         <p:nvSpPr>
-          <p:cNvPr id="33" name="Shape 31"/>
+          <p:cNvPr id="23" name="Shape 21"/>
           <p:cNvSpPr/>
           <p:nvPr/>
         </p:nvSpPr>
@@ -12466,7 +9797,7 @@
       </p:sp>
       <p:sp>
         <p:nvSpPr>
-          <p:cNvPr id="34" name="Shape 32"/>
+          <p:cNvPr id="24" name="Shape 22"/>
           <p:cNvSpPr/>
           <p:nvPr/>
         </p:nvSpPr>
@@ -12488,7 +9819,7 @@
       </p:sp>
       <p:sp>
         <p:nvSpPr>
-          <p:cNvPr id="35" name="Shape 33"/>
+          <p:cNvPr id="25" name="Shape 23"/>
           <p:cNvSpPr/>
           <p:nvPr/>
         </p:nvSpPr>
@@ -12522,36 +9853,7 @@
       </p:sp>
       <p:sp>
         <p:nvSpPr>
-          <p:cNvPr id="36" name="Shape 34"/>
-          <p:cNvSpPr/>
-          <p:nvPr/>
-        </p:nvSpPr>
-        <p:spPr>
-          <a:xfrm>
-            <a:off x="796625" y="3366089"/>
-            <a:ext cx="190927" cy="190927"/>
-          </a:xfrm>
-          <a:prstGeom prst="roundRect">
-            <a:avLst>
-              <a:gd name="adj" fmla="val 181992"/>
-            </a:avLst>
-          </a:prstGeom>
-          <a:solidFill>
-            <a:srgbClr val="60A5FA">
-              <a:alpha val="80000"/>
-            </a:srgbClr>
-          </a:solidFill>
-          <a:ln w="12700">
-            <a:solidFill>
-              <a:srgbClr val="333333"/>
-            </a:solidFill>
-            <a:prstDash val="solid"/>
-          </a:ln>
-        </p:spPr>
-      </p:sp>
-      <p:sp>
-        <p:nvSpPr>
-          <p:cNvPr id="37" name="Text 35"/>
+          <p:cNvPr id="26" name="Text 24"/>
           <p:cNvSpPr/>
           <p:nvPr/>
         </p:nvSpPr>
@@ -12590,7 +9892,7 @@
       </p:sp>
       <p:sp>
         <p:nvSpPr>
-          <p:cNvPr id="38" name="Text 36"/>
+          <p:cNvPr id="27" name="Text 25"/>
           <p:cNvSpPr/>
           <p:nvPr/>
         </p:nvSpPr>
@@ -12610,9 +9912,6 @@
           <a:lstStyle/>
           <a:p>
             <a:pPr indent="0" marL="0">
-              <a:lnSpc>
-                <a:spcPct val="115000"/>
-              </a:lnSpc>
               <a:buNone/>
             </a:pPr>
             <a:r>
@@ -12632,7 +9931,7 @@
       </p:sp>
       <p:sp>
         <p:nvSpPr>
-          <p:cNvPr id="39" name="Shape 37"/>
+          <p:cNvPr id="28" name="Shape 26"/>
           <p:cNvSpPr/>
           <p:nvPr/>
         </p:nvSpPr>
@@ -12661,7 +9960,7 @@
       </p:sp>
       <p:sp>
         <p:nvSpPr>
-          <p:cNvPr id="40" name="Shape 38"/>
+          <p:cNvPr id="29" name="Shape 27"/>
           <p:cNvSpPr/>
           <p:nvPr/>
         </p:nvSpPr>
@@ -12683,7 +9982,7 @@
       </p:sp>
       <p:sp>
         <p:nvSpPr>
-          <p:cNvPr id="41" name="Shape 39"/>
+          <p:cNvPr id="30" name="Shape 28"/>
           <p:cNvSpPr/>
           <p:nvPr/>
         </p:nvSpPr>
@@ -12717,36 +10016,7 @@
       </p:sp>
       <p:sp>
         <p:nvSpPr>
-          <p:cNvPr id="42" name="Shape 40"/>
-          <p:cNvSpPr/>
-          <p:nvPr/>
-        </p:nvSpPr>
-        <p:spPr>
-          <a:xfrm>
-            <a:off x="796625" y="3987881"/>
-            <a:ext cx="190927" cy="190927"/>
-          </a:xfrm>
-          <a:prstGeom prst="roundRect">
-            <a:avLst>
-              <a:gd name="adj" fmla="val 181992"/>
-            </a:avLst>
-          </a:prstGeom>
-          <a:solidFill>
-            <a:srgbClr val="60A5FA">
-              <a:alpha val="80000"/>
-            </a:srgbClr>
-          </a:solidFill>
-          <a:ln w="12700">
-            <a:solidFill>
-              <a:srgbClr val="333333"/>
-            </a:solidFill>
-            <a:prstDash val="solid"/>
-          </a:ln>
-        </p:spPr>
-      </p:sp>
-      <p:sp>
-        <p:nvSpPr>
-          <p:cNvPr id="43" name="Text 41"/>
+          <p:cNvPr id="31" name="Text 29"/>
           <p:cNvSpPr/>
           <p:nvPr/>
         </p:nvSpPr>
@@ -12785,7 +10055,7 @@
       </p:sp>
       <p:sp>
         <p:nvSpPr>
-          <p:cNvPr id="44" name="Text 42"/>
+          <p:cNvPr id="32" name="Text 30"/>
           <p:cNvSpPr/>
           <p:nvPr/>
         </p:nvSpPr>
@@ -12805,9 +10075,6 @@
           <a:lstStyle/>
           <a:p>
             <a:pPr indent="0" marL="0">
-              <a:lnSpc>
-                <a:spcPct val="115000"/>
-              </a:lnSpc>
               <a:buNone/>
             </a:pPr>
             <a:r>
@@ -12827,14 +10094,14 @@
       </p:sp>
       <p:sp>
         <p:nvSpPr>
-          <p:cNvPr id="45" name="Shape 43"/>
-          <p:cNvSpPr/>
-          <p:nvPr/>
-        </p:nvSpPr>
-        <p:spPr>
-          <a:xfrm>
-            <a:off x="109728" y="4681728"/>
-            <a:ext cx="9034272" cy="457200"/>
+          <p:cNvPr id="33" name="Shape 31"/>
+          <p:cNvSpPr/>
+          <p:nvPr/>
+        </p:nvSpPr>
+        <p:spPr>
+          <a:xfrm>
+            <a:off x="2478024" y="4681728"/>
+            <a:ext cx="6665976" cy="457200"/>
           </a:xfrm>
           <a:prstGeom prst="rect">
             <a:avLst/>
@@ -12847,66 +10114,13 @@
       </p:sp>
       <p:sp>
         <p:nvSpPr>
-          <p:cNvPr id="46" name="Shape 44"/>
-          <p:cNvSpPr/>
-          <p:nvPr/>
-        </p:nvSpPr>
-        <p:spPr>
-          <a:xfrm>
-            <a:off x="109728" y="4681728"/>
-            <a:ext cx="2529596" cy="457200"/>
-          </a:xfrm>
-          <a:prstGeom prst="rect">
-            <a:avLst/>
-          </a:prstGeom>
-          <a:solidFill>
-            <a:srgbClr val="60A5FA">
-              <a:alpha val="90000"/>
-            </a:srgbClr>
-          </a:solidFill>
-          <a:ln/>
-        </p:spPr>
-      </p:sp>
-      <p:sp>
-        <p:nvSpPr>
-          <p:cNvPr id="47" name="Shape 45"/>
-          <p:cNvSpPr/>
-          <p:nvPr/>
-        </p:nvSpPr>
-        <p:spPr>
-          <a:xfrm>
-            <a:off x="8119872" y="4736592"/>
-            <a:ext cx="621792" cy="329184"/>
-          </a:xfrm>
-          <a:prstGeom prst="roundRect">
-            <a:avLst>
-              <a:gd name="adj" fmla="val 138889"/>
-            </a:avLst>
-          </a:prstGeom>
-          <a:solidFill>
-            <a:srgbClr val="FFFFFF">
-              <a:alpha val="15000"/>
-            </a:srgbClr>
-          </a:solidFill>
-          <a:ln w="6350">
-            <a:solidFill>
-              <a:srgbClr val="FFFFFF">
-                <a:alpha val="25000"/>
-              </a:srgbClr>
-            </a:solidFill>
-            <a:prstDash val="solid"/>
-          </a:ln>
-        </p:spPr>
-      </p:sp>
-      <p:sp>
-        <p:nvSpPr>
-          <p:cNvPr id="48" name="Text 46"/>
-          <p:cNvSpPr/>
-          <p:nvPr/>
-        </p:nvSpPr>
-        <p:spPr>
-          <a:xfrm>
-            <a:off x="8119872" y="4736592"/>
+          <p:cNvPr id="34" name="Text 32"/>
+          <p:cNvSpPr/>
+          <p:nvPr/>
+        </p:nvSpPr>
+        <p:spPr>
+          <a:xfrm>
+            <a:off x="8229600" y="4736592"/>
             <a:ext cx="621792" cy="329184"/>
           </a:xfrm>
           <a:prstGeom prst="rect">
@@ -12977,26 +10191,6 @@
         </p:nvSpPr>
         <p:spPr>
           <a:xfrm>
-            <a:off x="0" y="0"/>
-            <a:ext cx="109728" cy="5143500"/>
-          </a:xfrm>
-          <a:prstGeom prst="rect">
-            <a:avLst/>
-          </a:prstGeom>
-          <a:solidFill>
-            <a:srgbClr val="60A5FA"/>
-          </a:solidFill>
-          <a:ln/>
-        </p:spPr>
-      </p:sp>
-      <p:sp>
-        <p:nvSpPr>
-          <p:cNvPr id="3" name="Shape 1"/>
-          <p:cNvSpPr/>
-          <p:nvPr/>
-        </p:nvSpPr>
-        <p:spPr>
-          <a:xfrm>
             <a:off x="6720840" y="-182880"/>
             <a:ext cx="2743200" cy="2377440"/>
           </a:xfrm>
@@ -13018,7 +10212,7 @@
       </p:sp>
       <p:sp>
         <p:nvSpPr>
-          <p:cNvPr id="4" name="Shape 2"/>
+          <p:cNvPr id="3" name="Shape 1"/>
           <p:cNvSpPr/>
           <p:nvPr/>
         </p:nvSpPr>
@@ -13045,127 +10239,34 @@
       </p:sp>
       <p:sp>
         <p:nvSpPr>
+          <p:cNvPr id="4" name="Shape 2"/>
+          <p:cNvSpPr/>
+          <p:nvPr/>
+        </p:nvSpPr>
+        <p:spPr>
+          <a:xfrm>
+            <a:off x="0" y="0"/>
+            <a:ext cx="2423160" cy="5143500"/>
+          </a:xfrm>
+          <a:prstGeom prst="rect">
+            <a:avLst/>
+          </a:prstGeom>
+          <a:solidFill>
+            <a:srgbClr val="1E3A5F"/>
+          </a:solidFill>
+          <a:ln/>
+        </p:spPr>
+      </p:sp>
+      <p:sp>
+        <p:nvSpPr>
           <p:cNvPr id="5" name="Shape 3"/>
           <p:cNvSpPr/>
           <p:nvPr/>
         </p:nvSpPr>
         <p:spPr>
           <a:xfrm>
-            <a:off x="7909560" y="201168"/>
-            <a:ext cx="685800" cy="685800"/>
-          </a:xfrm>
-          <a:prstGeom prst="ellipse">
-            <a:avLst/>
-          </a:prstGeom>
-          <a:solidFill>
-            <a:srgbClr val="EFF6FF">
-              <a:alpha val="0"/>
-            </a:srgbClr>
-          </a:solidFill>
-          <a:ln w="15875">
-            <a:solidFill>
-              <a:srgbClr val="60A5FA"/>
-            </a:solidFill>
-            <a:prstDash val="solid"/>
-          </a:ln>
-        </p:spPr>
-      </p:sp>
-      <p:sp>
-        <p:nvSpPr>
-          <p:cNvPr id="6" name="Shape 4"/>
-          <p:cNvSpPr/>
-          <p:nvPr/>
-        </p:nvSpPr>
-        <p:spPr>
-          <a:xfrm>
-            <a:off x="8183880" y="384048"/>
-            <a:ext cx="384048" cy="384048"/>
-          </a:xfrm>
-          <a:prstGeom prst="ellipse">
-            <a:avLst/>
-          </a:prstGeom>
-          <a:solidFill>
-            <a:srgbClr val="60A5FA">
-              <a:alpha val="35000"/>
-            </a:srgbClr>
-          </a:solidFill>
-          <a:ln/>
-        </p:spPr>
-      </p:sp>
-      <p:sp>
-        <p:nvSpPr>
-          <p:cNvPr id="7" name="Shape 5"/>
-          <p:cNvSpPr/>
-          <p:nvPr/>
-        </p:nvSpPr>
-        <p:spPr>
-          <a:xfrm>
-            <a:off x="109728" y="0"/>
-            <a:ext cx="9034272" cy="960120"/>
-          </a:xfrm>
-          <a:prstGeom prst="rect">
-            <a:avLst/>
-          </a:prstGeom>
-          <a:solidFill>
-            <a:srgbClr val="1E3A5F"/>
-          </a:solidFill>
-          <a:ln/>
-        </p:spPr>
-      </p:sp>
-      <p:sp>
-        <p:nvSpPr>
-          <p:cNvPr id="8" name="Shape 6"/>
-          <p:cNvSpPr/>
-          <p:nvPr/>
-        </p:nvSpPr>
-        <p:spPr>
-          <a:xfrm>
-            <a:off x="4389120" y="0"/>
-            <a:ext cx="4754880" cy="960120"/>
-          </a:xfrm>
-          <a:prstGeom prst="rect">
-            <a:avLst/>
-          </a:prstGeom>
-          <a:solidFill>
-            <a:srgbClr val="2563EB">
-              <a:alpha val="75000"/>
-            </a:srgbClr>
-          </a:solidFill>
-          <a:ln/>
-        </p:spPr>
-      </p:sp>
-      <p:sp>
-        <p:nvSpPr>
-          <p:cNvPr id="9" name="Shape 7"/>
-          <p:cNvSpPr/>
-          <p:nvPr/>
-        </p:nvSpPr>
-        <p:spPr>
-          <a:xfrm rot="21000000">
-            <a:off x="6263640" y="-320040"/>
-            <a:ext cx="3108960" cy="1234440"/>
-          </a:xfrm>
-          <a:prstGeom prst="rect">
-            <a:avLst/>
-          </a:prstGeom>
-          <a:solidFill>
-            <a:srgbClr val="FFFFFF">
-              <a:alpha val="12000"/>
-            </a:srgbClr>
-          </a:solidFill>
-          <a:ln/>
-        </p:spPr>
-      </p:sp>
-      <p:sp>
-        <p:nvSpPr>
-          <p:cNvPr id="10" name="Shape 8"/>
-          <p:cNvSpPr/>
-          <p:nvPr/>
-        </p:nvSpPr>
-        <p:spPr>
-          <a:xfrm>
-            <a:off x="109728" y="932688"/>
-            <a:ext cx="9034272" cy="36576"/>
+            <a:off x="2423160" y="0"/>
+            <a:ext cx="54864" cy="5143500"/>
           </a:xfrm>
           <a:prstGeom prst="rect">
             <a:avLst/>
@@ -13178,45 +10279,14 @@
       </p:sp>
       <p:sp>
         <p:nvSpPr>
-          <p:cNvPr id="11" name="Shape 9"/>
-          <p:cNvSpPr/>
-          <p:nvPr/>
-        </p:nvSpPr>
-        <p:spPr>
-          <a:xfrm>
-            <a:off x="475488" y="91440"/>
-            <a:ext cx="960120" cy="201168"/>
-          </a:xfrm>
-          <a:prstGeom prst="roundRect">
-            <a:avLst>
-              <a:gd name="adj" fmla="val 227273"/>
-            </a:avLst>
-          </a:prstGeom>
-          <a:solidFill>
-            <a:srgbClr val="FFFFFF">
-              <a:alpha val="12000"/>
-            </a:srgbClr>
-          </a:solidFill>
-          <a:ln w="6350">
-            <a:solidFill>
-              <a:srgbClr val="FFFFFF">
-                <a:alpha val="20000"/>
-              </a:srgbClr>
-            </a:solidFill>
-            <a:prstDash val="solid"/>
-          </a:ln>
-        </p:spPr>
-      </p:sp>
-      <p:sp>
-        <p:nvSpPr>
-          <p:cNvPr id="12" name="Text 10"/>
-          <p:cNvSpPr/>
-          <p:nvPr/>
-        </p:nvSpPr>
-        <p:spPr>
-          <a:xfrm>
-            <a:off x="502920" y="109728"/>
-            <a:ext cx="914400" cy="164592"/>
+          <p:cNvPr id="6" name="Text 4"/>
+          <p:cNvSpPr/>
+          <p:nvPr/>
+        </p:nvSpPr>
+        <p:spPr>
+          <a:xfrm>
+            <a:off x="228600" y="411480"/>
+            <a:ext cx="1965960" cy="4114800"/>
           </a:xfrm>
           <a:prstGeom prst="rect">
             <a:avLst/>
@@ -13225,55 +10295,14 @@
           <a:ln/>
         </p:spPr>
         <p:txBody>
-          <a:bodyPr wrap="square" rtlCol="0" anchor="ctr"/>
+          <a:bodyPr wrap="square" rtlCol="0" anchor="t"/>
           <a:lstStyle/>
           <a:p>
             <a:pPr indent="0" marL="0">
               <a:buNone/>
             </a:pPr>
             <a:r>
-              <a:rPr lang="en-US" sz="700" b="1" spc="120" kern="0" dirty="0">
-                <a:solidFill>
-                  <a:srgbClr val="FFFFFF">
-                    <a:alpha val="75000"/>
-                  </a:srgbClr>
-                </a:solidFill>
-                <a:latin typeface="Microsoft YaHei" pitchFamily="34" charset="0"/>
-                <a:ea typeface="Microsoft YaHei" pitchFamily="34" charset="-122"/>
-                <a:cs typeface="Microsoft YaHei" pitchFamily="34" charset="-120"/>
-              </a:rPr>
-              <a:t>KEY POINTS</a:t>
-            </a:r>
-            <a:endParaRPr lang="en-US" sz="700" dirty="0"/>
-          </a:p>
-        </p:txBody>
-      </p:sp>
-      <p:sp>
-        <p:nvSpPr>
-          <p:cNvPr id="13" name="Text 11"/>
-          <p:cNvSpPr/>
-          <p:nvPr/>
-        </p:nvSpPr>
-        <p:spPr>
-          <a:xfrm>
-            <a:off x="502920" y="329184"/>
-            <a:ext cx="8046720" cy="530352"/>
-          </a:xfrm>
-          <a:prstGeom prst="rect">
-            <a:avLst/>
-          </a:prstGeom>
-          <a:noFill/>
-          <a:ln/>
-        </p:spPr>
-        <p:txBody>
-          <a:bodyPr wrap="square" rtlCol="0" anchor="t"/>
-          <a:lstStyle/>
-          <a:p>
-            <a:pPr indent="0" marL="0">
-              <a:buNone/>
-            </a:pPr>
-            <a:r>
-              <a:rPr lang="en-US" sz="2200" b="1" dirty="0">
+              <a:rPr lang="en-US" sz="1800" b="1" dirty="0">
                 <a:solidFill>
                   <a:srgbClr val="FFFFFF"/>
                 </a:solidFill>
@@ -13283,20 +10312,20 @@
               </a:rPr>
               <a:t>CC_TITLE</a:t>
             </a:r>
-            <a:endParaRPr lang="en-US" sz="2200" dirty="0"/>
-          </a:p>
-        </p:txBody>
-      </p:sp>
-      <p:sp>
-        <p:nvSpPr>
-          <p:cNvPr id="14" name="Shape 12"/>
-          <p:cNvSpPr/>
-          <p:nvPr/>
-        </p:nvSpPr>
-        <p:spPr>
-          <a:xfrm>
-            <a:off x="411480" y="1078992"/>
-            <a:ext cx="8321040" cy="3493008"/>
+            <a:endParaRPr lang="en-US" sz="1800" dirty="0"/>
+          </a:p>
+        </p:txBody>
+      </p:sp>
+      <p:sp>
+        <p:nvSpPr>
+          <p:cNvPr id="7" name="Shape 5"/>
+          <p:cNvSpPr/>
+          <p:nvPr/>
+        </p:nvSpPr>
+        <p:spPr>
+          <a:xfrm>
+            <a:off x="2606040" y="1078992"/>
+            <a:ext cx="6126480" cy="3493008"/>
           </a:xfrm>
           <a:prstGeom prst="roundRect">
             <a:avLst>
@@ -13323,7 +10352,7 @@
       </p:sp>
       <p:sp>
         <p:nvSpPr>
-          <p:cNvPr id="15" name="Shape 13"/>
+          <p:cNvPr id="8" name="Shape 6"/>
           <p:cNvSpPr/>
           <p:nvPr/>
         </p:nvSpPr>
@@ -13352,7 +10381,7 @@
       </p:sp>
       <p:sp>
         <p:nvSpPr>
-          <p:cNvPr id="16" name="Shape 14"/>
+          <p:cNvPr id="9" name="Shape 7"/>
           <p:cNvSpPr/>
           <p:nvPr/>
         </p:nvSpPr>
@@ -13374,7 +10403,7 @@
       </p:sp>
       <p:sp>
         <p:nvSpPr>
-          <p:cNvPr id="17" name="Shape 15"/>
+          <p:cNvPr id="10" name="Shape 8"/>
           <p:cNvSpPr/>
           <p:nvPr/>
         </p:nvSpPr>
@@ -13408,36 +10437,7 @@
       </p:sp>
       <p:sp>
         <p:nvSpPr>
-          <p:cNvPr id="18" name="Shape 16"/>
-          <p:cNvSpPr/>
-          <p:nvPr/>
-        </p:nvSpPr>
-        <p:spPr>
-          <a:xfrm>
-            <a:off x="796625" y="1500713"/>
-            <a:ext cx="190927" cy="190927"/>
-          </a:xfrm>
-          <a:prstGeom prst="roundRect">
-            <a:avLst>
-              <a:gd name="adj" fmla="val 181992"/>
-            </a:avLst>
-          </a:prstGeom>
-          <a:solidFill>
-            <a:srgbClr val="60A5FA">
-              <a:alpha val="80000"/>
-            </a:srgbClr>
-          </a:solidFill>
-          <a:ln w="12700">
-            <a:solidFill>
-              <a:srgbClr val="333333"/>
-            </a:solidFill>
-            <a:prstDash val="solid"/>
-          </a:ln>
-        </p:spPr>
-      </p:sp>
-      <p:sp>
-        <p:nvSpPr>
-          <p:cNvPr id="19" name="Text 17"/>
+          <p:cNvPr id="11" name="Text 9"/>
           <p:cNvSpPr/>
           <p:nvPr/>
         </p:nvSpPr>
@@ -13476,7 +10476,7 @@
       </p:sp>
       <p:sp>
         <p:nvSpPr>
-          <p:cNvPr id="20" name="Text 18"/>
+          <p:cNvPr id="12" name="Text 10"/>
           <p:cNvSpPr/>
           <p:nvPr/>
         </p:nvSpPr>
@@ -13496,9 +10496,6 @@
           <a:lstStyle/>
           <a:p>
             <a:pPr indent="0" marL="0">
-              <a:lnSpc>
-                <a:spcPct val="115000"/>
-              </a:lnSpc>
               <a:buNone/>
             </a:pPr>
             <a:r>
@@ -13518,7 +10515,7 @@
       </p:sp>
       <p:sp>
         <p:nvSpPr>
-          <p:cNvPr id="21" name="Shape 19"/>
+          <p:cNvPr id="13" name="Shape 11"/>
           <p:cNvSpPr/>
           <p:nvPr/>
         </p:nvSpPr>
@@ -13547,7 +10544,7 @@
       </p:sp>
       <p:sp>
         <p:nvSpPr>
-          <p:cNvPr id="22" name="Shape 20"/>
+          <p:cNvPr id="14" name="Shape 12"/>
           <p:cNvSpPr/>
           <p:nvPr/>
         </p:nvSpPr>
@@ -13569,7 +10566,7 @@
       </p:sp>
       <p:sp>
         <p:nvSpPr>
-          <p:cNvPr id="23" name="Shape 21"/>
+          <p:cNvPr id="15" name="Shape 13"/>
           <p:cNvSpPr/>
           <p:nvPr/>
         </p:nvSpPr>
@@ -13603,36 +10600,7 @@
       </p:sp>
       <p:sp>
         <p:nvSpPr>
-          <p:cNvPr id="24" name="Shape 22"/>
-          <p:cNvSpPr/>
-          <p:nvPr/>
-        </p:nvSpPr>
-        <p:spPr>
-          <a:xfrm>
-            <a:off x="796625" y="2122505"/>
-            <a:ext cx="190927" cy="190927"/>
-          </a:xfrm>
-          <a:prstGeom prst="roundRect">
-            <a:avLst>
-              <a:gd name="adj" fmla="val 181992"/>
-            </a:avLst>
-          </a:prstGeom>
-          <a:solidFill>
-            <a:srgbClr val="60A5FA">
-              <a:alpha val="80000"/>
-            </a:srgbClr>
-          </a:solidFill>
-          <a:ln w="12700">
-            <a:solidFill>
-              <a:srgbClr val="333333"/>
-            </a:solidFill>
-            <a:prstDash val="solid"/>
-          </a:ln>
-        </p:spPr>
-      </p:sp>
-      <p:sp>
-        <p:nvSpPr>
-          <p:cNvPr id="25" name="Text 23"/>
+          <p:cNvPr id="16" name="Text 14"/>
           <p:cNvSpPr/>
           <p:nvPr/>
         </p:nvSpPr>
@@ -13671,7 +10639,7 @@
       </p:sp>
       <p:sp>
         <p:nvSpPr>
-          <p:cNvPr id="26" name="Text 24"/>
+          <p:cNvPr id="17" name="Text 15"/>
           <p:cNvSpPr/>
           <p:nvPr/>
         </p:nvSpPr>
@@ -13691,9 +10659,6 @@
           <a:lstStyle/>
           <a:p>
             <a:pPr indent="0" marL="0">
-              <a:lnSpc>
-                <a:spcPct val="115000"/>
-              </a:lnSpc>
               <a:buNone/>
             </a:pPr>
             <a:r>
@@ -13713,7 +10678,7 @@
       </p:sp>
       <p:sp>
         <p:nvSpPr>
-          <p:cNvPr id="27" name="Shape 25"/>
+          <p:cNvPr id="18" name="Shape 16"/>
           <p:cNvSpPr/>
           <p:nvPr/>
         </p:nvSpPr>
@@ -13742,7 +10707,7 @@
       </p:sp>
       <p:sp>
         <p:nvSpPr>
-          <p:cNvPr id="28" name="Shape 26"/>
+          <p:cNvPr id="19" name="Shape 17"/>
           <p:cNvSpPr/>
           <p:nvPr/>
         </p:nvSpPr>
@@ -13764,7 +10729,7 @@
       </p:sp>
       <p:sp>
         <p:nvSpPr>
-          <p:cNvPr id="29" name="Shape 27"/>
+          <p:cNvPr id="20" name="Shape 18"/>
           <p:cNvSpPr/>
           <p:nvPr/>
         </p:nvSpPr>
@@ -13798,36 +10763,7 @@
       </p:sp>
       <p:sp>
         <p:nvSpPr>
-          <p:cNvPr id="30" name="Shape 28"/>
-          <p:cNvSpPr/>
-          <p:nvPr/>
-        </p:nvSpPr>
-        <p:spPr>
-          <a:xfrm>
-            <a:off x="796625" y="2744297"/>
-            <a:ext cx="190927" cy="190927"/>
-          </a:xfrm>
-          <a:prstGeom prst="roundRect">
-            <a:avLst>
-              <a:gd name="adj" fmla="val 181992"/>
-            </a:avLst>
-          </a:prstGeom>
-          <a:solidFill>
-            <a:srgbClr val="60A5FA">
-              <a:alpha val="80000"/>
-            </a:srgbClr>
-          </a:solidFill>
-          <a:ln w="12700">
-            <a:solidFill>
-              <a:srgbClr val="333333"/>
-            </a:solidFill>
-            <a:prstDash val="solid"/>
-          </a:ln>
-        </p:spPr>
-      </p:sp>
-      <p:sp>
-        <p:nvSpPr>
-          <p:cNvPr id="31" name="Text 29"/>
+          <p:cNvPr id="21" name="Text 19"/>
           <p:cNvSpPr/>
           <p:nvPr/>
         </p:nvSpPr>
@@ -13866,7 +10802,7 @@
       </p:sp>
       <p:sp>
         <p:nvSpPr>
-          <p:cNvPr id="32" name="Text 30"/>
+          <p:cNvPr id="22" name="Text 20"/>
           <p:cNvSpPr/>
           <p:nvPr/>
         </p:nvSpPr>
@@ -13886,9 +10822,6 @@
           <a:lstStyle/>
           <a:p>
             <a:pPr indent="0" marL="0">
-              <a:lnSpc>
-                <a:spcPct val="115000"/>
-              </a:lnSpc>
               <a:buNone/>
             </a:pPr>
             <a:r>
@@ -13908,7 +10841,7 @@
       </p:sp>
       <p:sp>
         <p:nvSpPr>
-          <p:cNvPr id="33" name="Shape 31"/>
+          <p:cNvPr id="23" name="Shape 21"/>
           <p:cNvSpPr/>
           <p:nvPr/>
         </p:nvSpPr>
@@ -13937,7 +10870,7 @@
       </p:sp>
       <p:sp>
         <p:nvSpPr>
-          <p:cNvPr id="34" name="Shape 32"/>
+          <p:cNvPr id="24" name="Shape 22"/>
           <p:cNvSpPr/>
           <p:nvPr/>
         </p:nvSpPr>
@@ -13959,7 +10892,7 @@
       </p:sp>
       <p:sp>
         <p:nvSpPr>
-          <p:cNvPr id="35" name="Shape 33"/>
+          <p:cNvPr id="25" name="Shape 23"/>
           <p:cNvSpPr/>
           <p:nvPr/>
         </p:nvSpPr>
@@ -13993,36 +10926,7 @@
       </p:sp>
       <p:sp>
         <p:nvSpPr>
-          <p:cNvPr id="36" name="Shape 34"/>
-          <p:cNvSpPr/>
-          <p:nvPr/>
-        </p:nvSpPr>
-        <p:spPr>
-          <a:xfrm>
-            <a:off x="796625" y="3366089"/>
-            <a:ext cx="190927" cy="190927"/>
-          </a:xfrm>
-          <a:prstGeom prst="roundRect">
-            <a:avLst>
-              <a:gd name="adj" fmla="val 181992"/>
-            </a:avLst>
-          </a:prstGeom>
-          <a:solidFill>
-            <a:srgbClr val="60A5FA">
-              <a:alpha val="80000"/>
-            </a:srgbClr>
-          </a:solidFill>
-          <a:ln w="12700">
-            <a:solidFill>
-              <a:srgbClr val="333333"/>
-            </a:solidFill>
-            <a:prstDash val="solid"/>
-          </a:ln>
-        </p:spPr>
-      </p:sp>
-      <p:sp>
-        <p:nvSpPr>
-          <p:cNvPr id="37" name="Text 35"/>
+          <p:cNvPr id="26" name="Text 24"/>
           <p:cNvSpPr/>
           <p:nvPr/>
         </p:nvSpPr>
@@ -14061,7 +10965,7 @@
       </p:sp>
       <p:sp>
         <p:nvSpPr>
-          <p:cNvPr id="38" name="Text 36"/>
+          <p:cNvPr id="27" name="Text 25"/>
           <p:cNvSpPr/>
           <p:nvPr/>
         </p:nvSpPr>
@@ -14081,9 +10985,6 @@
           <a:lstStyle/>
           <a:p>
             <a:pPr indent="0" marL="0">
-              <a:lnSpc>
-                <a:spcPct val="115000"/>
-              </a:lnSpc>
               <a:buNone/>
             </a:pPr>
             <a:r>
@@ -14103,7 +11004,7 @@
       </p:sp>
       <p:sp>
         <p:nvSpPr>
-          <p:cNvPr id="39" name="Shape 37"/>
+          <p:cNvPr id="28" name="Shape 26"/>
           <p:cNvSpPr/>
           <p:nvPr/>
         </p:nvSpPr>
@@ -14132,7 +11033,7 @@
       </p:sp>
       <p:sp>
         <p:nvSpPr>
-          <p:cNvPr id="40" name="Shape 38"/>
+          <p:cNvPr id="29" name="Shape 27"/>
           <p:cNvSpPr/>
           <p:nvPr/>
         </p:nvSpPr>
@@ -14154,7 +11055,7 @@
       </p:sp>
       <p:sp>
         <p:nvSpPr>
-          <p:cNvPr id="41" name="Shape 39"/>
+          <p:cNvPr id="30" name="Shape 28"/>
           <p:cNvSpPr/>
           <p:nvPr/>
         </p:nvSpPr>
@@ -14188,36 +11089,7 @@
       </p:sp>
       <p:sp>
         <p:nvSpPr>
-          <p:cNvPr id="42" name="Shape 40"/>
-          <p:cNvSpPr/>
-          <p:nvPr/>
-        </p:nvSpPr>
-        <p:spPr>
-          <a:xfrm>
-            <a:off x="796625" y="3987881"/>
-            <a:ext cx="190927" cy="190927"/>
-          </a:xfrm>
-          <a:prstGeom prst="roundRect">
-            <a:avLst>
-              <a:gd name="adj" fmla="val 181992"/>
-            </a:avLst>
-          </a:prstGeom>
-          <a:solidFill>
-            <a:srgbClr val="60A5FA">
-              <a:alpha val="80000"/>
-            </a:srgbClr>
-          </a:solidFill>
-          <a:ln w="12700">
-            <a:solidFill>
-              <a:srgbClr val="333333"/>
-            </a:solidFill>
-            <a:prstDash val="solid"/>
-          </a:ln>
-        </p:spPr>
-      </p:sp>
-      <p:sp>
-        <p:nvSpPr>
-          <p:cNvPr id="43" name="Text 41"/>
+          <p:cNvPr id="31" name="Text 29"/>
           <p:cNvSpPr/>
           <p:nvPr/>
         </p:nvSpPr>
@@ -14256,7 +11128,7 @@
       </p:sp>
       <p:sp>
         <p:nvSpPr>
-          <p:cNvPr id="44" name="Text 42"/>
+          <p:cNvPr id="32" name="Text 30"/>
           <p:cNvSpPr/>
           <p:nvPr/>
         </p:nvSpPr>
@@ -14276,9 +11148,6 @@
           <a:lstStyle/>
           <a:p>
             <a:pPr indent="0" marL="0">
-              <a:lnSpc>
-                <a:spcPct val="115000"/>
-              </a:lnSpc>
               <a:buNone/>
             </a:pPr>
             <a:r>
@@ -14298,14 +11167,14 @@
       </p:sp>
       <p:sp>
         <p:nvSpPr>
-          <p:cNvPr id="45" name="Shape 43"/>
-          <p:cNvSpPr/>
-          <p:nvPr/>
-        </p:nvSpPr>
-        <p:spPr>
-          <a:xfrm>
-            <a:off x="109728" y="4681728"/>
-            <a:ext cx="9034272" cy="457200"/>
+          <p:cNvPr id="33" name="Shape 31"/>
+          <p:cNvSpPr/>
+          <p:nvPr/>
+        </p:nvSpPr>
+        <p:spPr>
+          <a:xfrm>
+            <a:off x="2478024" y="4681728"/>
+            <a:ext cx="6665976" cy="457200"/>
           </a:xfrm>
           <a:prstGeom prst="rect">
             <a:avLst/>
@@ -14318,66 +11187,13 @@
       </p:sp>
       <p:sp>
         <p:nvSpPr>
-          <p:cNvPr id="46" name="Shape 44"/>
-          <p:cNvSpPr/>
-          <p:nvPr/>
-        </p:nvSpPr>
-        <p:spPr>
-          <a:xfrm>
-            <a:off x="109728" y="4681728"/>
-            <a:ext cx="2529596" cy="457200"/>
-          </a:xfrm>
-          <a:prstGeom prst="rect">
-            <a:avLst/>
-          </a:prstGeom>
-          <a:solidFill>
-            <a:srgbClr val="60A5FA">
-              <a:alpha val="90000"/>
-            </a:srgbClr>
-          </a:solidFill>
-          <a:ln/>
-        </p:spPr>
-      </p:sp>
-      <p:sp>
-        <p:nvSpPr>
-          <p:cNvPr id="47" name="Shape 45"/>
-          <p:cNvSpPr/>
-          <p:nvPr/>
-        </p:nvSpPr>
-        <p:spPr>
-          <a:xfrm>
-            <a:off x="8119872" y="4736592"/>
-            <a:ext cx="621792" cy="329184"/>
-          </a:xfrm>
-          <a:prstGeom prst="roundRect">
-            <a:avLst>
-              <a:gd name="adj" fmla="val 138889"/>
-            </a:avLst>
-          </a:prstGeom>
-          <a:solidFill>
-            <a:srgbClr val="FFFFFF">
-              <a:alpha val="15000"/>
-            </a:srgbClr>
-          </a:solidFill>
-          <a:ln w="6350">
-            <a:solidFill>
-              <a:srgbClr val="FFFFFF">
-                <a:alpha val="25000"/>
-              </a:srgbClr>
-            </a:solidFill>
-            <a:prstDash val="solid"/>
-          </a:ln>
-        </p:spPr>
-      </p:sp>
-      <p:sp>
-        <p:nvSpPr>
-          <p:cNvPr id="48" name="Text 46"/>
-          <p:cNvSpPr/>
-          <p:nvPr/>
-        </p:nvSpPr>
-        <p:spPr>
-          <a:xfrm>
-            <a:off x="8119872" y="4736592"/>
+          <p:cNvPr id="34" name="Text 32"/>
+          <p:cNvSpPr/>
+          <p:nvPr/>
+        </p:nvSpPr>
+        <p:spPr>
+          <a:xfrm>
+            <a:off x="8229600" y="4736592"/>
             <a:ext cx="621792" cy="329184"/>
           </a:xfrm>
           <a:prstGeom prst="rect">
@@ -14448,26 +11264,6 @@
         </p:nvSpPr>
         <p:spPr>
           <a:xfrm>
-            <a:off x="0" y="0"/>
-            <a:ext cx="109728" cy="5143500"/>
-          </a:xfrm>
-          <a:prstGeom prst="rect">
-            <a:avLst/>
-          </a:prstGeom>
-          <a:solidFill>
-            <a:srgbClr val="60A5FA"/>
-          </a:solidFill>
-          <a:ln/>
-        </p:spPr>
-      </p:sp>
-      <p:sp>
-        <p:nvSpPr>
-          <p:cNvPr id="3" name="Shape 1"/>
-          <p:cNvSpPr/>
-          <p:nvPr/>
-        </p:nvSpPr>
-        <p:spPr>
-          <a:xfrm>
             <a:off x="6720840" y="-182880"/>
             <a:ext cx="2743200" cy="2377440"/>
           </a:xfrm>
@@ -14489,7 +11285,7 @@
       </p:sp>
       <p:sp>
         <p:nvSpPr>
-          <p:cNvPr id="4" name="Shape 2"/>
+          <p:cNvPr id="3" name="Shape 1"/>
           <p:cNvSpPr/>
           <p:nvPr/>
         </p:nvSpPr>
@@ -14516,127 +11312,34 @@
       </p:sp>
       <p:sp>
         <p:nvSpPr>
+          <p:cNvPr id="4" name="Shape 2"/>
+          <p:cNvSpPr/>
+          <p:nvPr/>
+        </p:nvSpPr>
+        <p:spPr>
+          <a:xfrm>
+            <a:off x="0" y="0"/>
+            <a:ext cx="2423160" cy="5143500"/>
+          </a:xfrm>
+          <a:prstGeom prst="rect">
+            <a:avLst/>
+          </a:prstGeom>
+          <a:solidFill>
+            <a:srgbClr val="1E3A5F"/>
+          </a:solidFill>
+          <a:ln/>
+        </p:spPr>
+      </p:sp>
+      <p:sp>
+        <p:nvSpPr>
           <p:cNvPr id="5" name="Shape 3"/>
           <p:cNvSpPr/>
           <p:nvPr/>
         </p:nvSpPr>
         <p:spPr>
           <a:xfrm>
-            <a:off x="7909560" y="201168"/>
-            <a:ext cx="685800" cy="685800"/>
-          </a:xfrm>
-          <a:prstGeom prst="ellipse">
-            <a:avLst/>
-          </a:prstGeom>
-          <a:solidFill>
-            <a:srgbClr val="EFF6FF">
-              <a:alpha val="0"/>
-            </a:srgbClr>
-          </a:solidFill>
-          <a:ln w="15875">
-            <a:solidFill>
-              <a:srgbClr val="60A5FA"/>
-            </a:solidFill>
-            <a:prstDash val="solid"/>
-          </a:ln>
-        </p:spPr>
-      </p:sp>
-      <p:sp>
-        <p:nvSpPr>
-          <p:cNvPr id="6" name="Shape 4"/>
-          <p:cNvSpPr/>
-          <p:nvPr/>
-        </p:nvSpPr>
-        <p:spPr>
-          <a:xfrm>
-            <a:off x="8183880" y="384048"/>
-            <a:ext cx="384048" cy="384048"/>
-          </a:xfrm>
-          <a:prstGeom prst="ellipse">
-            <a:avLst/>
-          </a:prstGeom>
-          <a:solidFill>
-            <a:srgbClr val="60A5FA">
-              <a:alpha val="35000"/>
-            </a:srgbClr>
-          </a:solidFill>
-          <a:ln/>
-        </p:spPr>
-      </p:sp>
-      <p:sp>
-        <p:nvSpPr>
-          <p:cNvPr id="7" name="Shape 5"/>
-          <p:cNvSpPr/>
-          <p:nvPr/>
-        </p:nvSpPr>
-        <p:spPr>
-          <a:xfrm>
-            <a:off x="109728" y="0"/>
-            <a:ext cx="9034272" cy="960120"/>
-          </a:xfrm>
-          <a:prstGeom prst="rect">
-            <a:avLst/>
-          </a:prstGeom>
-          <a:solidFill>
-            <a:srgbClr val="1E3A5F"/>
-          </a:solidFill>
-          <a:ln/>
-        </p:spPr>
-      </p:sp>
-      <p:sp>
-        <p:nvSpPr>
-          <p:cNvPr id="8" name="Shape 6"/>
-          <p:cNvSpPr/>
-          <p:nvPr/>
-        </p:nvSpPr>
-        <p:spPr>
-          <a:xfrm>
-            <a:off x="4389120" y="0"/>
-            <a:ext cx="4754880" cy="960120"/>
-          </a:xfrm>
-          <a:prstGeom prst="rect">
-            <a:avLst/>
-          </a:prstGeom>
-          <a:solidFill>
-            <a:srgbClr val="2563EB">
-              <a:alpha val="75000"/>
-            </a:srgbClr>
-          </a:solidFill>
-          <a:ln/>
-        </p:spPr>
-      </p:sp>
-      <p:sp>
-        <p:nvSpPr>
-          <p:cNvPr id="9" name="Shape 7"/>
-          <p:cNvSpPr/>
-          <p:nvPr/>
-        </p:nvSpPr>
-        <p:spPr>
-          <a:xfrm rot="21000000">
-            <a:off x="6263640" y="-320040"/>
-            <a:ext cx="3108960" cy="1234440"/>
-          </a:xfrm>
-          <a:prstGeom prst="rect">
-            <a:avLst/>
-          </a:prstGeom>
-          <a:solidFill>
-            <a:srgbClr val="FFFFFF">
-              <a:alpha val="12000"/>
-            </a:srgbClr>
-          </a:solidFill>
-          <a:ln/>
-        </p:spPr>
-      </p:sp>
-      <p:sp>
-        <p:nvSpPr>
-          <p:cNvPr id="10" name="Shape 8"/>
-          <p:cNvSpPr/>
-          <p:nvPr/>
-        </p:nvSpPr>
-        <p:spPr>
-          <a:xfrm>
-            <a:off x="109728" y="932688"/>
-            <a:ext cx="9034272" cy="36576"/>
+            <a:off x="2423160" y="0"/>
+            <a:ext cx="54864" cy="5143500"/>
           </a:xfrm>
           <a:prstGeom prst="rect">
             <a:avLst/>
@@ -14649,45 +11352,14 @@
       </p:sp>
       <p:sp>
         <p:nvSpPr>
-          <p:cNvPr id="11" name="Shape 9"/>
-          <p:cNvSpPr/>
-          <p:nvPr/>
-        </p:nvSpPr>
-        <p:spPr>
-          <a:xfrm>
-            <a:off x="475488" y="91440"/>
-            <a:ext cx="960120" cy="201168"/>
-          </a:xfrm>
-          <a:prstGeom prst="roundRect">
-            <a:avLst>
-              <a:gd name="adj" fmla="val 227273"/>
-            </a:avLst>
-          </a:prstGeom>
-          <a:solidFill>
-            <a:srgbClr val="FFFFFF">
-              <a:alpha val="12000"/>
-            </a:srgbClr>
-          </a:solidFill>
-          <a:ln w="6350">
-            <a:solidFill>
-              <a:srgbClr val="FFFFFF">
-                <a:alpha val="20000"/>
-              </a:srgbClr>
-            </a:solidFill>
-            <a:prstDash val="solid"/>
-          </a:ln>
-        </p:spPr>
-      </p:sp>
-      <p:sp>
-        <p:nvSpPr>
-          <p:cNvPr id="12" name="Text 10"/>
-          <p:cNvSpPr/>
-          <p:nvPr/>
-        </p:nvSpPr>
-        <p:spPr>
-          <a:xfrm>
-            <a:off x="502920" y="109728"/>
-            <a:ext cx="914400" cy="164592"/>
+          <p:cNvPr id="6" name="Text 4"/>
+          <p:cNvSpPr/>
+          <p:nvPr/>
+        </p:nvSpPr>
+        <p:spPr>
+          <a:xfrm>
+            <a:off x="228600" y="411480"/>
+            <a:ext cx="1965960" cy="4114800"/>
           </a:xfrm>
           <a:prstGeom prst="rect">
             <a:avLst/>
@@ -14696,55 +11368,14 @@
           <a:ln/>
         </p:spPr>
         <p:txBody>
-          <a:bodyPr wrap="square" rtlCol="0" anchor="ctr"/>
+          <a:bodyPr wrap="square" rtlCol="0" anchor="t"/>
           <a:lstStyle/>
           <a:p>
             <a:pPr indent="0" marL="0">
               <a:buNone/>
             </a:pPr>
             <a:r>
-              <a:rPr lang="en-US" sz="700" b="1" spc="120" kern="0" dirty="0">
-                <a:solidFill>
-                  <a:srgbClr val="FFFFFF">
-                    <a:alpha val="75000"/>
-                  </a:srgbClr>
-                </a:solidFill>
-                <a:latin typeface="Microsoft YaHei" pitchFamily="34" charset="0"/>
-                <a:ea typeface="Microsoft YaHei" pitchFamily="34" charset="-122"/>
-                <a:cs typeface="Microsoft YaHei" pitchFamily="34" charset="-120"/>
-              </a:rPr>
-              <a:t>KEY POINTS</a:t>
-            </a:r>
-            <a:endParaRPr lang="en-US" sz="700" dirty="0"/>
-          </a:p>
-        </p:txBody>
-      </p:sp>
-      <p:sp>
-        <p:nvSpPr>
-          <p:cNvPr id="13" name="Text 11"/>
-          <p:cNvSpPr/>
-          <p:nvPr/>
-        </p:nvSpPr>
-        <p:spPr>
-          <a:xfrm>
-            <a:off x="502920" y="329184"/>
-            <a:ext cx="8046720" cy="530352"/>
-          </a:xfrm>
-          <a:prstGeom prst="rect">
-            <a:avLst/>
-          </a:prstGeom>
-          <a:noFill/>
-          <a:ln/>
-        </p:spPr>
-        <p:txBody>
-          <a:bodyPr wrap="square" rtlCol="0" anchor="t"/>
-          <a:lstStyle/>
-          <a:p>
-            <a:pPr indent="0" marL="0">
-              <a:buNone/>
-            </a:pPr>
-            <a:r>
-              <a:rPr lang="en-US" sz="2200" b="1" dirty="0">
+              <a:rPr lang="en-US" sz="1800" b="1" dirty="0">
                 <a:solidFill>
                   <a:srgbClr val="FFFFFF"/>
                 </a:solidFill>
@@ -14754,20 +11385,20 @@
               </a:rPr>
               <a:t>CC_TITLE</a:t>
             </a:r>
-            <a:endParaRPr lang="en-US" sz="2200" dirty="0"/>
-          </a:p>
-        </p:txBody>
-      </p:sp>
-      <p:sp>
-        <p:nvSpPr>
-          <p:cNvPr id="14" name="Shape 12"/>
-          <p:cNvSpPr/>
-          <p:nvPr/>
-        </p:nvSpPr>
-        <p:spPr>
-          <a:xfrm>
-            <a:off x="411480" y="1078992"/>
-            <a:ext cx="8321040" cy="3493008"/>
+            <a:endParaRPr lang="en-US" sz="1800" dirty="0"/>
+          </a:p>
+        </p:txBody>
+      </p:sp>
+      <p:sp>
+        <p:nvSpPr>
+          <p:cNvPr id="7" name="Shape 5"/>
+          <p:cNvSpPr/>
+          <p:nvPr/>
+        </p:nvSpPr>
+        <p:spPr>
+          <a:xfrm>
+            <a:off x="2606040" y="1078992"/>
+            <a:ext cx="6126480" cy="3493008"/>
           </a:xfrm>
           <a:prstGeom prst="roundRect">
             <a:avLst>
@@ -14794,7 +11425,7 @@
       </p:sp>
       <p:sp>
         <p:nvSpPr>
-          <p:cNvPr id="15" name="Shape 13"/>
+          <p:cNvPr id="8" name="Shape 6"/>
           <p:cNvSpPr/>
           <p:nvPr/>
         </p:nvSpPr>
@@ -14823,7 +11454,7 @@
       </p:sp>
       <p:sp>
         <p:nvSpPr>
-          <p:cNvPr id="16" name="Shape 14"/>
+          <p:cNvPr id="9" name="Shape 7"/>
           <p:cNvSpPr/>
           <p:nvPr/>
         </p:nvSpPr>
@@ -14845,7 +11476,7 @@
       </p:sp>
       <p:sp>
         <p:nvSpPr>
-          <p:cNvPr id="17" name="Shape 15"/>
+          <p:cNvPr id="10" name="Shape 8"/>
           <p:cNvSpPr/>
           <p:nvPr/>
         </p:nvSpPr>
@@ -14879,36 +11510,7 @@
       </p:sp>
       <p:sp>
         <p:nvSpPr>
-          <p:cNvPr id="18" name="Shape 16"/>
-          <p:cNvSpPr/>
-          <p:nvPr/>
-        </p:nvSpPr>
-        <p:spPr>
-          <a:xfrm>
-            <a:off x="796625" y="1500713"/>
-            <a:ext cx="190927" cy="190927"/>
-          </a:xfrm>
-          <a:prstGeom prst="roundRect">
-            <a:avLst>
-              <a:gd name="adj" fmla="val 181992"/>
-            </a:avLst>
-          </a:prstGeom>
-          <a:solidFill>
-            <a:srgbClr val="60A5FA">
-              <a:alpha val="80000"/>
-            </a:srgbClr>
-          </a:solidFill>
-          <a:ln w="12700">
-            <a:solidFill>
-              <a:srgbClr val="333333"/>
-            </a:solidFill>
-            <a:prstDash val="solid"/>
-          </a:ln>
-        </p:spPr>
-      </p:sp>
-      <p:sp>
-        <p:nvSpPr>
-          <p:cNvPr id="19" name="Text 17"/>
+          <p:cNvPr id="11" name="Text 9"/>
           <p:cNvSpPr/>
           <p:nvPr/>
         </p:nvSpPr>
@@ -14947,7 +11549,7 @@
       </p:sp>
       <p:sp>
         <p:nvSpPr>
-          <p:cNvPr id="20" name="Text 18"/>
+          <p:cNvPr id="12" name="Text 10"/>
           <p:cNvSpPr/>
           <p:nvPr/>
         </p:nvSpPr>
@@ -14967,9 +11569,6 @@
           <a:lstStyle/>
           <a:p>
             <a:pPr indent="0" marL="0">
-              <a:lnSpc>
-                <a:spcPct val="115000"/>
-              </a:lnSpc>
               <a:buNone/>
             </a:pPr>
             <a:r>
@@ -14989,7 +11588,7 @@
       </p:sp>
       <p:sp>
         <p:nvSpPr>
-          <p:cNvPr id="21" name="Shape 19"/>
+          <p:cNvPr id="13" name="Shape 11"/>
           <p:cNvSpPr/>
           <p:nvPr/>
         </p:nvSpPr>
@@ -15018,7 +11617,7 @@
       </p:sp>
       <p:sp>
         <p:nvSpPr>
-          <p:cNvPr id="22" name="Shape 20"/>
+          <p:cNvPr id="14" name="Shape 12"/>
           <p:cNvSpPr/>
           <p:nvPr/>
         </p:nvSpPr>
@@ -15040,7 +11639,7 @@
       </p:sp>
       <p:sp>
         <p:nvSpPr>
-          <p:cNvPr id="23" name="Shape 21"/>
+          <p:cNvPr id="15" name="Shape 13"/>
           <p:cNvSpPr/>
           <p:nvPr/>
         </p:nvSpPr>
@@ -15074,36 +11673,7 @@
       </p:sp>
       <p:sp>
         <p:nvSpPr>
-          <p:cNvPr id="24" name="Shape 22"/>
-          <p:cNvSpPr/>
-          <p:nvPr/>
-        </p:nvSpPr>
-        <p:spPr>
-          <a:xfrm>
-            <a:off x="796625" y="2122505"/>
-            <a:ext cx="190927" cy="190927"/>
-          </a:xfrm>
-          <a:prstGeom prst="roundRect">
-            <a:avLst>
-              <a:gd name="adj" fmla="val 181992"/>
-            </a:avLst>
-          </a:prstGeom>
-          <a:solidFill>
-            <a:srgbClr val="60A5FA">
-              <a:alpha val="80000"/>
-            </a:srgbClr>
-          </a:solidFill>
-          <a:ln w="12700">
-            <a:solidFill>
-              <a:srgbClr val="333333"/>
-            </a:solidFill>
-            <a:prstDash val="solid"/>
-          </a:ln>
-        </p:spPr>
-      </p:sp>
-      <p:sp>
-        <p:nvSpPr>
-          <p:cNvPr id="25" name="Text 23"/>
+          <p:cNvPr id="16" name="Text 14"/>
           <p:cNvSpPr/>
           <p:nvPr/>
         </p:nvSpPr>
@@ -15142,7 +11712,7 @@
       </p:sp>
       <p:sp>
         <p:nvSpPr>
-          <p:cNvPr id="26" name="Text 24"/>
+          <p:cNvPr id="17" name="Text 15"/>
           <p:cNvSpPr/>
           <p:nvPr/>
         </p:nvSpPr>
@@ -15162,9 +11732,6 @@
           <a:lstStyle/>
           <a:p>
             <a:pPr indent="0" marL="0">
-              <a:lnSpc>
-                <a:spcPct val="115000"/>
-              </a:lnSpc>
               <a:buNone/>
             </a:pPr>
             <a:r>
@@ -15184,7 +11751,7 @@
       </p:sp>
       <p:sp>
         <p:nvSpPr>
-          <p:cNvPr id="27" name="Shape 25"/>
+          <p:cNvPr id="18" name="Shape 16"/>
           <p:cNvSpPr/>
           <p:nvPr/>
         </p:nvSpPr>
@@ -15213,7 +11780,7 @@
       </p:sp>
       <p:sp>
         <p:nvSpPr>
-          <p:cNvPr id="28" name="Shape 26"/>
+          <p:cNvPr id="19" name="Shape 17"/>
           <p:cNvSpPr/>
           <p:nvPr/>
         </p:nvSpPr>
@@ -15235,7 +11802,7 @@
       </p:sp>
       <p:sp>
         <p:nvSpPr>
-          <p:cNvPr id="29" name="Shape 27"/>
+          <p:cNvPr id="20" name="Shape 18"/>
           <p:cNvSpPr/>
           <p:nvPr/>
         </p:nvSpPr>
@@ -15269,36 +11836,7 @@
       </p:sp>
       <p:sp>
         <p:nvSpPr>
-          <p:cNvPr id="30" name="Shape 28"/>
-          <p:cNvSpPr/>
-          <p:nvPr/>
-        </p:nvSpPr>
-        <p:spPr>
-          <a:xfrm>
-            <a:off x="796625" y="2744297"/>
-            <a:ext cx="190927" cy="190927"/>
-          </a:xfrm>
-          <a:prstGeom prst="roundRect">
-            <a:avLst>
-              <a:gd name="adj" fmla="val 181992"/>
-            </a:avLst>
-          </a:prstGeom>
-          <a:solidFill>
-            <a:srgbClr val="60A5FA">
-              <a:alpha val="80000"/>
-            </a:srgbClr>
-          </a:solidFill>
-          <a:ln w="12700">
-            <a:solidFill>
-              <a:srgbClr val="333333"/>
-            </a:solidFill>
-            <a:prstDash val="solid"/>
-          </a:ln>
-        </p:spPr>
-      </p:sp>
-      <p:sp>
-        <p:nvSpPr>
-          <p:cNvPr id="31" name="Text 29"/>
+          <p:cNvPr id="21" name="Text 19"/>
           <p:cNvSpPr/>
           <p:nvPr/>
         </p:nvSpPr>
@@ -15337,7 +11875,7 @@
       </p:sp>
       <p:sp>
         <p:nvSpPr>
-          <p:cNvPr id="32" name="Text 30"/>
+          <p:cNvPr id="22" name="Text 20"/>
           <p:cNvSpPr/>
           <p:nvPr/>
         </p:nvSpPr>
@@ -15357,9 +11895,6 @@
           <a:lstStyle/>
           <a:p>
             <a:pPr indent="0" marL="0">
-              <a:lnSpc>
-                <a:spcPct val="115000"/>
-              </a:lnSpc>
               <a:buNone/>
             </a:pPr>
             <a:r>
@@ -15379,7 +11914,7 @@
       </p:sp>
       <p:sp>
         <p:nvSpPr>
-          <p:cNvPr id="33" name="Shape 31"/>
+          <p:cNvPr id="23" name="Shape 21"/>
           <p:cNvSpPr/>
           <p:nvPr/>
         </p:nvSpPr>
@@ -15408,7 +11943,7 @@
       </p:sp>
       <p:sp>
         <p:nvSpPr>
-          <p:cNvPr id="34" name="Shape 32"/>
+          <p:cNvPr id="24" name="Shape 22"/>
           <p:cNvSpPr/>
           <p:nvPr/>
         </p:nvSpPr>
@@ -15430,7 +11965,7 @@
       </p:sp>
       <p:sp>
         <p:nvSpPr>
-          <p:cNvPr id="35" name="Shape 33"/>
+          <p:cNvPr id="25" name="Shape 23"/>
           <p:cNvSpPr/>
           <p:nvPr/>
         </p:nvSpPr>
@@ -15464,36 +11999,7 @@
       </p:sp>
       <p:sp>
         <p:nvSpPr>
-          <p:cNvPr id="36" name="Shape 34"/>
-          <p:cNvSpPr/>
-          <p:nvPr/>
-        </p:nvSpPr>
-        <p:spPr>
-          <a:xfrm>
-            <a:off x="796625" y="3366089"/>
-            <a:ext cx="190927" cy="190927"/>
-          </a:xfrm>
-          <a:prstGeom prst="roundRect">
-            <a:avLst>
-              <a:gd name="adj" fmla="val 181992"/>
-            </a:avLst>
-          </a:prstGeom>
-          <a:solidFill>
-            <a:srgbClr val="60A5FA">
-              <a:alpha val="80000"/>
-            </a:srgbClr>
-          </a:solidFill>
-          <a:ln w="12700">
-            <a:solidFill>
-              <a:srgbClr val="333333"/>
-            </a:solidFill>
-            <a:prstDash val="solid"/>
-          </a:ln>
-        </p:spPr>
-      </p:sp>
-      <p:sp>
-        <p:nvSpPr>
-          <p:cNvPr id="37" name="Text 35"/>
+          <p:cNvPr id="26" name="Text 24"/>
           <p:cNvSpPr/>
           <p:nvPr/>
         </p:nvSpPr>
@@ -15532,7 +12038,7 @@
       </p:sp>
       <p:sp>
         <p:nvSpPr>
-          <p:cNvPr id="38" name="Text 36"/>
+          <p:cNvPr id="27" name="Text 25"/>
           <p:cNvSpPr/>
           <p:nvPr/>
         </p:nvSpPr>
@@ -15552,9 +12058,6 @@
           <a:lstStyle/>
           <a:p>
             <a:pPr indent="0" marL="0">
-              <a:lnSpc>
-                <a:spcPct val="115000"/>
-              </a:lnSpc>
               <a:buNone/>
             </a:pPr>
             <a:r>
@@ -15574,7 +12077,7 @@
       </p:sp>
       <p:sp>
         <p:nvSpPr>
-          <p:cNvPr id="39" name="Shape 37"/>
+          <p:cNvPr id="28" name="Shape 26"/>
           <p:cNvSpPr/>
           <p:nvPr/>
         </p:nvSpPr>
@@ -15603,7 +12106,7 @@
       </p:sp>
       <p:sp>
         <p:nvSpPr>
-          <p:cNvPr id="40" name="Shape 38"/>
+          <p:cNvPr id="29" name="Shape 27"/>
           <p:cNvSpPr/>
           <p:nvPr/>
         </p:nvSpPr>
@@ -15625,7 +12128,7 @@
       </p:sp>
       <p:sp>
         <p:nvSpPr>
-          <p:cNvPr id="41" name="Shape 39"/>
+          <p:cNvPr id="30" name="Shape 28"/>
           <p:cNvSpPr/>
           <p:nvPr/>
         </p:nvSpPr>
@@ -15659,36 +12162,7 @@
       </p:sp>
       <p:sp>
         <p:nvSpPr>
-          <p:cNvPr id="42" name="Shape 40"/>
-          <p:cNvSpPr/>
-          <p:nvPr/>
-        </p:nvSpPr>
-        <p:spPr>
-          <a:xfrm>
-            <a:off x="796625" y="3987881"/>
-            <a:ext cx="190927" cy="190927"/>
-          </a:xfrm>
-          <a:prstGeom prst="roundRect">
-            <a:avLst>
-              <a:gd name="adj" fmla="val 181992"/>
-            </a:avLst>
-          </a:prstGeom>
-          <a:solidFill>
-            <a:srgbClr val="60A5FA">
-              <a:alpha val="80000"/>
-            </a:srgbClr>
-          </a:solidFill>
-          <a:ln w="12700">
-            <a:solidFill>
-              <a:srgbClr val="333333"/>
-            </a:solidFill>
-            <a:prstDash val="solid"/>
-          </a:ln>
-        </p:spPr>
-      </p:sp>
-      <p:sp>
-        <p:nvSpPr>
-          <p:cNvPr id="43" name="Text 41"/>
+          <p:cNvPr id="31" name="Text 29"/>
           <p:cNvSpPr/>
           <p:nvPr/>
         </p:nvSpPr>
@@ -15727,7 +12201,7 @@
       </p:sp>
       <p:sp>
         <p:nvSpPr>
-          <p:cNvPr id="44" name="Text 42"/>
+          <p:cNvPr id="32" name="Text 30"/>
           <p:cNvSpPr/>
           <p:nvPr/>
         </p:nvSpPr>
@@ -15747,9 +12221,6 @@
           <a:lstStyle/>
           <a:p>
             <a:pPr indent="0" marL="0">
-              <a:lnSpc>
-                <a:spcPct val="115000"/>
-              </a:lnSpc>
               <a:buNone/>
             </a:pPr>
             <a:r>
@@ -15769,14 +12240,14 @@
       </p:sp>
       <p:sp>
         <p:nvSpPr>
-          <p:cNvPr id="45" name="Shape 43"/>
-          <p:cNvSpPr/>
-          <p:nvPr/>
-        </p:nvSpPr>
-        <p:spPr>
-          <a:xfrm>
-            <a:off x="109728" y="4681728"/>
-            <a:ext cx="9034272" cy="457200"/>
+          <p:cNvPr id="33" name="Shape 31"/>
+          <p:cNvSpPr/>
+          <p:nvPr/>
+        </p:nvSpPr>
+        <p:spPr>
+          <a:xfrm>
+            <a:off x="2478024" y="4681728"/>
+            <a:ext cx="6665976" cy="457200"/>
           </a:xfrm>
           <a:prstGeom prst="rect">
             <a:avLst/>
@@ -15789,66 +12260,13 @@
       </p:sp>
       <p:sp>
         <p:nvSpPr>
-          <p:cNvPr id="46" name="Shape 44"/>
-          <p:cNvSpPr/>
-          <p:nvPr/>
-        </p:nvSpPr>
-        <p:spPr>
-          <a:xfrm>
-            <a:off x="109728" y="4681728"/>
-            <a:ext cx="2529596" cy="457200"/>
-          </a:xfrm>
-          <a:prstGeom prst="rect">
-            <a:avLst/>
-          </a:prstGeom>
-          <a:solidFill>
-            <a:srgbClr val="60A5FA">
-              <a:alpha val="90000"/>
-            </a:srgbClr>
-          </a:solidFill>
-          <a:ln/>
-        </p:spPr>
-      </p:sp>
-      <p:sp>
-        <p:nvSpPr>
-          <p:cNvPr id="47" name="Shape 45"/>
-          <p:cNvSpPr/>
-          <p:nvPr/>
-        </p:nvSpPr>
-        <p:spPr>
-          <a:xfrm>
-            <a:off x="8119872" y="4736592"/>
-            <a:ext cx="621792" cy="329184"/>
-          </a:xfrm>
-          <a:prstGeom prst="roundRect">
-            <a:avLst>
-              <a:gd name="adj" fmla="val 138889"/>
-            </a:avLst>
-          </a:prstGeom>
-          <a:solidFill>
-            <a:srgbClr val="FFFFFF">
-              <a:alpha val="15000"/>
-            </a:srgbClr>
-          </a:solidFill>
-          <a:ln w="6350">
-            <a:solidFill>
-              <a:srgbClr val="FFFFFF">
-                <a:alpha val="25000"/>
-              </a:srgbClr>
-            </a:solidFill>
-            <a:prstDash val="solid"/>
-          </a:ln>
-        </p:spPr>
-      </p:sp>
-      <p:sp>
-        <p:nvSpPr>
-          <p:cNvPr id="48" name="Text 46"/>
-          <p:cNvSpPr/>
-          <p:nvPr/>
-        </p:nvSpPr>
-        <p:spPr>
-          <a:xfrm>
-            <a:off x="8119872" y="4736592"/>
+          <p:cNvPr id="34" name="Text 32"/>
+          <p:cNvSpPr/>
+          <p:nvPr/>
+        </p:nvSpPr>
+        <p:spPr>
+          <a:xfrm>
+            <a:off x="8229600" y="4736592"/>
             <a:ext cx="621792" cy="329184"/>
           </a:xfrm>
           <a:prstGeom prst="rect">
@@ -15919,26 +12337,6 @@
         </p:nvSpPr>
         <p:spPr>
           <a:xfrm>
-            <a:off x="0" y="0"/>
-            <a:ext cx="109728" cy="5143500"/>
-          </a:xfrm>
-          <a:prstGeom prst="rect">
-            <a:avLst/>
-          </a:prstGeom>
-          <a:solidFill>
-            <a:srgbClr val="60A5FA"/>
-          </a:solidFill>
-          <a:ln/>
-        </p:spPr>
-      </p:sp>
-      <p:sp>
-        <p:nvSpPr>
-          <p:cNvPr id="3" name="Shape 1"/>
-          <p:cNvSpPr/>
-          <p:nvPr/>
-        </p:nvSpPr>
-        <p:spPr>
-          <a:xfrm>
             <a:off x="6720840" y="-182880"/>
             <a:ext cx="2743200" cy="2377440"/>
           </a:xfrm>
@@ -15960,7 +12358,7 @@
       </p:sp>
       <p:sp>
         <p:nvSpPr>
-          <p:cNvPr id="4" name="Shape 2"/>
+          <p:cNvPr id="3" name="Shape 1"/>
           <p:cNvSpPr/>
           <p:nvPr/>
         </p:nvSpPr>
@@ -15987,127 +12385,34 @@
       </p:sp>
       <p:sp>
         <p:nvSpPr>
+          <p:cNvPr id="4" name="Shape 2"/>
+          <p:cNvSpPr/>
+          <p:nvPr/>
+        </p:nvSpPr>
+        <p:spPr>
+          <a:xfrm>
+            <a:off x="0" y="0"/>
+            <a:ext cx="2423160" cy="5143500"/>
+          </a:xfrm>
+          <a:prstGeom prst="rect">
+            <a:avLst/>
+          </a:prstGeom>
+          <a:solidFill>
+            <a:srgbClr val="1E3A5F"/>
+          </a:solidFill>
+          <a:ln/>
+        </p:spPr>
+      </p:sp>
+      <p:sp>
+        <p:nvSpPr>
           <p:cNvPr id="5" name="Shape 3"/>
           <p:cNvSpPr/>
           <p:nvPr/>
         </p:nvSpPr>
         <p:spPr>
           <a:xfrm>
-            <a:off x="7909560" y="201168"/>
-            <a:ext cx="685800" cy="685800"/>
-          </a:xfrm>
-          <a:prstGeom prst="ellipse">
-            <a:avLst/>
-          </a:prstGeom>
-          <a:solidFill>
-            <a:srgbClr val="EFF6FF">
-              <a:alpha val="0"/>
-            </a:srgbClr>
-          </a:solidFill>
-          <a:ln w="15875">
-            <a:solidFill>
-              <a:srgbClr val="60A5FA"/>
-            </a:solidFill>
-            <a:prstDash val="solid"/>
-          </a:ln>
-        </p:spPr>
-      </p:sp>
-      <p:sp>
-        <p:nvSpPr>
-          <p:cNvPr id="6" name="Shape 4"/>
-          <p:cNvSpPr/>
-          <p:nvPr/>
-        </p:nvSpPr>
-        <p:spPr>
-          <a:xfrm>
-            <a:off x="8183880" y="384048"/>
-            <a:ext cx="384048" cy="384048"/>
-          </a:xfrm>
-          <a:prstGeom prst="ellipse">
-            <a:avLst/>
-          </a:prstGeom>
-          <a:solidFill>
-            <a:srgbClr val="60A5FA">
-              <a:alpha val="35000"/>
-            </a:srgbClr>
-          </a:solidFill>
-          <a:ln/>
-        </p:spPr>
-      </p:sp>
-      <p:sp>
-        <p:nvSpPr>
-          <p:cNvPr id="7" name="Shape 5"/>
-          <p:cNvSpPr/>
-          <p:nvPr/>
-        </p:nvSpPr>
-        <p:spPr>
-          <a:xfrm>
-            <a:off x="109728" y="0"/>
-            <a:ext cx="9034272" cy="960120"/>
-          </a:xfrm>
-          <a:prstGeom prst="rect">
-            <a:avLst/>
-          </a:prstGeom>
-          <a:solidFill>
-            <a:srgbClr val="1E3A5F"/>
-          </a:solidFill>
-          <a:ln/>
-        </p:spPr>
-      </p:sp>
-      <p:sp>
-        <p:nvSpPr>
-          <p:cNvPr id="8" name="Shape 6"/>
-          <p:cNvSpPr/>
-          <p:nvPr/>
-        </p:nvSpPr>
-        <p:spPr>
-          <a:xfrm>
-            <a:off x="4389120" y="0"/>
-            <a:ext cx="4754880" cy="960120"/>
-          </a:xfrm>
-          <a:prstGeom prst="rect">
-            <a:avLst/>
-          </a:prstGeom>
-          <a:solidFill>
-            <a:srgbClr val="2563EB">
-              <a:alpha val="75000"/>
-            </a:srgbClr>
-          </a:solidFill>
-          <a:ln/>
-        </p:spPr>
-      </p:sp>
-      <p:sp>
-        <p:nvSpPr>
-          <p:cNvPr id="9" name="Shape 7"/>
-          <p:cNvSpPr/>
-          <p:nvPr/>
-        </p:nvSpPr>
-        <p:spPr>
-          <a:xfrm rot="21000000">
-            <a:off x="6263640" y="-320040"/>
-            <a:ext cx="3108960" cy="1234440"/>
-          </a:xfrm>
-          <a:prstGeom prst="rect">
-            <a:avLst/>
-          </a:prstGeom>
-          <a:solidFill>
-            <a:srgbClr val="FFFFFF">
-              <a:alpha val="12000"/>
-            </a:srgbClr>
-          </a:solidFill>
-          <a:ln/>
-        </p:spPr>
-      </p:sp>
-      <p:sp>
-        <p:nvSpPr>
-          <p:cNvPr id="10" name="Shape 8"/>
-          <p:cNvSpPr/>
-          <p:nvPr/>
-        </p:nvSpPr>
-        <p:spPr>
-          <a:xfrm>
-            <a:off x="109728" y="932688"/>
-            <a:ext cx="9034272" cy="36576"/>
+            <a:off x="2423160" y="0"/>
+            <a:ext cx="54864" cy="5143500"/>
           </a:xfrm>
           <a:prstGeom prst="rect">
             <a:avLst/>
@@ -16120,45 +12425,14 @@
       </p:sp>
       <p:sp>
         <p:nvSpPr>
-          <p:cNvPr id="11" name="Shape 9"/>
-          <p:cNvSpPr/>
-          <p:nvPr/>
-        </p:nvSpPr>
-        <p:spPr>
-          <a:xfrm>
-            <a:off x="475488" y="91440"/>
-            <a:ext cx="960120" cy="201168"/>
-          </a:xfrm>
-          <a:prstGeom prst="roundRect">
-            <a:avLst>
-              <a:gd name="adj" fmla="val 227273"/>
-            </a:avLst>
-          </a:prstGeom>
-          <a:solidFill>
-            <a:srgbClr val="FFFFFF">
-              <a:alpha val="12000"/>
-            </a:srgbClr>
-          </a:solidFill>
-          <a:ln w="6350">
-            <a:solidFill>
-              <a:srgbClr val="FFFFFF">
-                <a:alpha val="20000"/>
-              </a:srgbClr>
-            </a:solidFill>
-            <a:prstDash val="solid"/>
-          </a:ln>
-        </p:spPr>
-      </p:sp>
-      <p:sp>
-        <p:nvSpPr>
-          <p:cNvPr id="12" name="Text 10"/>
-          <p:cNvSpPr/>
-          <p:nvPr/>
-        </p:nvSpPr>
-        <p:spPr>
-          <a:xfrm>
-            <a:off x="502920" y="109728"/>
-            <a:ext cx="914400" cy="164592"/>
+          <p:cNvPr id="6" name="Text 4"/>
+          <p:cNvSpPr/>
+          <p:nvPr/>
+        </p:nvSpPr>
+        <p:spPr>
+          <a:xfrm>
+            <a:off x="228600" y="411480"/>
+            <a:ext cx="1965960" cy="4114800"/>
           </a:xfrm>
           <a:prstGeom prst="rect">
             <a:avLst/>
@@ -16167,55 +12441,14 @@
           <a:ln/>
         </p:spPr>
         <p:txBody>
-          <a:bodyPr wrap="square" rtlCol="0" anchor="ctr"/>
+          <a:bodyPr wrap="square" rtlCol="0" anchor="t"/>
           <a:lstStyle/>
           <a:p>
             <a:pPr indent="0" marL="0">
               <a:buNone/>
             </a:pPr>
             <a:r>
-              <a:rPr lang="en-US" sz="700" b="1" spc="120" kern="0" dirty="0">
-                <a:solidFill>
-                  <a:srgbClr val="FFFFFF">
-                    <a:alpha val="75000"/>
-                  </a:srgbClr>
-                </a:solidFill>
-                <a:latin typeface="Microsoft YaHei" pitchFamily="34" charset="0"/>
-                <a:ea typeface="Microsoft YaHei" pitchFamily="34" charset="-122"/>
-                <a:cs typeface="Microsoft YaHei" pitchFamily="34" charset="-120"/>
-              </a:rPr>
-              <a:t>KEY POINTS</a:t>
-            </a:r>
-            <a:endParaRPr lang="en-US" sz="700" dirty="0"/>
-          </a:p>
-        </p:txBody>
-      </p:sp>
-      <p:sp>
-        <p:nvSpPr>
-          <p:cNvPr id="13" name="Text 11"/>
-          <p:cNvSpPr/>
-          <p:nvPr/>
-        </p:nvSpPr>
-        <p:spPr>
-          <a:xfrm>
-            <a:off x="502920" y="329184"/>
-            <a:ext cx="8046720" cy="530352"/>
-          </a:xfrm>
-          <a:prstGeom prst="rect">
-            <a:avLst/>
-          </a:prstGeom>
-          <a:noFill/>
-          <a:ln/>
-        </p:spPr>
-        <p:txBody>
-          <a:bodyPr wrap="square" rtlCol="0" anchor="t"/>
-          <a:lstStyle/>
-          <a:p>
-            <a:pPr indent="0" marL="0">
-              <a:buNone/>
-            </a:pPr>
-            <a:r>
-              <a:rPr lang="en-US" sz="2200" b="1" dirty="0">
+              <a:rPr lang="en-US" sz="1800" b="1" dirty="0">
                 <a:solidFill>
                   <a:srgbClr val="FFFFFF"/>
                 </a:solidFill>
@@ -16225,20 +12458,20 @@
               </a:rPr>
               <a:t>CC_TITLE</a:t>
             </a:r>
-            <a:endParaRPr lang="en-US" sz="2200" dirty="0"/>
-          </a:p>
-        </p:txBody>
-      </p:sp>
-      <p:sp>
-        <p:nvSpPr>
-          <p:cNvPr id="14" name="Shape 12"/>
-          <p:cNvSpPr/>
-          <p:nvPr/>
-        </p:nvSpPr>
-        <p:spPr>
-          <a:xfrm>
-            <a:off x="411480" y="1078992"/>
-            <a:ext cx="8321040" cy="3493008"/>
+            <a:endParaRPr lang="en-US" sz="1800" dirty="0"/>
+          </a:p>
+        </p:txBody>
+      </p:sp>
+      <p:sp>
+        <p:nvSpPr>
+          <p:cNvPr id="7" name="Shape 5"/>
+          <p:cNvSpPr/>
+          <p:nvPr/>
+        </p:nvSpPr>
+        <p:spPr>
+          <a:xfrm>
+            <a:off x="2606040" y="1078992"/>
+            <a:ext cx="6126480" cy="3493008"/>
           </a:xfrm>
           <a:prstGeom prst="roundRect">
             <a:avLst>
@@ -16265,7 +12498,7 @@
       </p:sp>
       <p:sp>
         <p:nvSpPr>
-          <p:cNvPr id="15" name="Shape 13"/>
+          <p:cNvPr id="8" name="Shape 6"/>
           <p:cNvSpPr/>
           <p:nvPr/>
         </p:nvSpPr>
@@ -16294,7 +12527,7 @@
       </p:sp>
       <p:sp>
         <p:nvSpPr>
-          <p:cNvPr id="16" name="Shape 14"/>
+          <p:cNvPr id="9" name="Shape 7"/>
           <p:cNvSpPr/>
           <p:nvPr/>
         </p:nvSpPr>
@@ -16316,7 +12549,7 @@
       </p:sp>
       <p:sp>
         <p:nvSpPr>
-          <p:cNvPr id="17" name="Shape 15"/>
+          <p:cNvPr id="10" name="Shape 8"/>
           <p:cNvSpPr/>
           <p:nvPr/>
         </p:nvSpPr>
@@ -16350,36 +12583,7 @@
       </p:sp>
       <p:sp>
         <p:nvSpPr>
-          <p:cNvPr id="18" name="Shape 16"/>
-          <p:cNvSpPr/>
-          <p:nvPr/>
-        </p:nvSpPr>
-        <p:spPr>
-          <a:xfrm>
-            <a:off x="796625" y="1500713"/>
-            <a:ext cx="190927" cy="190927"/>
-          </a:xfrm>
-          <a:prstGeom prst="roundRect">
-            <a:avLst>
-              <a:gd name="adj" fmla="val 181992"/>
-            </a:avLst>
-          </a:prstGeom>
-          <a:solidFill>
-            <a:srgbClr val="60A5FA">
-              <a:alpha val="80000"/>
-            </a:srgbClr>
-          </a:solidFill>
-          <a:ln w="12700">
-            <a:solidFill>
-              <a:srgbClr val="333333"/>
-            </a:solidFill>
-            <a:prstDash val="solid"/>
-          </a:ln>
-        </p:spPr>
-      </p:sp>
-      <p:sp>
-        <p:nvSpPr>
-          <p:cNvPr id="19" name="Text 17"/>
+          <p:cNvPr id="11" name="Text 9"/>
           <p:cNvSpPr/>
           <p:nvPr/>
         </p:nvSpPr>
@@ -16418,7 +12622,7 @@
       </p:sp>
       <p:sp>
         <p:nvSpPr>
-          <p:cNvPr id="20" name="Text 18"/>
+          <p:cNvPr id="12" name="Text 10"/>
           <p:cNvSpPr/>
           <p:nvPr/>
         </p:nvSpPr>
@@ -16438,9 +12642,6 @@
           <a:lstStyle/>
           <a:p>
             <a:pPr indent="0" marL="0">
-              <a:lnSpc>
-                <a:spcPct val="115000"/>
-              </a:lnSpc>
               <a:buNone/>
             </a:pPr>
             <a:r>
@@ -16460,7 +12661,7 @@
       </p:sp>
       <p:sp>
         <p:nvSpPr>
-          <p:cNvPr id="21" name="Shape 19"/>
+          <p:cNvPr id="13" name="Shape 11"/>
           <p:cNvSpPr/>
           <p:nvPr/>
         </p:nvSpPr>
@@ -16489,7 +12690,7 @@
       </p:sp>
       <p:sp>
         <p:nvSpPr>
-          <p:cNvPr id="22" name="Shape 20"/>
+          <p:cNvPr id="14" name="Shape 12"/>
           <p:cNvSpPr/>
           <p:nvPr/>
         </p:nvSpPr>
@@ -16511,7 +12712,7 @@
       </p:sp>
       <p:sp>
         <p:nvSpPr>
-          <p:cNvPr id="23" name="Shape 21"/>
+          <p:cNvPr id="15" name="Shape 13"/>
           <p:cNvSpPr/>
           <p:nvPr/>
         </p:nvSpPr>
@@ -16545,36 +12746,7 @@
       </p:sp>
       <p:sp>
         <p:nvSpPr>
-          <p:cNvPr id="24" name="Shape 22"/>
-          <p:cNvSpPr/>
-          <p:nvPr/>
-        </p:nvSpPr>
-        <p:spPr>
-          <a:xfrm>
-            <a:off x="796625" y="2122505"/>
-            <a:ext cx="190927" cy="190927"/>
-          </a:xfrm>
-          <a:prstGeom prst="roundRect">
-            <a:avLst>
-              <a:gd name="adj" fmla="val 181992"/>
-            </a:avLst>
-          </a:prstGeom>
-          <a:solidFill>
-            <a:srgbClr val="60A5FA">
-              <a:alpha val="80000"/>
-            </a:srgbClr>
-          </a:solidFill>
-          <a:ln w="12700">
-            <a:solidFill>
-              <a:srgbClr val="333333"/>
-            </a:solidFill>
-            <a:prstDash val="solid"/>
-          </a:ln>
-        </p:spPr>
-      </p:sp>
-      <p:sp>
-        <p:nvSpPr>
-          <p:cNvPr id="25" name="Text 23"/>
+          <p:cNvPr id="16" name="Text 14"/>
           <p:cNvSpPr/>
           <p:nvPr/>
         </p:nvSpPr>
@@ -16613,7 +12785,7 @@
       </p:sp>
       <p:sp>
         <p:nvSpPr>
-          <p:cNvPr id="26" name="Text 24"/>
+          <p:cNvPr id="17" name="Text 15"/>
           <p:cNvSpPr/>
           <p:nvPr/>
         </p:nvSpPr>
@@ -16633,9 +12805,6 @@
           <a:lstStyle/>
           <a:p>
             <a:pPr indent="0" marL="0">
-              <a:lnSpc>
-                <a:spcPct val="115000"/>
-              </a:lnSpc>
               <a:buNone/>
             </a:pPr>
             <a:r>
@@ -16655,7 +12824,7 @@
       </p:sp>
       <p:sp>
         <p:nvSpPr>
-          <p:cNvPr id="27" name="Shape 25"/>
+          <p:cNvPr id="18" name="Shape 16"/>
           <p:cNvSpPr/>
           <p:nvPr/>
         </p:nvSpPr>
@@ -16684,7 +12853,7 @@
       </p:sp>
       <p:sp>
         <p:nvSpPr>
-          <p:cNvPr id="28" name="Shape 26"/>
+          <p:cNvPr id="19" name="Shape 17"/>
           <p:cNvSpPr/>
           <p:nvPr/>
         </p:nvSpPr>
@@ -16706,7 +12875,7 @@
       </p:sp>
       <p:sp>
         <p:nvSpPr>
-          <p:cNvPr id="29" name="Shape 27"/>
+          <p:cNvPr id="20" name="Shape 18"/>
           <p:cNvSpPr/>
           <p:nvPr/>
         </p:nvSpPr>
@@ -16740,36 +12909,7 @@
       </p:sp>
       <p:sp>
         <p:nvSpPr>
-          <p:cNvPr id="30" name="Shape 28"/>
-          <p:cNvSpPr/>
-          <p:nvPr/>
-        </p:nvSpPr>
-        <p:spPr>
-          <a:xfrm>
-            <a:off x="796625" y="2744297"/>
-            <a:ext cx="190927" cy="190927"/>
-          </a:xfrm>
-          <a:prstGeom prst="roundRect">
-            <a:avLst>
-              <a:gd name="adj" fmla="val 181992"/>
-            </a:avLst>
-          </a:prstGeom>
-          <a:solidFill>
-            <a:srgbClr val="60A5FA">
-              <a:alpha val="80000"/>
-            </a:srgbClr>
-          </a:solidFill>
-          <a:ln w="12700">
-            <a:solidFill>
-              <a:srgbClr val="333333"/>
-            </a:solidFill>
-            <a:prstDash val="solid"/>
-          </a:ln>
-        </p:spPr>
-      </p:sp>
-      <p:sp>
-        <p:nvSpPr>
-          <p:cNvPr id="31" name="Text 29"/>
+          <p:cNvPr id="21" name="Text 19"/>
           <p:cNvSpPr/>
           <p:nvPr/>
         </p:nvSpPr>
@@ -16808,7 +12948,7 @@
       </p:sp>
       <p:sp>
         <p:nvSpPr>
-          <p:cNvPr id="32" name="Text 30"/>
+          <p:cNvPr id="22" name="Text 20"/>
           <p:cNvSpPr/>
           <p:nvPr/>
         </p:nvSpPr>
@@ -16828,9 +12968,6 @@
           <a:lstStyle/>
           <a:p>
             <a:pPr indent="0" marL="0">
-              <a:lnSpc>
-                <a:spcPct val="115000"/>
-              </a:lnSpc>
               <a:buNone/>
             </a:pPr>
             <a:r>
@@ -16850,7 +12987,7 @@
       </p:sp>
       <p:sp>
         <p:nvSpPr>
-          <p:cNvPr id="33" name="Shape 31"/>
+          <p:cNvPr id="23" name="Shape 21"/>
           <p:cNvSpPr/>
           <p:nvPr/>
         </p:nvSpPr>
@@ -16879,7 +13016,7 @@
       </p:sp>
       <p:sp>
         <p:nvSpPr>
-          <p:cNvPr id="34" name="Shape 32"/>
+          <p:cNvPr id="24" name="Shape 22"/>
           <p:cNvSpPr/>
           <p:nvPr/>
         </p:nvSpPr>
@@ -16901,7 +13038,7 @@
       </p:sp>
       <p:sp>
         <p:nvSpPr>
-          <p:cNvPr id="35" name="Shape 33"/>
+          <p:cNvPr id="25" name="Shape 23"/>
           <p:cNvSpPr/>
           <p:nvPr/>
         </p:nvSpPr>
@@ -16935,36 +13072,7 @@
       </p:sp>
       <p:sp>
         <p:nvSpPr>
-          <p:cNvPr id="36" name="Shape 34"/>
-          <p:cNvSpPr/>
-          <p:nvPr/>
-        </p:nvSpPr>
-        <p:spPr>
-          <a:xfrm>
-            <a:off x="796625" y="3366089"/>
-            <a:ext cx="190927" cy="190927"/>
-          </a:xfrm>
-          <a:prstGeom prst="roundRect">
-            <a:avLst>
-              <a:gd name="adj" fmla="val 181992"/>
-            </a:avLst>
-          </a:prstGeom>
-          <a:solidFill>
-            <a:srgbClr val="60A5FA">
-              <a:alpha val="80000"/>
-            </a:srgbClr>
-          </a:solidFill>
-          <a:ln w="12700">
-            <a:solidFill>
-              <a:srgbClr val="333333"/>
-            </a:solidFill>
-            <a:prstDash val="solid"/>
-          </a:ln>
-        </p:spPr>
-      </p:sp>
-      <p:sp>
-        <p:nvSpPr>
-          <p:cNvPr id="37" name="Text 35"/>
+          <p:cNvPr id="26" name="Text 24"/>
           <p:cNvSpPr/>
           <p:nvPr/>
         </p:nvSpPr>
@@ -17003,7 +13111,7 @@
       </p:sp>
       <p:sp>
         <p:nvSpPr>
-          <p:cNvPr id="38" name="Text 36"/>
+          <p:cNvPr id="27" name="Text 25"/>
           <p:cNvSpPr/>
           <p:nvPr/>
         </p:nvSpPr>
@@ -17023,9 +13131,6 @@
           <a:lstStyle/>
           <a:p>
             <a:pPr indent="0" marL="0">
-              <a:lnSpc>
-                <a:spcPct val="115000"/>
-              </a:lnSpc>
               <a:buNone/>
             </a:pPr>
             <a:r>
@@ -17045,7 +13150,7 @@
       </p:sp>
       <p:sp>
         <p:nvSpPr>
-          <p:cNvPr id="39" name="Shape 37"/>
+          <p:cNvPr id="28" name="Shape 26"/>
           <p:cNvSpPr/>
           <p:nvPr/>
         </p:nvSpPr>
@@ -17074,7 +13179,7 @@
       </p:sp>
       <p:sp>
         <p:nvSpPr>
-          <p:cNvPr id="40" name="Shape 38"/>
+          <p:cNvPr id="29" name="Shape 27"/>
           <p:cNvSpPr/>
           <p:nvPr/>
         </p:nvSpPr>
@@ -17096,7 +13201,7 @@
       </p:sp>
       <p:sp>
         <p:nvSpPr>
-          <p:cNvPr id="41" name="Shape 39"/>
+          <p:cNvPr id="30" name="Shape 28"/>
           <p:cNvSpPr/>
           <p:nvPr/>
         </p:nvSpPr>
@@ -17130,36 +13235,7 @@
       </p:sp>
       <p:sp>
         <p:nvSpPr>
-          <p:cNvPr id="42" name="Shape 40"/>
-          <p:cNvSpPr/>
-          <p:nvPr/>
-        </p:nvSpPr>
-        <p:spPr>
-          <a:xfrm>
-            <a:off x="796625" y="3987881"/>
-            <a:ext cx="190927" cy="190927"/>
-          </a:xfrm>
-          <a:prstGeom prst="roundRect">
-            <a:avLst>
-              <a:gd name="adj" fmla="val 181992"/>
-            </a:avLst>
-          </a:prstGeom>
-          <a:solidFill>
-            <a:srgbClr val="60A5FA">
-              <a:alpha val="80000"/>
-            </a:srgbClr>
-          </a:solidFill>
-          <a:ln w="12700">
-            <a:solidFill>
-              <a:srgbClr val="333333"/>
-            </a:solidFill>
-            <a:prstDash val="solid"/>
-          </a:ln>
-        </p:spPr>
-      </p:sp>
-      <p:sp>
-        <p:nvSpPr>
-          <p:cNvPr id="43" name="Text 41"/>
+          <p:cNvPr id="31" name="Text 29"/>
           <p:cNvSpPr/>
           <p:nvPr/>
         </p:nvSpPr>
@@ -17198,7 +13274,7 @@
       </p:sp>
       <p:sp>
         <p:nvSpPr>
-          <p:cNvPr id="44" name="Text 42"/>
+          <p:cNvPr id="32" name="Text 30"/>
           <p:cNvSpPr/>
           <p:nvPr/>
         </p:nvSpPr>
@@ -17218,9 +13294,6 @@
           <a:lstStyle/>
           <a:p>
             <a:pPr indent="0" marL="0">
-              <a:lnSpc>
-                <a:spcPct val="115000"/>
-              </a:lnSpc>
               <a:buNone/>
             </a:pPr>
             <a:r>
@@ -17240,14 +13313,14 @@
       </p:sp>
       <p:sp>
         <p:nvSpPr>
-          <p:cNvPr id="45" name="Shape 43"/>
-          <p:cNvSpPr/>
-          <p:nvPr/>
-        </p:nvSpPr>
-        <p:spPr>
-          <a:xfrm>
-            <a:off x="109728" y="4681728"/>
-            <a:ext cx="9034272" cy="457200"/>
+          <p:cNvPr id="33" name="Shape 31"/>
+          <p:cNvSpPr/>
+          <p:nvPr/>
+        </p:nvSpPr>
+        <p:spPr>
+          <a:xfrm>
+            <a:off x="2478024" y="4681728"/>
+            <a:ext cx="6665976" cy="457200"/>
           </a:xfrm>
           <a:prstGeom prst="rect">
             <a:avLst/>
@@ -17260,66 +13333,13 @@
       </p:sp>
       <p:sp>
         <p:nvSpPr>
-          <p:cNvPr id="46" name="Shape 44"/>
-          <p:cNvSpPr/>
-          <p:nvPr/>
-        </p:nvSpPr>
-        <p:spPr>
-          <a:xfrm>
-            <a:off x="109728" y="4681728"/>
-            <a:ext cx="2529596" cy="457200"/>
-          </a:xfrm>
-          <a:prstGeom prst="rect">
-            <a:avLst/>
-          </a:prstGeom>
-          <a:solidFill>
-            <a:srgbClr val="60A5FA">
-              <a:alpha val="90000"/>
-            </a:srgbClr>
-          </a:solidFill>
-          <a:ln/>
-        </p:spPr>
-      </p:sp>
-      <p:sp>
-        <p:nvSpPr>
-          <p:cNvPr id="47" name="Shape 45"/>
-          <p:cNvSpPr/>
-          <p:nvPr/>
-        </p:nvSpPr>
-        <p:spPr>
-          <a:xfrm>
-            <a:off x="8119872" y="4736592"/>
-            <a:ext cx="621792" cy="329184"/>
-          </a:xfrm>
-          <a:prstGeom prst="roundRect">
-            <a:avLst>
-              <a:gd name="adj" fmla="val 138889"/>
-            </a:avLst>
-          </a:prstGeom>
-          <a:solidFill>
-            <a:srgbClr val="FFFFFF">
-              <a:alpha val="15000"/>
-            </a:srgbClr>
-          </a:solidFill>
-          <a:ln w="6350">
-            <a:solidFill>
-              <a:srgbClr val="FFFFFF">
-                <a:alpha val="25000"/>
-              </a:srgbClr>
-            </a:solidFill>
-            <a:prstDash val="solid"/>
-          </a:ln>
-        </p:spPr>
-      </p:sp>
-      <p:sp>
-        <p:nvSpPr>
-          <p:cNvPr id="48" name="Text 46"/>
-          <p:cNvSpPr/>
-          <p:nvPr/>
-        </p:nvSpPr>
-        <p:spPr>
-          <a:xfrm>
-            <a:off x="8119872" y="4736592"/>
+          <p:cNvPr id="34" name="Text 32"/>
+          <p:cNvSpPr/>
+          <p:nvPr/>
+        </p:nvSpPr>
+        <p:spPr>
+          <a:xfrm>
+            <a:off x="8229600" y="4736592"/>
             <a:ext cx="621792" cy="329184"/>
           </a:xfrm>
           <a:prstGeom prst="rect">
